--- a/docs/ceo-deck/Getting our filings ready for AI.pptx
+++ b/docs/ceo-deck/Getting our filings ready for AI.pptx
@@ -118,14 +118,14 @@
   <p:extLst>
     <p:ext uri="{521415D9-36F7-43E2-AB2F-B90AF26B5E84}">
       <p14:sectionLst xmlns:p14="http://schemas.microsoft.com/office/powerpoint/2010/main">
-        <p14:section name="The record" id="{e8b4385b-f3ab-71ad-6476-b05818c06270}">
+        <p14:section name="The record" id="{22c158b1-4c91-75b6-b001-30895f459a6b}">
           <p14:sldIdLst>
             <p14:sldId id="256"/>
             <p14:sldId id="257"/>
             <p14:sldId id="258"/>
           </p14:sldIdLst>
         </p14:section>
-        <p14:section name="The problems" id="{c40cbb1f-57db-1144-ab48-e7278e369c97}">
+        <p14:section name="The problems" id="{6e93f080-5a12-3c80-28e7-1bf88e47637f}">
           <p14:sldIdLst>
             <p14:sldId id="259"/>
             <p14:sldId id="260"/>
@@ -134,14 +134,14 @@
             <p14:sldId id="263"/>
           </p14:sldIdLst>
         </p14:section>
-        <p14:section name="The solution" id="{b9db8805-b872-e29d-9e43-9315eaef87f8}">
+        <p14:section name="The solution" id="{9e0fd384-9063-cacc-8af3-905d85a77f78}">
           <p14:sldIdLst>
             <p14:sldId id="264"/>
             <p14:sldId id="265"/>
             <p14:sldId id="266"/>
           </p14:sldIdLst>
         </p14:section>
-        <p14:section name="Making change happen" id="{3d40badb-5c15-a5d7-85c8-fdb5485bb927}">
+        <p14:section name="Making change happen" id="{9e72e299-1103-6b68-245d-dd3170333f89}">
           <p14:sldIdLst>
             <p14:sldId id="267"/>
           </p14:sldIdLst>
@@ -814,7 +814,7 @@
           <a:p>
             <a:r>
               <a:rPr lang="en-US" dirty="0"/>
-              <a:t>These lessons apply well beyond filings. AI is only as good as its data, so fix data where it is created. Failures are silent - a system can look finished and still be wrong, so ask for proof. Rules beat advice - build checks into systems rather than writing more guidance. And small habits add up - printing documents just to sign them created nearly half of this problem. What we are asking for: stand up an AI build team and a cloud strategy with an executive sponsor; change our filing rules and portal through the Rules of Practice review that is already under way; and start now with two quick wins - the automatic upload check, and a privacy review of the documents whose redactions do not hide anything.</a:t>
+              <a:t>These lessons apply well beyond filings. AI is only as good as its data, so fix data where it is created. Failures are silent - a system can look finished and still be wrong, so ask for proof. Rules beat advice - build checks into systems rather than writing more guidance. And small habits add up - printing documents just to sign them created nearly half of this problem. What we are asking for: stand up an AI build team and a cloud strategy with an executive sponsor; change our filing rules and portal through the Rules of Practice review that is already under way; and start now with two quick wins - the automatic upload check, and a privacy review of the documents whose redactions do not hide anything. Others have reached the same conclusion: the UK Local Government Association's playbook for agentic AI (October 2026) says agentic AI is not primarily a technology challenge, and that adoption depends on data maturity, process clarity and leadership discipline as much as on technical capability.</a:t>
             </a:r>
             <a:endParaRPr lang="en-US" dirty="0"/>
           </a:p>
@@ -4663,6 +4663,42 @@
               <a:t>Start now with two quick wins: the automatic upload check, and a privacy review of flawed redactions</a:t>
             </a:r>
             <a:endParaRPr lang="en-US" sz="1700" dirty="0"/>
+          </a:p>
+        </p:txBody>
+      </p:sp>
+      <p:sp>
+        <p:nvSpPr>
+          <p:cNvPr id="14" name="Text 12"/>
+          <p:cNvSpPr txBox="1"/>
+          <p:nvPr/>
+        </p:nvSpPr>
+        <p:spPr>
+          <a:xfrm>
+            <a:off x="548640" y="6263640"/>
+            <a:ext cx="10424160" cy="365760"/>
+          </a:xfrm>
+          <a:prstGeom prst="rect">
+            <a:avLst/>
+          </a:prstGeom>
+          <a:noFill/>
+          <a:ln/>
+        </p:spPr>
+        <p:txBody>
+          <a:bodyPr wrap="square" lIns="0" tIns="0" rIns="0" bIns="0" rtlCol="0" anchor="ctr"/>
+          <a:lstStyle/>
+          <a:p>
+            <a:pPr indent="0" marL="0">
+              <a:buNone/>
+            </a:pPr>
+            <a:r>
+              <a:rPr lang="en-US" sz="1200" i="1" dirty="0">
+                <a:solidFill>
+                  <a:schemeClr val="bg2"/>
+                </a:solidFill>
+              </a:rPr>
+              <a:t>“Agentic AI is not primarily a technology challenge.”  — UK Local Government Association, 2026</a:t>
+            </a:r>
+            <a:endParaRPr lang="en-US" sz="1200" dirty="0"/>
           </a:p>
         </p:txBody>
       </p:sp>

--- a/docs/ceo-deck/Getting our filings ready for AI.pptx
+++ b/docs/ceo-deck/Getting our filings ready for AI.pptx
@@ -17,9 +17,10 @@
     <p:sldId id="265" r:id="rId11"/>
     <p:sldId id="266" r:id="rId12"/>
     <p:sldId id="267" r:id="rId13"/>
+    <p:sldId id="268" r:id="rId14"/>
   </p:sldIdLst>
   <p:notesMasterIdLst>
-    <p:notesMasterId r:id="rId14"/>
+    <p:notesMasterId r:id="rId15"/>
   </p:notesMasterIdLst>
   <p:sldSz cx="12192000" cy="6858000"/>
   <p:notesSz cx="6858000" cy="12192000"/>
@@ -118,14 +119,14 @@
   <p:extLst>
     <p:ext uri="{521415D9-36F7-43E2-AB2F-B90AF26B5E84}">
       <p14:sectionLst xmlns:p14="http://schemas.microsoft.com/office/powerpoint/2010/main">
-        <p14:section name="The record" id="{22c158b1-4c91-75b6-b001-30895f459a6b}">
+        <p14:section name="The record" id="{a197ede7-47a3-55fe-98ef-ac215573e20d}">
           <p14:sldIdLst>
             <p14:sldId id="256"/>
             <p14:sldId id="257"/>
             <p14:sldId id="258"/>
           </p14:sldIdLst>
         </p14:section>
-        <p14:section name="The problems" id="{6e93f080-5a12-3c80-28e7-1bf88e47637f}">
+        <p14:section name="The problems" id="{d85d5ecd-789f-e77b-3b01-c35fd32a82ec}">
           <p14:sldIdLst>
             <p14:sldId id="259"/>
             <p14:sldId id="260"/>
@@ -134,16 +135,17 @@
             <p14:sldId id="263"/>
           </p14:sldIdLst>
         </p14:section>
-        <p14:section name="The solution" id="{9e0fd384-9063-cacc-8af3-905d85a77f78}">
+        <p14:section name="The solution" id="{3a02df9b-f853-01bf-7581-4ce91f1a5b81}">
           <p14:sldIdLst>
             <p14:sldId id="264"/>
             <p14:sldId id="265"/>
             <p14:sldId id="266"/>
+            <p14:sldId id="267"/>
           </p14:sldIdLst>
         </p14:section>
-        <p14:section name="Making change happen" id="{9e72e299-1103-6b68-245d-dd3170333f89}">
+        <p14:section name="Making change happen" id="{0d751de8-63fd-82d1-4f45-ab9c56eb515b}">
           <p14:sldIdLst>
-            <p14:sldId id="267"/>
+            <p14:sldId id="268"/>
           </p14:sldIdLst>
         </p14:section>
       </p14:sectionLst>
@@ -814,7 +816,7 @@
           <a:p>
             <a:r>
               <a:rPr lang="en-US" dirty="0"/>
-              <a:t>These lessons apply well beyond filings. AI is only as good as its data, so fix data where it is created. Failures are silent - a system can look finished and still be wrong, so ask for proof. Rules beat advice - build checks into systems rather than writing more guidance. And small habits add up - printing documents just to sign them created nearly half of this problem. What we are asking for: stand up an AI build team and a cloud strategy with an executive sponsor; change our filing rules and portal through the Rules of Practice review that is already under way; and start now with two quick wins - the automatic upload check, and a privacy review of the documents whose redactions do not hide anything. Others have reached the same conclusion: the UK Local Government Association's playbook for agentic AI (October 2026) says agentic AI is not primarily a technology challenge, and that adoption depends on data maturity, process clarity and leadership discipline as much as on technical capability.</a:t>
+              <a:t>How to start safely, drawing on the UK Local Government Association's playbook for agentic AI (October 2026), written with councils and endorsed by the LGA. Scale governance with risk, in three tiers. Tier one is personal use - drafting and summarising - low risk, covered by staff guidance. Tier two is team use - knowledge assistants and triage within a service - with a named service owner and central oversight. Tier three is organisation-wide, public-facing or decision support, which needs formal approval and assurance. And manage each AI tool like a new employee: a job description that sets its task, data and limits; a trial period before full roll-out; performance reviews; and the ability to switch it off, with a person always accountable. Train every level - all staff to use AI safely, team leads to build it into their work, and executives to weigh risk and value. The playbook's cyber-security guidance was co-written with the Canadian Centre for Cyber Security.</a:t>
             </a:r>
             <a:endParaRPr lang="en-US" dirty="0"/>
           </a:p>
@@ -838,6 +840,94 @@
             <a:fld id="{F7021451-1387-4CA6-816F-3879F97B5CBC}" type="slidenum">
               <a:rPr lang="en-US"/>
               <a:t>12</a:t>
+            </a:fld>
+            <a:endParaRPr lang="en-US"/>
+          </a:p>
+        </p:txBody>
+      </p:sp>
+    </p:spTree>
+    <p:extLst>
+      <p:ext uri="{BB962C8B-B14F-4D97-AF65-F5344CB8AC3E}">
+        <p14:creationId xmlns:p14="http://schemas.microsoft.com/office/powerpoint/2010/main" val="1024086991"/>
+      </p:ext>
+    </p:extLst>
+  </p:cSld>
+  <p:clrMapOvr>
+    <a:masterClrMapping/>
+  </p:clrMapOvr>
+</p:notes>
+</file>
+
+<file path=ppt/notesSlides/notesSlide13.xml><?xml version="1.0" encoding="utf-8"?>
+<p:notes xmlns:a="http://schemas.openxmlformats.org/drawingml/2006/main" xmlns:r="http://schemas.openxmlformats.org/officeDocument/2006/relationships" xmlns:p="http://schemas.openxmlformats.org/presentationml/2006/main">
+  <p:cSld>
+    <p:spTree>
+      <p:nvGrpSpPr>
+        <p:cNvPr id="1" name=""/>
+        <p:cNvGrpSpPr/>
+        <p:nvPr/>
+      </p:nvGrpSpPr>
+      <p:grpSpPr>
+        <a:xfrm>
+          <a:off x="0" y="0"/>
+          <a:ext cx="0" cy="0"/>
+          <a:chOff x="0" y="0"/>
+          <a:chExt cx="0" cy="0"/>
+        </a:xfrm>
+      </p:grpSpPr>
+      <p:sp>
+        <p:nvSpPr>
+          <p:cNvPr id="2" name="Slide Image Placeholder 1"/>
+          <p:cNvSpPr>
+            <a:spLocks noGrp="1" noRot="1" noChangeAspect="1"/>
+          </p:cNvSpPr>
+          <p:nvPr>
+            <p:ph type="sldImg"/>
+          </p:nvPr>
+        </p:nvSpPr>
+        <p:spPr/>
+      </p:sp>
+      <p:sp>
+        <p:nvSpPr>
+          <p:cNvPr id="3" name="Notes Placeholder 2"/>
+          <p:cNvSpPr>
+            <a:spLocks noGrp="1"/>
+          </p:cNvSpPr>
+          <p:nvPr>
+            <p:ph type="body" idx="1"/>
+          </p:nvPr>
+        </p:nvSpPr>
+        <p:spPr/>
+        <p:txBody>
+          <a:bodyPr/>
+          <a:lstStyle/>
+          <a:p>
+            <a:r>
+              <a:rPr lang="en-US" dirty="0"/>
+              <a:t>These lessons apply well beyond filings. AI is only as good as its data, so fix data where it is created. Failures are silent - a system can look finished and still be wrong, so ask for proof. Rules beat advice - build checks into systems rather than writing more guidance. And small habits add up - printing documents just to sign them created nearly half of this problem. What we are asking for: stand up an AI build team and a cloud strategy with an executive sponsor; change our filing rules and portal through the Rules of Practice review that is already under way; and start now with two quick wins - the automatic upload check, and a privacy review of the documents whose redactions do not hide anything. Others have reached the same conclusion: the UK Local Government Association's playbook for agentic AI (October 2026) says agentic AI is not primarily a technology challenge, and that adoption depends on data maturity, process clarity and leadership discipline as much as on technical capability.</a:t>
+            </a:r>
+            <a:endParaRPr lang="en-US" dirty="0"/>
+          </a:p>
+        </p:txBody>
+      </p:sp>
+      <p:sp>
+        <p:nvSpPr>
+          <p:cNvPr id="4" name="Slide Number Placeholder 3"/>
+          <p:cNvSpPr>
+            <a:spLocks noGrp="1"/>
+          </p:cNvSpPr>
+          <p:nvPr>
+            <p:ph type="sldNum" sz="quarter" idx="10"/>
+          </p:nvPr>
+        </p:nvSpPr>
+        <p:spPr/>
+        <p:txBody>
+          <a:bodyPr/>
+          <a:lstStyle/>
+          <a:p>
+            <a:fld id="{F7021451-1387-4CA6-816F-3879F97B5CBC}" type="slidenum">
+              <a:rPr lang="en-US"/>
+              <a:t>13</a:t>
             </a:fld>
             <a:endParaRPr lang="en-US"/>
           </a:p>
@@ -1078,7 +1168,7 @@
           <a:p>
             <a:r>
               <a:rPr lang="en-US" dirty="0"/>
-              <a:t>Here is the headline. About one document in four in our record cannot be read reliably by a computer. Any AI tool we put on top of this record - search, summaries, assistants for reviewers - can only be as good as what it reads. For a quarter of the record, it would be guessing at pictures of pages, or reading text that is simply wrong.</a:t>
+              <a:t>Here is the headline. About one document in four in our record cannot be read reliably by a computer. Any AI tool we put on top of this record - search, summaries, assistants for reviewers - can only be as good as what it reads. For a quarter of the record, it would be guessing at pictures of pages, or reading text that is simply wrong. The UK Local Government Association put it well in its October 2026 playbook for agentic AI: AI will not fix unclear processes, weak ownership or poor-quality data - in many cases it will make those weaknesses more visible.</a:t>
             </a:r>
             <a:endParaRPr lang="en-US" dirty="0"/>
           </a:p>
@@ -4235,10 +4325,10 @@
             <a:r>
               <a:rPr lang="en-US" sz="3400" b="1" dirty="0">
                 <a:solidFill>
-                  <a:schemeClr val="bg1"/>
-                </a:solidFill>
-              </a:rPr>
-              <a:t>Lessons for every part of the organization</a:t>
+                  <a:schemeClr val="tx2"/>
+                </a:solidFill>
+              </a:rPr>
+              <a:t>Start small, scale with care</a:t>
             </a:r>
             <a:endParaRPr lang="en-US" sz="3400" dirty="0"/>
           </a:p>
@@ -4246,324 +4336,316 @@
       </p:sp>
       <p:sp>
         <p:nvSpPr>
-          <p:cNvPr id="3" name="Text 1"/>
-          <p:cNvSpPr txBox="1"/>
-          <p:nvPr/>
-        </p:nvSpPr>
-        <p:spPr>
-          <a:xfrm>
-            <a:off x="548640" y="1417320"/>
-            <a:ext cx="5394960" cy="502920"/>
-          </a:xfrm>
-          <a:prstGeom prst="rect">
-            <a:avLst/>
-          </a:prstGeom>
-          <a:noFill/>
-          <a:ln/>
-        </p:spPr>
-        <p:txBody>
-          <a:bodyPr wrap="square" lIns="0" tIns="0" rIns="0" bIns="0" rtlCol="0" anchor="ctr"/>
-          <a:lstStyle/>
-          <a:p>
-            <a:pPr indent="0" marL="0">
-              <a:buNone/>
-            </a:pPr>
-            <a:r>
-              <a:rPr lang="en-US" sz="2100" b="1" dirty="0">
-                <a:solidFill>
-                  <a:schemeClr val="accent1"/>
-                </a:solidFill>
-              </a:rPr>
-              <a:t>AI is only as good as its data</a:t>
-            </a:r>
-            <a:endParaRPr lang="en-US" sz="2100" dirty="0"/>
-          </a:p>
-        </p:txBody>
-      </p:sp>
-      <p:sp>
-        <p:nvSpPr>
-          <p:cNvPr id="4" name="Text 2"/>
-          <p:cNvSpPr txBox="1"/>
-          <p:nvPr/>
-        </p:nvSpPr>
-        <p:spPr>
-          <a:xfrm>
-            <a:off x="548640" y="1920240"/>
-            <a:ext cx="5394960" cy="548640"/>
-          </a:xfrm>
-          <a:prstGeom prst="rect">
-            <a:avLst/>
-          </a:prstGeom>
-          <a:noFill/>
-          <a:ln/>
-        </p:spPr>
-        <p:txBody>
-          <a:bodyPr wrap="square" lIns="0" tIns="0" rIns="0" bIns="0" rtlCol="0" anchor="t"/>
-          <a:lstStyle/>
-          <a:p>
-            <a:pPr indent="0" marL="0">
-              <a:buNone/>
-            </a:pPr>
-            <a:r>
-              <a:rPr lang="en-US" sz="1600" dirty="0">
-                <a:solidFill>
-                  <a:schemeClr val="bg2"/>
-                </a:solidFill>
-              </a:rPr>
-              <a:t>Fix data where it is created, not after.</a:t>
-            </a:r>
-            <a:endParaRPr lang="en-US" sz="1600" dirty="0"/>
-          </a:p>
-        </p:txBody>
-      </p:sp>
-      <p:sp>
-        <p:nvSpPr>
-          <p:cNvPr id="5" name="Text 3"/>
-          <p:cNvSpPr txBox="1"/>
-          <p:nvPr/>
-        </p:nvSpPr>
-        <p:spPr>
-          <a:xfrm>
-            <a:off x="6217920" y="1417320"/>
-            <a:ext cx="5394960" cy="502920"/>
-          </a:xfrm>
-          <a:prstGeom prst="rect">
-            <a:avLst/>
-          </a:prstGeom>
-          <a:noFill/>
-          <a:ln/>
-        </p:spPr>
-        <p:txBody>
-          <a:bodyPr wrap="square" lIns="0" tIns="0" rIns="0" bIns="0" rtlCol="0" anchor="ctr"/>
-          <a:lstStyle/>
-          <a:p>
-            <a:pPr indent="0" marL="0">
-              <a:buNone/>
-            </a:pPr>
-            <a:r>
-              <a:rPr lang="en-US" sz="2100" b="1" dirty="0">
-                <a:solidFill>
-                  <a:schemeClr val="accent1"/>
-                </a:solidFill>
-              </a:rPr>
-              <a:t>Failures are silent</a:t>
-            </a:r>
-            <a:endParaRPr lang="en-US" sz="2100" dirty="0"/>
-          </a:p>
-        </p:txBody>
-      </p:sp>
-      <p:sp>
-        <p:nvSpPr>
-          <p:cNvPr id="6" name="Text 4"/>
-          <p:cNvSpPr txBox="1"/>
-          <p:nvPr/>
-        </p:nvSpPr>
-        <p:spPr>
-          <a:xfrm>
-            <a:off x="6217920" y="1920240"/>
-            <a:ext cx="5394960" cy="548640"/>
-          </a:xfrm>
-          <a:prstGeom prst="rect">
-            <a:avLst/>
-          </a:prstGeom>
-          <a:noFill/>
-          <a:ln/>
-        </p:spPr>
-        <p:txBody>
-          <a:bodyPr wrap="square" lIns="0" tIns="0" rIns="0" bIns="0" rtlCol="0" anchor="t"/>
-          <a:lstStyle/>
-          <a:p>
-            <a:pPr indent="0" marL="0">
-              <a:buNone/>
-            </a:pPr>
-            <a:r>
-              <a:rPr lang="en-US" sz="1600" dirty="0">
-                <a:solidFill>
-                  <a:schemeClr val="bg2"/>
-                </a:solidFill>
-              </a:rPr>
-              <a:t>A system can look finished and be wrong. Ask for proof.</a:t>
-            </a:r>
-            <a:endParaRPr lang="en-US" sz="1600" dirty="0"/>
-          </a:p>
-        </p:txBody>
-      </p:sp>
-      <p:sp>
-        <p:nvSpPr>
-          <p:cNvPr id="7" name="Text 5"/>
-          <p:cNvSpPr txBox="1"/>
-          <p:nvPr/>
-        </p:nvSpPr>
-        <p:spPr>
-          <a:xfrm>
-            <a:off x="548640" y="2651760"/>
-            <a:ext cx="5394960" cy="502920"/>
-          </a:xfrm>
-          <a:prstGeom prst="rect">
-            <a:avLst/>
-          </a:prstGeom>
-          <a:noFill/>
-          <a:ln/>
-        </p:spPr>
-        <p:txBody>
-          <a:bodyPr wrap="square" lIns="0" tIns="0" rIns="0" bIns="0" rtlCol="0" anchor="ctr"/>
-          <a:lstStyle/>
-          <a:p>
-            <a:pPr indent="0" marL="0">
-              <a:buNone/>
-            </a:pPr>
-            <a:r>
-              <a:rPr lang="en-US" sz="2100" b="1" dirty="0">
-                <a:solidFill>
-                  <a:schemeClr val="accent1"/>
-                </a:solidFill>
-              </a:rPr>
-              <a:t>Rules beat advice</a:t>
-            </a:r>
-            <a:endParaRPr lang="en-US" sz="2100" dirty="0"/>
-          </a:p>
-        </p:txBody>
-      </p:sp>
-      <p:sp>
-        <p:nvSpPr>
-          <p:cNvPr id="8" name="Text 6"/>
-          <p:cNvSpPr txBox="1"/>
-          <p:nvPr/>
-        </p:nvSpPr>
-        <p:spPr>
-          <a:xfrm>
-            <a:off x="548640" y="3154680"/>
-            <a:ext cx="5394960" cy="548640"/>
-          </a:xfrm>
-          <a:prstGeom prst="rect">
-            <a:avLst/>
-          </a:prstGeom>
-          <a:noFill/>
-          <a:ln/>
-        </p:spPr>
-        <p:txBody>
-          <a:bodyPr wrap="square" lIns="0" tIns="0" rIns="0" bIns="0" rtlCol="0" anchor="t"/>
-          <a:lstStyle/>
-          <a:p>
-            <a:pPr indent="0" marL="0">
-              <a:buNone/>
-            </a:pPr>
-            <a:r>
-              <a:rPr lang="en-US" sz="1600" dirty="0">
-                <a:solidFill>
-                  <a:schemeClr val="bg2"/>
-                </a:solidFill>
-              </a:rPr>
-              <a:t>Build checks into systems instead of writing guidance.</a:t>
-            </a:r>
-            <a:endParaRPr lang="en-US" sz="1600" dirty="0"/>
-          </a:p>
-        </p:txBody>
-      </p:sp>
-      <p:sp>
-        <p:nvSpPr>
-          <p:cNvPr id="9" name="Text 7"/>
-          <p:cNvSpPr txBox="1"/>
-          <p:nvPr/>
-        </p:nvSpPr>
-        <p:spPr>
-          <a:xfrm>
-            <a:off x="6217920" y="2651760"/>
-            <a:ext cx="5394960" cy="502920"/>
-          </a:xfrm>
-          <a:prstGeom prst="rect">
-            <a:avLst/>
-          </a:prstGeom>
-          <a:noFill/>
-          <a:ln/>
-        </p:spPr>
-        <p:txBody>
-          <a:bodyPr wrap="square" lIns="0" tIns="0" rIns="0" bIns="0" rtlCol="0" anchor="ctr"/>
-          <a:lstStyle/>
-          <a:p>
-            <a:pPr indent="0" marL="0">
-              <a:buNone/>
-            </a:pPr>
-            <a:r>
-              <a:rPr lang="en-US" sz="2100" b="1" dirty="0">
-                <a:solidFill>
-                  <a:schemeClr val="accent1"/>
-                </a:solidFill>
-              </a:rPr>
-              <a:t>Small habits add up</a:t>
-            </a:r>
-            <a:endParaRPr lang="en-US" sz="2100" dirty="0"/>
-          </a:p>
-        </p:txBody>
-      </p:sp>
-      <p:sp>
-        <p:nvSpPr>
-          <p:cNvPr id="10" name="Text 8"/>
-          <p:cNvSpPr txBox="1"/>
-          <p:nvPr/>
-        </p:nvSpPr>
-        <p:spPr>
-          <a:xfrm>
-            <a:off x="6217920" y="3154680"/>
-            <a:ext cx="5394960" cy="548640"/>
-          </a:xfrm>
-          <a:prstGeom prst="rect">
-            <a:avLst/>
-          </a:prstGeom>
-          <a:noFill/>
-          <a:ln/>
-        </p:spPr>
-        <p:txBody>
-          <a:bodyPr wrap="square" lIns="0" tIns="0" rIns="0" bIns="0" rtlCol="0" anchor="t"/>
-          <a:lstStyle/>
-          <a:p>
-            <a:pPr indent="0" marL="0">
-              <a:buNone/>
-            </a:pPr>
-            <a:r>
-              <a:rPr lang="en-US" sz="1600" dirty="0">
-                <a:solidFill>
-                  <a:schemeClr val="bg2"/>
-                </a:solidFill>
-              </a:rPr>
-              <a:t>Printing to sign made nearly half the problem.</a:t>
-            </a:r>
-            <a:endParaRPr lang="en-US" sz="1600" dirty="0"/>
-          </a:p>
-        </p:txBody>
-      </p:sp>
-      <p:sp>
-        <p:nvSpPr>
-          <p:cNvPr id="11" name="Shape 9"/>
+          <p:cNvPr id="3" name="Shape 1"/>
           <p:cNvSpPr/>
           <p:nvPr/>
         </p:nvSpPr>
         <p:spPr>
           <a:xfrm>
-            <a:off x="548640" y="3977640"/>
-            <a:ext cx="11064240" cy="2194560"/>
+            <a:off x="548640" y="1463040"/>
+            <a:ext cx="6035040" cy="1280160"/>
           </a:xfrm>
           <a:prstGeom prst="roundRect">
             <a:avLst>
-              <a:gd name="adj" fmla="val 6250"/>
+              <a:gd name="adj" fmla="val 10714"/>
             </a:avLst>
           </a:prstGeom>
           <a:solidFill>
-            <a:schemeClr val="bg1"/>
+            <a:schemeClr val="bg2"/>
           </a:solidFill>
           <a:ln/>
         </p:spPr>
       </p:sp>
       <p:sp>
         <p:nvSpPr>
+          <p:cNvPr id="4" name="Text 2"/>
+          <p:cNvSpPr txBox="1"/>
+          <p:nvPr/>
+        </p:nvSpPr>
+        <p:spPr>
+          <a:xfrm>
+            <a:off x="777240" y="1645920"/>
+            <a:ext cx="548640" cy="914400"/>
+          </a:xfrm>
+          <a:prstGeom prst="rect">
+            <a:avLst/>
+          </a:prstGeom>
+          <a:noFill/>
+          <a:ln/>
+        </p:spPr>
+        <p:txBody>
+          <a:bodyPr wrap="square" lIns="0" tIns="0" rIns="0" bIns="0" rtlCol="0" anchor="ctr"/>
+          <a:lstStyle/>
+          <a:p>
+            <a:pPr indent="0" marL="0">
+              <a:buNone/>
+            </a:pPr>
+            <a:r>
+              <a:rPr lang="en-US" sz="4000" b="1" dirty="0">
+                <a:solidFill>
+                  <a:schemeClr val="accent1"/>
+                </a:solidFill>
+                <a:latin typeface="Cambria" pitchFamily="34" charset="0"/>
+                <a:ea typeface="Cambria" pitchFamily="34" charset="-122"/>
+                <a:cs typeface="Cambria" pitchFamily="34" charset="-120"/>
+              </a:rPr>
+              <a:t>1</a:t>
+            </a:r>
+            <a:endParaRPr lang="en-US" sz="4000" dirty="0"/>
+          </a:p>
+        </p:txBody>
+      </p:sp>
+      <p:sp>
+        <p:nvSpPr>
+          <p:cNvPr id="5" name="Text 3"/>
+          <p:cNvSpPr txBox="1"/>
+          <p:nvPr/>
+        </p:nvSpPr>
+        <p:spPr>
+          <a:xfrm>
+            <a:off x="1463040" y="1600200"/>
+            <a:ext cx="4480560" cy="457200"/>
+          </a:xfrm>
+          <a:prstGeom prst="rect">
+            <a:avLst/>
+          </a:prstGeom>
+          <a:noFill/>
+          <a:ln/>
+        </p:spPr>
+        <p:txBody>
+          <a:bodyPr wrap="square" lIns="0" tIns="0" rIns="0" bIns="0" rtlCol="0" anchor="ctr"/>
+          <a:lstStyle/>
+          <a:p>
+            <a:pPr indent="0" marL="0">
+              <a:buNone/>
+            </a:pPr>
+            <a:r>
+              <a:rPr lang="en-US" sz="2000" b="1" dirty="0">
+                <a:solidFill>
+                  <a:schemeClr val="tx2"/>
+                </a:solidFill>
+              </a:rPr>
+              <a:t>Personal</a:t>
+            </a:r>
+            <a:endParaRPr lang="en-US" sz="2000" dirty="0"/>
+          </a:p>
+        </p:txBody>
+      </p:sp>
+      <p:sp>
+        <p:nvSpPr>
+          <p:cNvPr id="6" name="Text 4"/>
+          <p:cNvSpPr txBox="1"/>
+          <p:nvPr/>
+        </p:nvSpPr>
+        <p:spPr>
+          <a:xfrm>
+            <a:off x="1463040" y="2029968"/>
+            <a:ext cx="4846320" cy="320040"/>
+          </a:xfrm>
+          <a:prstGeom prst="rect">
+            <a:avLst/>
+          </a:prstGeom>
+          <a:noFill/>
+          <a:ln/>
+        </p:spPr>
+        <p:txBody>
+          <a:bodyPr wrap="square" lIns="0" tIns="0" rIns="0" bIns="0" rtlCol="0" anchor="ctr"/>
+          <a:lstStyle/>
+          <a:p>
+            <a:pPr indent="0" marL="0">
+              <a:buNone/>
+            </a:pPr>
+            <a:r>
+              <a:rPr lang="en-US" sz="1500" dirty="0">
+                <a:solidFill>
+                  <a:schemeClr val="tx1"/>
+                </a:solidFill>
+              </a:rPr>
+              <a:t>Drafting, summarising</a:t>
+            </a:r>
+            <a:endParaRPr lang="en-US" sz="1500" dirty="0"/>
+          </a:p>
+        </p:txBody>
+      </p:sp>
+      <p:sp>
+        <p:nvSpPr>
+          <p:cNvPr id="7" name="Text 5"/>
+          <p:cNvSpPr txBox="1"/>
+          <p:nvPr/>
+        </p:nvSpPr>
+        <p:spPr>
+          <a:xfrm>
+            <a:off x="1463040" y="2331720"/>
+            <a:ext cx="4846320" cy="320040"/>
+          </a:xfrm>
+          <a:prstGeom prst="rect">
+            <a:avLst/>
+          </a:prstGeom>
+          <a:noFill/>
+          <a:ln/>
+        </p:spPr>
+        <p:txBody>
+          <a:bodyPr wrap="square" lIns="0" tIns="0" rIns="0" bIns="0" rtlCol="0" anchor="ctr"/>
+          <a:lstStyle/>
+          <a:p>
+            <a:pPr indent="0" marL="0">
+              <a:buNone/>
+            </a:pPr>
+            <a:r>
+              <a:rPr lang="en-US" sz="1300" i="1" dirty="0">
+                <a:solidFill>
+                  <a:schemeClr val="accent3"/>
+                </a:solidFill>
+              </a:rPr>
+              <a:t>Low risk: staff guidance</a:t>
+            </a:r>
+            <a:endParaRPr lang="en-US" sz="1300" dirty="0"/>
+          </a:p>
+        </p:txBody>
+      </p:sp>
+      <p:sp>
+        <p:nvSpPr>
+          <p:cNvPr id="8" name="Shape 6"/>
+          <p:cNvSpPr/>
+          <p:nvPr/>
+        </p:nvSpPr>
+        <p:spPr>
+          <a:xfrm>
+            <a:off x="960120" y="2926080"/>
+            <a:ext cx="5623560" cy="1280160"/>
+          </a:xfrm>
+          <a:prstGeom prst="roundRect">
+            <a:avLst>
+              <a:gd name="adj" fmla="val 10714"/>
+            </a:avLst>
+          </a:prstGeom>
+          <a:solidFill>
+            <a:schemeClr val="bg2"/>
+          </a:solidFill>
+          <a:ln/>
+        </p:spPr>
+      </p:sp>
+      <p:sp>
+        <p:nvSpPr>
+          <p:cNvPr id="9" name="Text 7"/>
+          <p:cNvSpPr txBox="1"/>
+          <p:nvPr/>
+        </p:nvSpPr>
+        <p:spPr>
+          <a:xfrm>
+            <a:off x="1188720" y="3108960"/>
+            <a:ext cx="548640" cy="914400"/>
+          </a:xfrm>
+          <a:prstGeom prst="rect">
+            <a:avLst/>
+          </a:prstGeom>
+          <a:noFill/>
+          <a:ln/>
+        </p:spPr>
+        <p:txBody>
+          <a:bodyPr wrap="square" lIns="0" tIns="0" rIns="0" bIns="0" rtlCol="0" anchor="ctr"/>
+          <a:lstStyle/>
+          <a:p>
+            <a:pPr indent="0" marL="0">
+              <a:buNone/>
+            </a:pPr>
+            <a:r>
+              <a:rPr lang="en-US" sz="4000" b="1" dirty="0">
+                <a:solidFill>
+                  <a:schemeClr val="accent1"/>
+                </a:solidFill>
+                <a:latin typeface="Cambria" pitchFamily="34" charset="0"/>
+                <a:ea typeface="Cambria" pitchFamily="34" charset="-122"/>
+                <a:cs typeface="Cambria" pitchFamily="34" charset="-120"/>
+              </a:rPr>
+              <a:t>2</a:t>
+            </a:r>
+            <a:endParaRPr lang="en-US" sz="4000" dirty="0"/>
+          </a:p>
+        </p:txBody>
+      </p:sp>
+      <p:sp>
+        <p:nvSpPr>
+          <p:cNvPr id="10" name="Text 8"/>
+          <p:cNvSpPr txBox="1"/>
+          <p:nvPr/>
+        </p:nvSpPr>
+        <p:spPr>
+          <a:xfrm>
+            <a:off x="1874520" y="3063240"/>
+            <a:ext cx="4069080" cy="457200"/>
+          </a:xfrm>
+          <a:prstGeom prst="rect">
+            <a:avLst/>
+          </a:prstGeom>
+          <a:noFill/>
+          <a:ln/>
+        </p:spPr>
+        <p:txBody>
+          <a:bodyPr wrap="square" lIns="0" tIns="0" rIns="0" bIns="0" rtlCol="0" anchor="ctr"/>
+          <a:lstStyle/>
+          <a:p>
+            <a:pPr indent="0" marL="0">
+              <a:buNone/>
+            </a:pPr>
+            <a:r>
+              <a:rPr lang="en-US" sz="2000" b="1" dirty="0">
+                <a:solidFill>
+                  <a:schemeClr val="tx2"/>
+                </a:solidFill>
+              </a:rPr>
+              <a:t>Team</a:t>
+            </a:r>
+            <a:endParaRPr lang="en-US" sz="2000" dirty="0"/>
+          </a:p>
+        </p:txBody>
+      </p:sp>
+      <p:sp>
+        <p:nvSpPr>
+          <p:cNvPr id="11" name="Text 9"/>
+          <p:cNvSpPr txBox="1"/>
+          <p:nvPr/>
+        </p:nvSpPr>
+        <p:spPr>
+          <a:xfrm>
+            <a:off x="1874520" y="3493008"/>
+            <a:ext cx="4434840" cy="320040"/>
+          </a:xfrm>
+          <a:prstGeom prst="rect">
+            <a:avLst/>
+          </a:prstGeom>
+          <a:noFill/>
+          <a:ln/>
+        </p:spPr>
+        <p:txBody>
+          <a:bodyPr wrap="square" lIns="0" tIns="0" rIns="0" bIns="0" rtlCol="0" anchor="ctr"/>
+          <a:lstStyle/>
+          <a:p>
+            <a:pPr indent="0" marL="0">
+              <a:buNone/>
+            </a:pPr>
+            <a:r>
+              <a:rPr lang="en-US" sz="1500" dirty="0">
+                <a:solidFill>
+                  <a:schemeClr val="tx1"/>
+                </a:solidFill>
+              </a:rPr>
+              <a:t>Knowledge assistants, triage</a:t>
+            </a:r>
+            <a:endParaRPr lang="en-US" sz="1500" dirty="0"/>
+          </a:p>
+        </p:txBody>
+      </p:sp>
+      <p:sp>
+        <p:nvSpPr>
           <p:cNvPr id="12" name="Text 10"/>
           <p:cNvSpPr txBox="1"/>
           <p:nvPr/>
         </p:nvSpPr>
         <p:spPr>
           <a:xfrm>
-            <a:off x="868680" y="4160520"/>
-            <a:ext cx="10424160" cy="457200"/>
+            <a:off x="1874520" y="3794760"/>
+            <a:ext cx="4434840" cy="320040"/>
           </a:xfrm>
           <a:prstGeom prst="rect">
             <a:avLst/>
@@ -4579,12 +4661,217 @@
               <a:buNone/>
             </a:pPr>
             <a:r>
+              <a:rPr lang="en-US" sz="1300" i="1" dirty="0">
+                <a:solidFill>
+                  <a:schemeClr val="accent3"/>
+                </a:solidFill>
+              </a:rPr>
+              <a:t>Medium: a service owner, central oversight</a:t>
+            </a:r>
+            <a:endParaRPr lang="en-US" sz="1300" dirty="0"/>
+          </a:p>
+        </p:txBody>
+      </p:sp>
+      <p:sp>
+        <p:nvSpPr>
+          <p:cNvPr id="13" name="Shape 11"/>
+          <p:cNvSpPr/>
+          <p:nvPr/>
+        </p:nvSpPr>
+        <p:spPr>
+          <a:xfrm>
+            <a:off x="1371600" y="4389120"/>
+            <a:ext cx="5212080" cy="1280160"/>
+          </a:xfrm>
+          <a:prstGeom prst="roundRect">
+            <a:avLst>
+              <a:gd name="adj" fmla="val 10714"/>
+            </a:avLst>
+          </a:prstGeom>
+          <a:solidFill>
+            <a:schemeClr val="tx2"/>
+          </a:solidFill>
+          <a:ln/>
+        </p:spPr>
+      </p:sp>
+      <p:sp>
+        <p:nvSpPr>
+          <p:cNvPr id="14" name="Text 12"/>
+          <p:cNvSpPr txBox="1"/>
+          <p:nvPr/>
+        </p:nvSpPr>
+        <p:spPr>
+          <a:xfrm>
+            <a:off x="1600200" y="4572000"/>
+            <a:ext cx="548640" cy="914400"/>
+          </a:xfrm>
+          <a:prstGeom prst="rect">
+            <a:avLst/>
+          </a:prstGeom>
+          <a:noFill/>
+          <a:ln/>
+        </p:spPr>
+        <p:txBody>
+          <a:bodyPr wrap="square" lIns="0" tIns="0" rIns="0" bIns="0" rtlCol="0" anchor="ctr"/>
+          <a:lstStyle/>
+          <a:p>
+            <a:pPr indent="0" marL="0">
+              <a:buNone/>
+            </a:pPr>
+            <a:r>
+              <a:rPr lang="en-US" sz="4000" b="1" dirty="0">
+                <a:solidFill>
+                  <a:schemeClr val="accent1"/>
+                </a:solidFill>
+                <a:latin typeface="Cambria" pitchFamily="34" charset="0"/>
+                <a:ea typeface="Cambria" pitchFamily="34" charset="-122"/>
+                <a:cs typeface="Cambria" pitchFamily="34" charset="-120"/>
+              </a:rPr>
+              <a:t>3</a:t>
+            </a:r>
+            <a:endParaRPr lang="en-US" sz="4000" dirty="0"/>
+          </a:p>
+        </p:txBody>
+      </p:sp>
+      <p:sp>
+        <p:nvSpPr>
+          <p:cNvPr id="15" name="Text 13"/>
+          <p:cNvSpPr txBox="1"/>
+          <p:nvPr/>
+        </p:nvSpPr>
+        <p:spPr>
+          <a:xfrm>
+            <a:off x="2286000" y="4526280"/>
+            <a:ext cx="3657600" cy="457200"/>
+          </a:xfrm>
+          <a:prstGeom prst="rect">
+            <a:avLst/>
+          </a:prstGeom>
+          <a:noFill/>
+          <a:ln/>
+        </p:spPr>
+        <p:txBody>
+          <a:bodyPr wrap="square" lIns="0" tIns="0" rIns="0" bIns="0" rtlCol="0" anchor="ctr"/>
+          <a:lstStyle/>
+          <a:p>
+            <a:pPr indent="0" marL="0">
+              <a:buNone/>
+            </a:pPr>
+            <a:r>
               <a:rPr lang="en-US" sz="2000" b="1" dirty="0">
                 <a:solidFill>
+                  <a:schemeClr val="bg1"/>
+                </a:solidFill>
+              </a:rPr>
+              <a:t>Organisation</a:t>
+            </a:r>
+            <a:endParaRPr lang="en-US" sz="2000" dirty="0"/>
+          </a:p>
+        </p:txBody>
+      </p:sp>
+      <p:sp>
+        <p:nvSpPr>
+          <p:cNvPr id="16" name="Text 14"/>
+          <p:cNvSpPr txBox="1"/>
+          <p:nvPr/>
+        </p:nvSpPr>
+        <p:spPr>
+          <a:xfrm>
+            <a:off x="2286000" y="4956048"/>
+            <a:ext cx="4023360" cy="320040"/>
+          </a:xfrm>
+          <a:prstGeom prst="rect">
+            <a:avLst/>
+          </a:prstGeom>
+          <a:noFill/>
+          <a:ln/>
+        </p:spPr>
+        <p:txBody>
+          <a:bodyPr wrap="square" lIns="0" tIns="0" rIns="0" bIns="0" rtlCol="0" anchor="ctr"/>
+          <a:lstStyle/>
+          <a:p>
+            <a:pPr indent="0" marL="0">
+              <a:buNone/>
+            </a:pPr>
+            <a:r>
+              <a:rPr lang="en-US" sz="1500" dirty="0">
+                <a:solidFill>
+                  <a:schemeClr val="bg2"/>
+                </a:solidFill>
+              </a:rPr>
+              <a:t>Public-facing tools, decision support</a:t>
+            </a:r>
+            <a:endParaRPr lang="en-US" sz="1500" dirty="0"/>
+          </a:p>
+        </p:txBody>
+      </p:sp>
+      <p:sp>
+        <p:nvSpPr>
+          <p:cNvPr id="17" name="Text 15"/>
+          <p:cNvSpPr txBox="1"/>
+          <p:nvPr/>
+        </p:nvSpPr>
+        <p:spPr>
+          <a:xfrm>
+            <a:off x="2286000" y="5257800"/>
+            <a:ext cx="4023360" cy="320040"/>
+          </a:xfrm>
+          <a:prstGeom prst="rect">
+            <a:avLst/>
+          </a:prstGeom>
+          <a:noFill/>
+          <a:ln/>
+        </p:spPr>
+        <p:txBody>
+          <a:bodyPr wrap="square" lIns="0" tIns="0" rIns="0" bIns="0" rtlCol="0" anchor="ctr"/>
+          <a:lstStyle/>
+          <a:p>
+            <a:pPr indent="0" marL="0">
+              <a:buNone/>
+            </a:pPr>
+            <a:r>
+              <a:rPr lang="en-US" sz="1300" i="1" dirty="0">
+                <a:solidFill>
+                  <a:schemeClr val="accent5"/>
+                </a:solidFill>
+              </a:rPr>
+              <a:t>High: formal approval and assurance</a:t>
+            </a:r>
+            <a:endParaRPr lang="en-US" sz="1300" dirty="0"/>
+          </a:p>
+        </p:txBody>
+      </p:sp>
+      <p:sp>
+        <p:nvSpPr>
+          <p:cNvPr id="18" name="Text 16"/>
+          <p:cNvSpPr txBox="1"/>
+          <p:nvPr/>
+        </p:nvSpPr>
+        <p:spPr>
+          <a:xfrm>
+            <a:off x="7223760" y="1463040"/>
+            <a:ext cx="4389120" cy="457200"/>
+          </a:xfrm>
+          <a:prstGeom prst="rect">
+            <a:avLst/>
+          </a:prstGeom>
+          <a:noFill/>
+          <a:ln/>
+        </p:spPr>
+        <p:txBody>
+          <a:bodyPr wrap="square" lIns="0" tIns="0" rIns="0" bIns="0" rtlCol="0" anchor="ctr"/>
+          <a:lstStyle/>
+          <a:p>
+            <a:pPr indent="0" marL="0">
+              <a:buNone/>
+            </a:pPr>
+            <a:r>
+              <a:rPr lang="en-US" sz="2000" b="1" dirty="0">
+                <a:solidFill>
                   <a:schemeClr val="tx2"/>
                 </a:solidFill>
               </a:rPr>
-              <a:t>What we are asking for</a:t>
+              <a:t>Manage AI like a new employee</a:t>
             </a:r>
             <a:endParaRPr lang="en-US" sz="2000" dirty="0"/>
           </a:p>
@@ -4592,14 +4879,478 @@
       </p:sp>
       <p:sp>
         <p:nvSpPr>
-          <p:cNvPr id="13" name="Text 11"/>
-          <p:cNvSpPr txBox="1"/>
-          <p:nvPr/>
-        </p:nvSpPr>
-        <p:spPr>
-          <a:xfrm>
-            <a:off x="868680" y="4617720"/>
-            <a:ext cx="10424160" cy="1463040"/>
+          <p:cNvPr id="19" name="Shape 17"/>
+          <p:cNvSpPr/>
+          <p:nvPr/>
+        </p:nvSpPr>
+        <p:spPr>
+          <a:xfrm>
+            <a:off x="7223760" y="2057400"/>
+            <a:ext cx="594360" cy="594360"/>
+          </a:xfrm>
+          <a:prstGeom prst="ellipse">
+            <a:avLst/>
+          </a:prstGeom>
+          <a:solidFill>
+            <a:schemeClr val="tx2"/>
+          </a:solidFill>
+          <a:ln/>
+        </p:spPr>
+      </p:sp>
+      <p:pic>
+        <p:nvPicPr>
+          <p:cNvPr id="20" name="Image 0" descr="preencoded.png">    </p:cNvPr>
+          <p:cNvPicPr>
+            <a:picLocks noChangeAspect="1"/>
+          </p:cNvPicPr>
+          <p:nvPr/>
+        </p:nvPicPr>
+        <p:blipFill>
+          <a:blip r:embed="rId1"/>
+          <a:stretch>
+            <a:fillRect/>
+          </a:stretch>
+        </p:blipFill>
+        <p:spPr>
+          <a:xfrm>
+            <a:off x="7370064" y="2203704"/>
+            <a:ext cx="301752" cy="301752"/>
+          </a:xfrm>
+          <a:prstGeom prst="rect">
+            <a:avLst/>
+          </a:prstGeom>
+        </p:spPr>
+      </p:pic>
+      <p:sp>
+        <p:nvSpPr>
+          <p:cNvPr id="21" name="Text 18"/>
+          <p:cNvSpPr txBox="1"/>
+          <p:nvPr/>
+        </p:nvSpPr>
+        <p:spPr>
+          <a:xfrm>
+            <a:off x="8001000" y="2011680"/>
+            <a:ext cx="3657600" cy="365760"/>
+          </a:xfrm>
+          <a:prstGeom prst="rect">
+            <a:avLst/>
+          </a:prstGeom>
+          <a:noFill/>
+          <a:ln/>
+        </p:spPr>
+        <p:txBody>
+          <a:bodyPr wrap="square" lIns="0" tIns="0" rIns="0" bIns="0" rtlCol="0" anchor="ctr"/>
+          <a:lstStyle/>
+          <a:p>
+            <a:pPr indent="0" marL="0">
+              <a:buNone/>
+            </a:pPr>
+            <a:r>
+              <a:rPr lang="en-US" sz="1600" b="1" dirty="0">
+                <a:solidFill>
+                  <a:schemeClr val="tx2"/>
+                </a:solidFill>
+              </a:rPr>
+              <a:t>A job description</a:t>
+            </a:r>
+            <a:endParaRPr lang="en-US" sz="1600" dirty="0"/>
+          </a:p>
+        </p:txBody>
+      </p:sp>
+      <p:sp>
+        <p:nvSpPr>
+          <p:cNvPr id="22" name="Text 19"/>
+          <p:cNvSpPr txBox="1"/>
+          <p:nvPr/>
+        </p:nvSpPr>
+        <p:spPr>
+          <a:xfrm>
+            <a:off x="8001000" y="2350008"/>
+            <a:ext cx="3657600" cy="320040"/>
+          </a:xfrm>
+          <a:prstGeom prst="rect">
+            <a:avLst/>
+          </a:prstGeom>
+          <a:noFill/>
+          <a:ln/>
+        </p:spPr>
+        <p:txBody>
+          <a:bodyPr wrap="square" lIns="0" tIns="0" rIns="0" bIns="0" rtlCol="0" anchor="ctr"/>
+          <a:lstStyle/>
+          <a:p>
+            <a:pPr indent="0" marL="0">
+              <a:buNone/>
+            </a:pPr>
+            <a:r>
+              <a:rPr lang="en-US" sz="1400" dirty="0">
+                <a:solidFill>
+                  <a:schemeClr val="tx1"/>
+                </a:solidFill>
+              </a:rPr>
+              <a:t>a clear task, data and limits</a:t>
+            </a:r>
+            <a:endParaRPr lang="en-US" sz="1400" dirty="0"/>
+          </a:p>
+        </p:txBody>
+      </p:sp>
+      <p:sp>
+        <p:nvSpPr>
+          <p:cNvPr id="23" name="Shape 20"/>
+          <p:cNvSpPr/>
+          <p:nvPr/>
+        </p:nvSpPr>
+        <p:spPr>
+          <a:xfrm>
+            <a:off x="7223760" y="2926080"/>
+            <a:ext cx="594360" cy="594360"/>
+          </a:xfrm>
+          <a:prstGeom prst="ellipse">
+            <a:avLst/>
+          </a:prstGeom>
+          <a:solidFill>
+            <a:schemeClr val="tx2"/>
+          </a:solidFill>
+          <a:ln/>
+        </p:spPr>
+      </p:sp>
+      <p:pic>
+        <p:nvPicPr>
+          <p:cNvPr id="24" name="Image 1" descr="preencoded.png">    </p:cNvPr>
+          <p:cNvPicPr>
+            <a:picLocks noChangeAspect="1"/>
+          </p:cNvPicPr>
+          <p:nvPr/>
+        </p:nvPicPr>
+        <p:blipFill>
+          <a:blip r:embed="rId2"/>
+          <a:stretch>
+            <a:fillRect/>
+          </a:stretch>
+        </p:blipFill>
+        <p:spPr>
+          <a:xfrm>
+            <a:off x="7370064" y="3072384"/>
+            <a:ext cx="301752" cy="301752"/>
+          </a:xfrm>
+          <a:prstGeom prst="rect">
+            <a:avLst/>
+          </a:prstGeom>
+        </p:spPr>
+      </p:pic>
+      <p:sp>
+        <p:nvSpPr>
+          <p:cNvPr id="25" name="Text 21"/>
+          <p:cNvSpPr txBox="1"/>
+          <p:nvPr/>
+        </p:nvSpPr>
+        <p:spPr>
+          <a:xfrm>
+            <a:off x="8001000" y="2880360"/>
+            <a:ext cx="3657600" cy="365760"/>
+          </a:xfrm>
+          <a:prstGeom prst="rect">
+            <a:avLst/>
+          </a:prstGeom>
+          <a:noFill/>
+          <a:ln/>
+        </p:spPr>
+        <p:txBody>
+          <a:bodyPr wrap="square" lIns="0" tIns="0" rIns="0" bIns="0" rtlCol="0" anchor="ctr"/>
+          <a:lstStyle/>
+          <a:p>
+            <a:pPr indent="0" marL="0">
+              <a:buNone/>
+            </a:pPr>
+            <a:r>
+              <a:rPr lang="en-US" sz="1600" b="1" dirty="0">
+                <a:solidFill>
+                  <a:schemeClr val="tx2"/>
+                </a:solidFill>
+              </a:rPr>
+              <a:t>A trial period</a:t>
+            </a:r>
+            <a:endParaRPr lang="en-US" sz="1600" dirty="0"/>
+          </a:p>
+        </p:txBody>
+      </p:sp>
+      <p:sp>
+        <p:nvSpPr>
+          <p:cNvPr id="26" name="Text 22"/>
+          <p:cNvSpPr txBox="1"/>
+          <p:nvPr/>
+        </p:nvSpPr>
+        <p:spPr>
+          <a:xfrm>
+            <a:off x="8001000" y="3218688"/>
+            <a:ext cx="3657600" cy="320040"/>
+          </a:xfrm>
+          <a:prstGeom prst="rect">
+            <a:avLst/>
+          </a:prstGeom>
+          <a:noFill/>
+          <a:ln/>
+        </p:spPr>
+        <p:txBody>
+          <a:bodyPr wrap="square" lIns="0" tIns="0" rIns="0" bIns="0" rtlCol="0" anchor="ctr"/>
+          <a:lstStyle/>
+          <a:p>
+            <a:pPr indent="0" marL="0">
+              <a:buNone/>
+            </a:pPr>
+            <a:r>
+              <a:rPr lang="en-US" sz="1400" dirty="0">
+                <a:solidFill>
+                  <a:schemeClr val="tx1"/>
+                </a:solidFill>
+              </a:rPr>
+              <a:t>a limited roll-out first</a:t>
+            </a:r>
+            <a:endParaRPr lang="en-US" sz="1400" dirty="0"/>
+          </a:p>
+        </p:txBody>
+      </p:sp>
+      <p:sp>
+        <p:nvSpPr>
+          <p:cNvPr id="27" name="Shape 23"/>
+          <p:cNvSpPr/>
+          <p:nvPr/>
+        </p:nvSpPr>
+        <p:spPr>
+          <a:xfrm>
+            <a:off x="7223760" y="3794760"/>
+            <a:ext cx="594360" cy="594360"/>
+          </a:xfrm>
+          <a:prstGeom prst="ellipse">
+            <a:avLst/>
+          </a:prstGeom>
+          <a:solidFill>
+            <a:schemeClr val="tx2"/>
+          </a:solidFill>
+          <a:ln/>
+        </p:spPr>
+      </p:sp>
+      <p:pic>
+        <p:nvPicPr>
+          <p:cNvPr id="28" name="Image 2" descr="preencoded.png">    </p:cNvPr>
+          <p:cNvPicPr>
+            <a:picLocks noChangeAspect="1"/>
+          </p:cNvPicPr>
+          <p:nvPr/>
+        </p:nvPicPr>
+        <p:blipFill>
+          <a:blip r:embed="rId3"/>
+          <a:stretch>
+            <a:fillRect/>
+          </a:stretch>
+        </p:blipFill>
+        <p:spPr>
+          <a:xfrm>
+            <a:off x="7370064" y="3941064"/>
+            <a:ext cx="301752" cy="301752"/>
+          </a:xfrm>
+          <a:prstGeom prst="rect">
+            <a:avLst/>
+          </a:prstGeom>
+        </p:spPr>
+      </p:pic>
+      <p:sp>
+        <p:nvSpPr>
+          <p:cNvPr id="29" name="Text 24"/>
+          <p:cNvSpPr txBox="1"/>
+          <p:nvPr/>
+        </p:nvSpPr>
+        <p:spPr>
+          <a:xfrm>
+            <a:off x="8001000" y="3749040"/>
+            <a:ext cx="3657600" cy="365760"/>
+          </a:xfrm>
+          <a:prstGeom prst="rect">
+            <a:avLst/>
+          </a:prstGeom>
+          <a:noFill/>
+          <a:ln/>
+        </p:spPr>
+        <p:txBody>
+          <a:bodyPr wrap="square" lIns="0" tIns="0" rIns="0" bIns="0" rtlCol="0" anchor="ctr"/>
+          <a:lstStyle/>
+          <a:p>
+            <a:pPr indent="0" marL="0">
+              <a:buNone/>
+            </a:pPr>
+            <a:r>
+              <a:rPr lang="en-US" sz="1600" b="1" dirty="0">
+                <a:solidFill>
+                  <a:schemeClr val="tx2"/>
+                </a:solidFill>
+              </a:rPr>
+              <a:t>Performance reviews</a:t>
+            </a:r>
+            <a:endParaRPr lang="en-US" sz="1600" dirty="0"/>
+          </a:p>
+        </p:txBody>
+      </p:sp>
+      <p:sp>
+        <p:nvSpPr>
+          <p:cNvPr id="30" name="Text 25"/>
+          <p:cNvSpPr txBox="1"/>
+          <p:nvPr/>
+        </p:nvSpPr>
+        <p:spPr>
+          <a:xfrm>
+            <a:off x="8001000" y="4087368"/>
+            <a:ext cx="3657600" cy="320040"/>
+          </a:xfrm>
+          <a:prstGeom prst="rect">
+            <a:avLst/>
+          </a:prstGeom>
+          <a:noFill/>
+          <a:ln/>
+        </p:spPr>
+        <p:txBody>
+          <a:bodyPr wrap="square" lIns="0" tIns="0" rIns="0" bIns="0" rtlCol="0" anchor="ctr"/>
+          <a:lstStyle/>
+          <a:p>
+            <a:pPr indent="0" marL="0">
+              <a:buNone/>
+            </a:pPr>
+            <a:r>
+              <a:rPr lang="en-US" sz="1400" dirty="0">
+                <a:solidFill>
+                  <a:schemeClr val="tx1"/>
+                </a:solidFill>
+              </a:rPr>
+              <a:t>measured and monitored</a:t>
+            </a:r>
+            <a:endParaRPr lang="en-US" sz="1400" dirty="0"/>
+          </a:p>
+        </p:txBody>
+      </p:sp>
+      <p:sp>
+        <p:nvSpPr>
+          <p:cNvPr id="31" name="Shape 26"/>
+          <p:cNvSpPr/>
+          <p:nvPr/>
+        </p:nvSpPr>
+        <p:spPr>
+          <a:xfrm>
+            <a:off x="7223760" y="4663440"/>
+            <a:ext cx="594360" cy="594360"/>
+          </a:xfrm>
+          <a:prstGeom prst="ellipse">
+            <a:avLst/>
+          </a:prstGeom>
+          <a:solidFill>
+            <a:schemeClr val="tx2"/>
+          </a:solidFill>
+          <a:ln/>
+        </p:spPr>
+      </p:sp>
+      <p:pic>
+        <p:nvPicPr>
+          <p:cNvPr id="32" name="Image 3" descr="preencoded.png">    </p:cNvPr>
+          <p:cNvPicPr>
+            <a:picLocks noChangeAspect="1"/>
+          </p:cNvPicPr>
+          <p:nvPr/>
+        </p:nvPicPr>
+        <p:blipFill>
+          <a:blip r:embed="rId4"/>
+          <a:stretch>
+            <a:fillRect/>
+          </a:stretch>
+        </p:blipFill>
+        <p:spPr>
+          <a:xfrm>
+            <a:off x="7370064" y="4809744"/>
+            <a:ext cx="301752" cy="301752"/>
+          </a:xfrm>
+          <a:prstGeom prst="rect">
+            <a:avLst/>
+          </a:prstGeom>
+        </p:spPr>
+      </p:pic>
+      <p:sp>
+        <p:nvSpPr>
+          <p:cNvPr id="33" name="Text 27"/>
+          <p:cNvSpPr txBox="1"/>
+          <p:nvPr/>
+        </p:nvSpPr>
+        <p:spPr>
+          <a:xfrm>
+            <a:off x="8001000" y="4617720"/>
+            <a:ext cx="3657600" cy="365760"/>
+          </a:xfrm>
+          <a:prstGeom prst="rect">
+            <a:avLst/>
+          </a:prstGeom>
+          <a:noFill/>
+          <a:ln/>
+        </p:spPr>
+        <p:txBody>
+          <a:bodyPr wrap="square" lIns="0" tIns="0" rIns="0" bIns="0" rtlCol="0" anchor="ctr"/>
+          <a:lstStyle/>
+          <a:p>
+            <a:pPr indent="0" marL="0">
+              <a:buNone/>
+            </a:pPr>
+            <a:r>
+              <a:rPr lang="en-US" sz="1600" b="1" dirty="0">
+                <a:solidFill>
+                  <a:schemeClr val="tx2"/>
+                </a:solidFill>
+              </a:rPr>
+              <a:t>Can be switched off</a:t>
+            </a:r>
+            <a:endParaRPr lang="en-US" sz="1600" dirty="0"/>
+          </a:p>
+        </p:txBody>
+      </p:sp>
+      <p:sp>
+        <p:nvSpPr>
+          <p:cNvPr id="34" name="Text 28"/>
+          <p:cNvSpPr txBox="1"/>
+          <p:nvPr/>
+        </p:nvSpPr>
+        <p:spPr>
+          <a:xfrm>
+            <a:off x="8001000" y="4956048"/>
+            <a:ext cx="3657600" cy="320040"/>
+          </a:xfrm>
+          <a:prstGeom prst="rect">
+            <a:avLst/>
+          </a:prstGeom>
+          <a:noFill/>
+          <a:ln/>
+        </p:spPr>
+        <p:txBody>
+          <a:bodyPr wrap="square" lIns="0" tIns="0" rIns="0" bIns="0" rtlCol="0" anchor="ctr"/>
+          <a:lstStyle/>
+          <a:p>
+            <a:pPr indent="0" marL="0">
+              <a:buNone/>
+            </a:pPr>
+            <a:r>
+              <a:rPr lang="en-US" sz="1400" dirty="0">
+                <a:solidFill>
+                  <a:schemeClr val="tx1"/>
+                </a:solidFill>
+              </a:rPr>
+              <a:t>a person stays accountable</a:t>
+            </a:r>
+            <a:endParaRPr lang="en-US" sz="1400" dirty="0"/>
+          </a:p>
+        </p:txBody>
+      </p:sp>
+      <p:sp>
+        <p:nvSpPr>
+          <p:cNvPr id="35" name="Text 29"/>
+          <p:cNvSpPr txBox="1"/>
+          <p:nvPr/>
+        </p:nvSpPr>
+        <p:spPr>
+          <a:xfrm>
+            <a:off x="7223760" y="5577840"/>
+            <a:ext cx="4389120" cy="685800"/>
           </a:xfrm>
           <a:prstGeom prst="rect">
             <a:avLst/>
@@ -4611,71 +5362,31 @@
           <a:bodyPr wrap="square" lIns="0" tIns="0" rIns="0" bIns="0" rtlCol="0" anchor="t"/>
           <a:lstStyle/>
           <a:p>
-            <a:pPr marL="342900" indent="-342900">
-              <a:spcAft>
-                <a:spcPts val="600"/>
-              </a:spcAft>
-              <a:buSzPct val="100000"/>
-              <a:buChar char="•"/>
-            </a:pPr>
-            <a:r>
-              <a:rPr lang="en-US" sz="1700" dirty="0">
-                <a:solidFill>
-                  <a:schemeClr val="tx1"/>
-                </a:solidFill>
-              </a:rPr>
-              <a:t>Stand up an AI build team and a cloud strategy, with an executive sponsor</a:t>
-            </a:r>
-            <a:endParaRPr lang="en-US" sz="1700" dirty="0"/>
-          </a:p>
-          <a:p>
-            <a:pPr marL="342900" indent="-342900">
-              <a:spcAft>
-                <a:spcPts val="600"/>
-              </a:spcAft>
-              <a:buSzPct val="100000"/>
-              <a:buChar char="•"/>
-            </a:pPr>
-            <a:r>
-              <a:rPr lang="en-US" sz="1700" dirty="0">
-                <a:solidFill>
-                  <a:schemeClr val="tx1"/>
-                </a:solidFill>
-              </a:rPr>
-              <a:t>Change our filing rules and portal through the Rules of Practice review already under way</a:t>
-            </a:r>
-            <a:endParaRPr lang="en-US" sz="1700" dirty="0"/>
-          </a:p>
-          <a:p>
-            <a:pPr marL="342900" indent="-342900">
-              <a:spcAft>
-                <a:spcPts val="600"/>
-              </a:spcAft>
-              <a:buSzPct val="100000"/>
-              <a:buChar char="•"/>
-            </a:pPr>
-            <a:r>
-              <a:rPr lang="en-US" sz="1700" dirty="0">
-                <a:solidFill>
-                  <a:schemeClr val="tx1"/>
-                </a:solidFill>
-              </a:rPr>
-              <a:t>Start now with two quick wins: the automatic upload check, and a privacy review of flawed redactions</a:t>
-            </a:r>
-            <a:endParaRPr lang="en-US" sz="1700" dirty="0"/>
-          </a:p>
-        </p:txBody>
-      </p:sp>
-      <p:sp>
-        <p:nvSpPr>
-          <p:cNvPr id="14" name="Text 12"/>
-          <p:cNvSpPr txBox="1"/>
-          <p:nvPr/>
-        </p:nvSpPr>
-        <p:spPr>
-          <a:xfrm>
-            <a:off x="548640" y="6263640"/>
-            <a:ext cx="10424160" cy="365760"/>
+            <a:pPr indent="0" marL="0">
+              <a:buNone/>
+            </a:pPr>
+            <a:r>
+              <a:rPr lang="en-US" sz="1300" i="1" dirty="0">
+                <a:solidFill>
+                  <a:schemeClr val="accent3"/>
+                </a:solidFill>
+              </a:rPr>
+              <a:t>Train every level: all staff to use AI safely, team leads to build it into their work, executives to weigh risk and value.</a:t>
+            </a:r>
+            <a:endParaRPr lang="en-US" sz="1300" dirty="0"/>
+          </a:p>
+        </p:txBody>
+      </p:sp>
+      <p:sp>
+        <p:nvSpPr>
+          <p:cNvPr id="36" name="Text 30"/>
+          <p:cNvSpPr txBox="1"/>
+          <p:nvPr/>
+        </p:nvSpPr>
+        <p:spPr>
+          <a:xfrm>
+            <a:off x="548640" y="5989320"/>
+            <a:ext cx="6400800" cy="320040"/>
           </a:xfrm>
           <a:prstGeom prst="rect">
             <a:avLst/>
@@ -4691,14 +5402,14 @@
               <a:buNone/>
             </a:pPr>
             <a:r>
-              <a:rPr lang="en-US" sz="1200" i="1" dirty="0">
-                <a:solidFill>
-                  <a:schemeClr val="bg2"/>
-                </a:solidFill>
-              </a:rPr>
-              <a:t>“Agentic AI is not primarily a technology challenge.”  — UK Local Government Association, 2026</a:t>
-            </a:r>
-            <a:endParaRPr lang="en-US" sz="1200" dirty="0"/>
+              <a:rPr lang="en-US" sz="1100" dirty="0">
+                <a:solidFill>
+                  <a:schemeClr val="accent3"/>
+                </a:solidFill>
+              </a:rPr>
+              <a:t>Adapted from the UK Local Government Association’s playbook for agentic AI (2026).</a:t>
+            </a:r>
+            <a:endParaRPr lang="en-US" sz="1100" dirty="0"/>
           </a:p>
         </p:txBody>
       </p:sp>
@@ -4732,7 +5443,7 @@
             <a:lvl1pPr>
               <a:defRPr sz="1000">
                 <a:solidFill>
-                  <a:schemeClr val="bg2"/>
+                  <a:schemeClr val="accent3"/>
                 </a:solidFill>
               </a:defRPr>
             </a:lvl1pPr>
@@ -4742,6 +5453,572 @@
             <a:fld id="{F7021451-1387-4CA6-816F-3879F97B5CBC}" type="slidenum">
               <a:rPr b="0" lang="en-US"/>
               <a:t>12</a:t>
+            </a:fld>
+            <a:endParaRPr lang="en-US"/>
+          </a:p>
+        </p:txBody>
+      </p:sp>
+    </p:spTree>
+  </p:cSld>
+  <p:clrMapOvr>
+    <a:masterClrMapping/>
+  </p:clrMapOvr>
+</p:sld>
+</file>
+
+<file path=ppt/slides/slide13.xml><?xml version="1.0" encoding="utf-8"?>
+<p:sld xmlns:a="http://schemas.openxmlformats.org/drawingml/2006/main" xmlns:r="http://schemas.openxmlformats.org/officeDocument/2006/relationships" xmlns:p="http://schemas.openxmlformats.org/presentationml/2006/main">
+  <p:cSld name="Slide 13">
+    <p:spTree>
+      <p:nvGrpSpPr>
+        <p:cNvPr id="1" name=""/>
+        <p:cNvGrpSpPr/>
+        <p:nvPr/>
+      </p:nvGrpSpPr>
+      <p:grpSpPr>
+        <a:xfrm>
+          <a:off x="0" y="0"/>
+          <a:ext cx="0" cy="0"/>
+          <a:chOff x="0" y="0"/>
+          <a:chExt cx="0" cy="0"/>
+        </a:xfrm>
+      </p:grpSpPr>
+      <p:sp>
+        <p:nvSpPr>
+          <p:cNvPr id="2" name="Text 0"/>
+          <p:cNvSpPr/>
+          <p:nvPr>
+            <p:ph idx="100" type="title" hasCustomPrompt="1"/>
+          </p:nvPr>
+        </p:nvSpPr>
+        <p:spPr>
+          <a:xfrm>
+            <a:off x="548640" y="365760"/>
+            <a:ext cx="11064240" cy="822960"/>
+          </a:xfrm>
+          <a:prstGeom prst="rect">
+            <a:avLst/>
+          </a:prstGeom>
+          <a:noFill/>
+          <a:ln/>
+        </p:spPr>
+        <p:txBody>
+          <a:bodyPr wrap="square" lIns="0" tIns="0" rIns="0" bIns="0" rtlCol="0" anchor="ctr"/>
+          <a:lstStyle/>
+          <a:p>
+            <a:pPr indent="0" marL="0">
+              <a:buNone/>
+            </a:pPr>
+            <a:r>
+              <a:rPr lang="en-US" sz="3400" b="1" dirty="0">
+                <a:solidFill>
+                  <a:schemeClr val="bg1"/>
+                </a:solidFill>
+              </a:rPr>
+              <a:t>Lessons for every part of the organization</a:t>
+            </a:r>
+            <a:endParaRPr lang="en-US" sz="3400" dirty="0"/>
+          </a:p>
+        </p:txBody>
+      </p:sp>
+      <p:sp>
+        <p:nvSpPr>
+          <p:cNvPr id="3" name="Text 1"/>
+          <p:cNvSpPr txBox="1"/>
+          <p:nvPr/>
+        </p:nvSpPr>
+        <p:spPr>
+          <a:xfrm>
+            <a:off x="548640" y="1417320"/>
+            <a:ext cx="5394960" cy="502920"/>
+          </a:xfrm>
+          <a:prstGeom prst="rect">
+            <a:avLst/>
+          </a:prstGeom>
+          <a:noFill/>
+          <a:ln/>
+        </p:spPr>
+        <p:txBody>
+          <a:bodyPr wrap="square" lIns="0" tIns="0" rIns="0" bIns="0" rtlCol="0" anchor="ctr"/>
+          <a:lstStyle/>
+          <a:p>
+            <a:pPr indent="0" marL="0">
+              <a:buNone/>
+            </a:pPr>
+            <a:r>
+              <a:rPr lang="en-US" sz="2100" b="1" dirty="0">
+                <a:solidFill>
+                  <a:schemeClr val="accent1"/>
+                </a:solidFill>
+              </a:rPr>
+              <a:t>AI is only as good as its data</a:t>
+            </a:r>
+            <a:endParaRPr lang="en-US" sz="2100" dirty="0"/>
+          </a:p>
+        </p:txBody>
+      </p:sp>
+      <p:sp>
+        <p:nvSpPr>
+          <p:cNvPr id="4" name="Text 2"/>
+          <p:cNvSpPr txBox="1"/>
+          <p:nvPr/>
+        </p:nvSpPr>
+        <p:spPr>
+          <a:xfrm>
+            <a:off x="548640" y="1920240"/>
+            <a:ext cx="5394960" cy="548640"/>
+          </a:xfrm>
+          <a:prstGeom prst="rect">
+            <a:avLst/>
+          </a:prstGeom>
+          <a:noFill/>
+          <a:ln/>
+        </p:spPr>
+        <p:txBody>
+          <a:bodyPr wrap="square" lIns="0" tIns="0" rIns="0" bIns="0" rtlCol="0" anchor="t"/>
+          <a:lstStyle/>
+          <a:p>
+            <a:pPr indent="0" marL="0">
+              <a:buNone/>
+            </a:pPr>
+            <a:r>
+              <a:rPr lang="en-US" sz="1600" dirty="0">
+                <a:solidFill>
+                  <a:schemeClr val="bg2"/>
+                </a:solidFill>
+              </a:rPr>
+              <a:t>Fix data where it is created, not after.</a:t>
+            </a:r>
+            <a:endParaRPr lang="en-US" sz="1600" dirty="0"/>
+          </a:p>
+        </p:txBody>
+      </p:sp>
+      <p:sp>
+        <p:nvSpPr>
+          <p:cNvPr id="5" name="Text 3"/>
+          <p:cNvSpPr txBox="1"/>
+          <p:nvPr/>
+        </p:nvSpPr>
+        <p:spPr>
+          <a:xfrm>
+            <a:off x="6217920" y="1417320"/>
+            <a:ext cx="5394960" cy="502920"/>
+          </a:xfrm>
+          <a:prstGeom prst="rect">
+            <a:avLst/>
+          </a:prstGeom>
+          <a:noFill/>
+          <a:ln/>
+        </p:spPr>
+        <p:txBody>
+          <a:bodyPr wrap="square" lIns="0" tIns="0" rIns="0" bIns="0" rtlCol="0" anchor="ctr"/>
+          <a:lstStyle/>
+          <a:p>
+            <a:pPr indent="0" marL="0">
+              <a:buNone/>
+            </a:pPr>
+            <a:r>
+              <a:rPr lang="en-US" sz="2100" b="1" dirty="0">
+                <a:solidFill>
+                  <a:schemeClr val="accent1"/>
+                </a:solidFill>
+              </a:rPr>
+              <a:t>Failures are silent</a:t>
+            </a:r>
+            <a:endParaRPr lang="en-US" sz="2100" dirty="0"/>
+          </a:p>
+        </p:txBody>
+      </p:sp>
+      <p:sp>
+        <p:nvSpPr>
+          <p:cNvPr id="6" name="Text 4"/>
+          <p:cNvSpPr txBox="1"/>
+          <p:nvPr/>
+        </p:nvSpPr>
+        <p:spPr>
+          <a:xfrm>
+            <a:off x="6217920" y="1920240"/>
+            <a:ext cx="5394960" cy="548640"/>
+          </a:xfrm>
+          <a:prstGeom prst="rect">
+            <a:avLst/>
+          </a:prstGeom>
+          <a:noFill/>
+          <a:ln/>
+        </p:spPr>
+        <p:txBody>
+          <a:bodyPr wrap="square" lIns="0" tIns="0" rIns="0" bIns="0" rtlCol="0" anchor="t"/>
+          <a:lstStyle/>
+          <a:p>
+            <a:pPr indent="0" marL="0">
+              <a:buNone/>
+            </a:pPr>
+            <a:r>
+              <a:rPr lang="en-US" sz="1600" dirty="0">
+                <a:solidFill>
+                  <a:schemeClr val="bg2"/>
+                </a:solidFill>
+              </a:rPr>
+              <a:t>A system can look finished and be wrong. Ask for proof.</a:t>
+            </a:r>
+            <a:endParaRPr lang="en-US" sz="1600" dirty="0"/>
+          </a:p>
+        </p:txBody>
+      </p:sp>
+      <p:sp>
+        <p:nvSpPr>
+          <p:cNvPr id="7" name="Text 5"/>
+          <p:cNvSpPr txBox="1"/>
+          <p:nvPr/>
+        </p:nvSpPr>
+        <p:spPr>
+          <a:xfrm>
+            <a:off x="548640" y="2651760"/>
+            <a:ext cx="5394960" cy="502920"/>
+          </a:xfrm>
+          <a:prstGeom prst="rect">
+            <a:avLst/>
+          </a:prstGeom>
+          <a:noFill/>
+          <a:ln/>
+        </p:spPr>
+        <p:txBody>
+          <a:bodyPr wrap="square" lIns="0" tIns="0" rIns="0" bIns="0" rtlCol="0" anchor="ctr"/>
+          <a:lstStyle/>
+          <a:p>
+            <a:pPr indent="0" marL="0">
+              <a:buNone/>
+            </a:pPr>
+            <a:r>
+              <a:rPr lang="en-US" sz="2100" b="1" dirty="0">
+                <a:solidFill>
+                  <a:schemeClr val="accent1"/>
+                </a:solidFill>
+              </a:rPr>
+              <a:t>Rules beat advice</a:t>
+            </a:r>
+            <a:endParaRPr lang="en-US" sz="2100" dirty="0"/>
+          </a:p>
+        </p:txBody>
+      </p:sp>
+      <p:sp>
+        <p:nvSpPr>
+          <p:cNvPr id="8" name="Text 6"/>
+          <p:cNvSpPr txBox="1"/>
+          <p:nvPr/>
+        </p:nvSpPr>
+        <p:spPr>
+          <a:xfrm>
+            <a:off x="548640" y="3154680"/>
+            <a:ext cx="5394960" cy="548640"/>
+          </a:xfrm>
+          <a:prstGeom prst="rect">
+            <a:avLst/>
+          </a:prstGeom>
+          <a:noFill/>
+          <a:ln/>
+        </p:spPr>
+        <p:txBody>
+          <a:bodyPr wrap="square" lIns="0" tIns="0" rIns="0" bIns="0" rtlCol="0" anchor="t"/>
+          <a:lstStyle/>
+          <a:p>
+            <a:pPr indent="0" marL="0">
+              <a:buNone/>
+            </a:pPr>
+            <a:r>
+              <a:rPr lang="en-US" sz="1600" dirty="0">
+                <a:solidFill>
+                  <a:schemeClr val="bg2"/>
+                </a:solidFill>
+              </a:rPr>
+              <a:t>Build checks into systems instead of writing guidance.</a:t>
+            </a:r>
+            <a:endParaRPr lang="en-US" sz="1600" dirty="0"/>
+          </a:p>
+        </p:txBody>
+      </p:sp>
+      <p:sp>
+        <p:nvSpPr>
+          <p:cNvPr id="9" name="Text 7"/>
+          <p:cNvSpPr txBox="1"/>
+          <p:nvPr/>
+        </p:nvSpPr>
+        <p:spPr>
+          <a:xfrm>
+            <a:off x="6217920" y="2651760"/>
+            <a:ext cx="5394960" cy="502920"/>
+          </a:xfrm>
+          <a:prstGeom prst="rect">
+            <a:avLst/>
+          </a:prstGeom>
+          <a:noFill/>
+          <a:ln/>
+        </p:spPr>
+        <p:txBody>
+          <a:bodyPr wrap="square" lIns="0" tIns="0" rIns="0" bIns="0" rtlCol="0" anchor="ctr"/>
+          <a:lstStyle/>
+          <a:p>
+            <a:pPr indent="0" marL="0">
+              <a:buNone/>
+            </a:pPr>
+            <a:r>
+              <a:rPr lang="en-US" sz="2100" b="1" dirty="0">
+                <a:solidFill>
+                  <a:schemeClr val="accent1"/>
+                </a:solidFill>
+              </a:rPr>
+              <a:t>Small habits add up</a:t>
+            </a:r>
+            <a:endParaRPr lang="en-US" sz="2100" dirty="0"/>
+          </a:p>
+        </p:txBody>
+      </p:sp>
+      <p:sp>
+        <p:nvSpPr>
+          <p:cNvPr id="10" name="Text 8"/>
+          <p:cNvSpPr txBox="1"/>
+          <p:nvPr/>
+        </p:nvSpPr>
+        <p:spPr>
+          <a:xfrm>
+            <a:off x="6217920" y="3154680"/>
+            <a:ext cx="5394960" cy="548640"/>
+          </a:xfrm>
+          <a:prstGeom prst="rect">
+            <a:avLst/>
+          </a:prstGeom>
+          <a:noFill/>
+          <a:ln/>
+        </p:spPr>
+        <p:txBody>
+          <a:bodyPr wrap="square" lIns="0" tIns="0" rIns="0" bIns="0" rtlCol="0" anchor="t"/>
+          <a:lstStyle/>
+          <a:p>
+            <a:pPr indent="0" marL="0">
+              <a:buNone/>
+            </a:pPr>
+            <a:r>
+              <a:rPr lang="en-US" sz="1600" dirty="0">
+                <a:solidFill>
+                  <a:schemeClr val="bg2"/>
+                </a:solidFill>
+              </a:rPr>
+              <a:t>Printing to sign made nearly half the problem.</a:t>
+            </a:r>
+            <a:endParaRPr lang="en-US" sz="1600" dirty="0"/>
+          </a:p>
+        </p:txBody>
+      </p:sp>
+      <p:sp>
+        <p:nvSpPr>
+          <p:cNvPr id="11" name="Shape 9"/>
+          <p:cNvSpPr/>
+          <p:nvPr/>
+        </p:nvSpPr>
+        <p:spPr>
+          <a:xfrm>
+            <a:off x="548640" y="3977640"/>
+            <a:ext cx="11064240" cy="2194560"/>
+          </a:xfrm>
+          <a:prstGeom prst="roundRect">
+            <a:avLst>
+              <a:gd name="adj" fmla="val 6250"/>
+            </a:avLst>
+          </a:prstGeom>
+          <a:solidFill>
+            <a:schemeClr val="bg1"/>
+          </a:solidFill>
+          <a:ln/>
+        </p:spPr>
+      </p:sp>
+      <p:sp>
+        <p:nvSpPr>
+          <p:cNvPr id="12" name="Text 10"/>
+          <p:cNvSpPr txBox="1"/>
+          <p:nvPr/>
+        </p:nvSpPr>
+        <p:spPr>
+          <a:xfrm>
+            <a:off x="868680" y="4160520"/>
+            <a:ext cx="10424160" cy="457200"/>
+          </a:xfrm>
+          <a:prstGeom prst="rect">
+            <a:avLst/>
+          </a:prstGeom>
+          <a:noFill/>
+          <a:ln/>
+        </p:spPr>
+        <p:txBody>
+          <a:bodyPr wrap="square" lIns="0" tIns="0" rIns="0" bIns="0" rtlCol="0" anchor="ctr"/>
+          <a:lstStyle/>
+          <a:p>
+            <a:pPr indent="0" marL="0">
+              <a:buNone/>
+            </a:pPr>
+            <a:r>
+              <a:rPr lang="en-US" sz="2000" b="1" dirty="0">
+                <a:solidFill>
+                  <a:schemeClr val="tx2"/>
+                </a:solidFill>
+              </a:rPr>
+              <a:t>What we are asking for</a:t>
+            </a:r>
+            <a:endParaRPr lang="en-US" sz="2000" dirty="0"/>
+          </a:p>
+        </p:txBody>
+      </p:sp>
+      <p:sp>
+        <p:nvSpPr>
+          <p:cNvPr id="13" name="Text 11"/>
+          <p:cNvSpPr txBox="1"/>
+          <p:nvPr/>
+        </p:nvSpPr>
+        <p:spPr>
+          <a:xfrm>
+            <a:off x="868680" y="4617720"/>
+            <a:ext cx="10424160" cy="1463040"/>
+          </a:xfrm>
+          <a:prstGeom prst="rect">
+            <a:avLst/>
+          </a:prstGeom>
+          <a:noFill/>
+          <a:ln/>
+        </p:spPr>
+        <p:txBody>
+          <a:bodyPr wrap="square" lIns="0" tIns="0" rIns="0" bIns="0" rtlCol="0" anchor="t"/>
+          <a:lstStyle/>
+          <a:p>
+            <a:pPr marL="342900" indent="-342900">
+              <a:spcAft>
+                <a:spcPts val="600"/>
+              </a:spcAft>
+              <a:buSzPct val="100000"/>
+              <a:buChar char="•"/>
+            </a:pPr>
+            <a:r>
+              <a:rPr lang="en-US" sz="1700" dirty="0">
+                <a:solidFill>
+                  <a:schemeClr val="tx1"/>
+                </a:solidFill>
+              </a:rPr>
+              <a:t>Stand up an AI build team and a cloud strategy, with an executive sponsor</a:t>
+            </a:r>
+            <a:endParaRPr lang="en-US" sz="1700" dirty="0"/>
+          </a:p>
+          <a:p>
+            <a:pPr marL="342900" indent="-342900">
+              <a:spcAft>
+                <a:spcPts val="600"/>
+              </a:spcAft>
+              <a:buSzPct val="100000"/>
+              <a:buChar char="•"/>
+            </a:pPr>
+            <a:r>
+              <a:rPr lang="en-US" sz="1700" dirty="0">
+                <a:solidFill>
+                  <a:schemeClr val="tx1"/>
+                </a:solidFill>
+              </a:rPr>
+              <a:t>Change our filing rules and portal through the Rules of Practice review already under way</a:t>
+            </a:r>
+            <a:endParaRPr lang="en-US" sz="1700" dirty="0"/>
+          </a:p>
+          <a:p>
+            <a:pPr marL="342900" indent="-342900">
+              <a:spcAft>
+                <a:spcPts val="600"/>
+              </a:spcAft>
+              <a:buSzPct val="100000"/>
+              <a:buChar char="•"/>
+            </a:pPr>
+            <a:r>
+              <a:rPr lang="en-US" sz="1700" dirty="0">
+                <a:solidFill>
+                  <a:schemeClr val="tx1"/>
+                </a:solidFill>
+              </a:rPr>
+              <a:t>Start now with two quick wins: the automatic upload check, and a privacy review of flawed redactions</a:t>
+            </a:r>
+            <a:endParaRPr lang="en-US" sz="1700" dirty="0"/>
+          </a:p>
+        </p:txBody>
+      </p:sp>
+      <p:sp>
+        <p:nvSpPr>
+          <p:cNvPr id="14" name="Text 12"/>
+          <p:cNvSpPr txBox="1"/>
+          <p:nvPr/>
+        </p:nvSpPr>
+        <p:spPr>
+          <a:xfrm>
+            <a:off x="548640" y="6263640"/>
+            <a:ext cx="10424160" cy="365760"/>
+          </a:xfrm>
+          <a:prstGeom prst="rect">
+            <a:avLst/>
+          </a:prstGeom>
+          <a:noFill/>
+          <a:ln/>
+        </p:spPr>
+        <p:txBody>
+          <a:bodyPr wrap="square" lIns="0" tIns="0" rIns="0" bIns="0" rtlCol="0" anchor="ctr"/>
+          <a:lstStyle/>
+          <a:p>
+            <a:pPr indent="0" marL="0">
+              <a:buNone/>
+            </a:pPr>
+            <a:r>
+              <a:rPr lang="en-US" sz="1200" i="1" dirty="0">
+                <a:solidFill>
+                  <a:schemeClr val="bg2"/>
+                </a:solidFill>
+              </a:rPr>
+              <a:t>“Agentic AI is not primarily a technology challenge.”  — UK Local Government Association, 2026</a:t>
+            </a:r>
+            <a:endParaRPr lang="en-US" sz="1200" dirty="0"/>
+          </a:p>
+        </p:txBody>
+      </p:sp>
+      <p:sp>
+        <p:nvSpPr>
+          <p:cNvPr id="25" name="Slide Number Placeholder 0"/>
+          <p:cNvSpPr>
+            <a:spLocks noGrp="1"/>
+          </p:cNvSpPr>
+          <p:nvPr>
+            <p:ph type="sldNum" sz="quarter" idx="4294967295"/>
+          </p:nvPr>
+        </p:nvSpPr>
+        <p:spPr>
+          <a:xfrm>
+            <a:off x="11155680" y="6400800"/>
+            <a:ext cx="457200" cy="274320"/>
+          </a:xfrm>
+          <a:prstGeom prst="rect">
+            <a:avLst/>
+          </a:prstGeom>
+          <a:extLst>
+            <a:ext uri="{C572A759-6A51-4108-AA02-DFA0A04FC94B}">
+              <ma14:wrappingTextBoxFlag xmlns:ma14="http://schemas.microsoft.com/office/mac/drawingml/2011/main" val="0"/>
+            </a:ext>
+          </a:extLst>
+        </p:spPr>
+        <p:txBody>
+          <a:bodyPr/>
+          <a:lstStyle>
+            <a:lvl1pPr>
+              <a:defRPr sz="1000">
+                <a:solidFill>
+                  <a:schemeClr val="bg2"/>
+                </a:solidFill>
+              </a:defRPr>
+            </a:lvl1pPr>
+          </a:lstStyle>
+          <a:p>
+            <a:pPr algn="r"/>
+            <a:fld id="{F7021451-1387-4CA6-816F-3879F97B5CBC}" type="slidenum">
+              <a:rPr b="0" lang="en-US"/>
+              <a:t>13</a:t>
             </a:fld>
             <a:endParaRPr lang="en-US"/>
           </a:p>
@@ -5920,7 +7197,7 @@
         </p:nvSpPr>
         <p:spPr>
           <a:xfrm>
-            <a:off x="548640" y="4297680"/>
+            <a:off x="548640" y="4114800"/>
             <a:ext cx="11064240" cy="1097280"/>
           </a:xfrm>
           <a:prstGeom prst="rect">
@@ -5945,6 +7222,78 @@
               <a:t>AI can only be as good as what it reads. Today, a quarter of our record would give it pictures to guess at, or text that is wrong.</a:t>
             </a:r>
             <a:endParaRPr lang="en-US" sz="2200" dirty="0"/>
+          </a:p>
+        </p:txBody>
+      </p:sp>
+      <p:sp>
+        <p:nvSpPr>
+          <p:cNvPr id="6" name="Text 4"/>
+          <p:cNvSpPr txBox="1"/>
+          <p:nvPr/>
+        </p:nvSpPr>
+        <p:spPr>
+          <a:xfrm>
+            <a:off x="548640" y="5349240"/>
+            <a:ext cx="11064240" cy="685800"/>
+          </a:xfrm>
+          <a:prstGeom prst="rect">
+            <a:avLst/>
+          </a:prstGeom>
+          <a:noFill/>
+          <a:ln/>
+        </p:spPr>
+        <p:txBody>
+          <a:bodyPr wrap="square" lIns="0" tIns="0" rIns="0" bIns="0" rtlCol="0" anchor="t"/>
+          <a:lstStyle/>
+          <a:p>
+            <a:pPr indent="0" marL="0">
+              <a:buNone/>
+            </a:pPr>
+            <a:r>
+              <a:rPr lang="en-US" sz="1600" i="1" dirty="0">
+                <a:solidFill>
+                  <a:schemeClr val="bg2"/>
+                </a:solidFill>
+              </a:rPr>
+              <a:t>“AI will not fix unclear processes, weak ownership or poor-quality data. In many cases, it will make those weaknesses more visible.”</a:t>
+            </a:r>
+            <a:endParaRPr lang="en-US" sz="1600" dirty="0"/>
+          </a:p>
+        </p:txBody>
+      </p:sp>
+      <p:sp>
+        <p:nvSpPr>
+          <p:cNvPr id="7" name="Text 5"/>
+          <p:cNvSpPr txBox="1"/>
+          <p:nvPr/>
+        </p:nvSpPr>
+        <p:spPr>
+          <a:xfrm>
+            <a:off x="548640" y="6035040"/>
+            <a:ext cx="10058400" cy="320040"/>
+          </a:xfrm>
+          <a:prstGeom prst="rect">
+            <a:avLst/>
+          </a:prstGeom>
+          <a:noFill/>
+          <a:ln/>
+        </p:spPr>
+        <p:txBody>
+          <a:bodyPr wrap="square" lIns="0" tIns="0" rIns="0" bIns="0" rtlCol="0" anchor="ctr"/>
+          <a:lstStyle/>
+          <a:p>
+            <a:pPr indent="0" marL="0">
+              <a:buNone/>
+            </a:pPr>
+            <a:r>
+              <a:rPr lang="en-US" sz="1200" dirty="0">
+                <a:solidFill>
+                  <a:schemeClr val="accent5"/>
+                </a:solidFill>
+              </a:rPr>
+              <a:t>— UK Local Government Association, A playbook for agentic AI (2026)</a:t>
+            </a:r>
+            <a:endParaRPr lang="en-US" sz="1200" dirty="0"/>
           </a:p>
         </p:txBody>
       </p:sp>

--- a/docs/ceo-deck/Getting our filings ready for AI.pptx
+++ b/docs/ceo-deck/Getting our filings ready for AI.pptx
@@ -18,9 +18,10 @@
     <p:sldId id="266" r:id="rId12"/>
     <p:sldId id="267" r:id="rId13"/>
     <p:sldId id="268" r:id="rId14"/>
+    <p:sldId id="269" r:id="rId15"/>
   </p:sldIdLst>
   <p:notesMasterIdLst>
-    <p:notesMasterId r:id="rId15"/>
+    <p:notesMasterId r:id="rId16"/>
   </p:notesMasterIdLst>
   <p:sldSz cx="12192000" cy="6858000"/>
   <p:notesSz cx="6858000" cy="12192000"/>
@@ -119,14 +120,14 @@
   <p:extLst>
     <p:ext uri="{521415D9-36F7-43E2-AB2F-B90AF26B5E84}">
       <p14:sectionLst xmlns:p14="http://schemas.microsoft.com/office/powerpoint/2010/main">
-        <p14:section name="The record" id="{a197ede7-47a3-55fe-98ef-ac215573e20d}">
+        <p14:section name="The record" id="{9917285b-4e8a-f238-c225-27a6b6e30bff}">
           <p14:sldIdLst>
             <p14:sldId id="256"/>
             <p14:sldId id="257"/>
             <p14:sldId id="258"/>
           </p14:sldIdLst>
         </p14:section>
-        <p14:section name="The problems" id="{d85d5ecd-789f-e77b-3b01-c35fd32a82ec}">
+        <p14:section name="The problems" id="{6447ab15-4ccd-3f3d-516d-9708622eee4d}">
           <p14:sldIdLst>
             <p14:sldId id="259"/>
             <p14:sldId id="260"/>
@@ -135,7 +136,7 @@
             <p14:sldId id="263"/>
           </p14:sldIdLst>
         </p14:section>
-        <p14:section name="The solution" id="{3a02df9b-f853-01bf-7581-4ce91f1a5b81}">
+        <p14:section name="The solution" id="{62c768b5-7f7a-198c-dff8-882491674b5d}">
           <p14:sldIdLst>
             <p14:sldId id="264"/>
             <p14:sldId id="265"/>
@@ -143,9 +144,14 @@
             <p14:sldId id="267"/>
           </p14:sldIdLst>
         </p14:section>
-        <p14:section name="Making change happen" id="{0d751de8-63fd-82d1-4f45-ab9c56eb515b}">
+        <p14:section name="Making change happen" id="{d7248157-e542-05ce-9832-51e670886962}">
           <p14:sldIdLst>
             <p14:sldId id="268"/>
+          </p14:sldIdLst>
+        </p14:section>
+        <p14:section name="Sources" id="{b7370835-5e41-6e39-692e-2e68a70aaffb}">
+          <p14:sldIdLst>
+            <p14:sldId id="269"/>
           </p14:sldIdLst>
         </p14:section>
       </p14:sectionLst>
@@ -928,6 +934,94 @@
             <a:fld id="{F7021451-1387-4CA6-816F-3879F97B5CBC}" type="slidenum">
               <a:rPr lang="en-US"/>
               <a:t>13</a:t>
+            </a:fld>
+            <a:endParaRPr lang="en-US"/>
+          </a:p>
+        </p:txBody>
+      </p:sp>
+    </p:spTree>
+    <p:extLst>
+      <p:ext uri="{BB962C8B-B14F-4D97-AF65-F5344CB8AC3E}">
+        <p14:creationId xmlns:p14="http://schemas.microsoft.com/office/powerpoint/2010/main" val="1024086991"/>
+      </p:ext>
+    </p:extLst>
+  </p:cSld>
+  <p:clrMapOvr>
+    <a:masterClrMapping/>
+  </p:clrMapOvr>
+</p:notes>
+</file>
+
+<file path=ppt/notesSlides/notesSlide14.xml><?xml version="1.0" encoding="utf-8"?>
+<p:notes xmlns:a="http://schemas.openxmlformats.org/drawingml/2006/main" xmlns:r="http://schemas.openxmlformats.org/officeDocument/2006/relationships" xmlns:p="http://schemas.openxmlformats.org/presentationml/2006/main">
+  <p:cSld>
+    <p:spTree>
+      <p:nvGrpSpPr>
+        <p:cNvPr id="1" name=""/>
+        <p:cNvGrpSpPr/>
+        <p:nvPr/>
+      </p:nvGrpSpPr>
+      <p:grpSpPr>
+        <a:xfrm>
+          <a:off x="0" y="0"/>
+          <a:ext cx="0" cy="0"/>
+          <a:chOff x="0" y="0"/>
+          <a:chExt cx="0" cy="0"/>
+        </a:xfrm>
+      </p:grpSpPr>
+      <p:sp>
+        <p:nvSpPr>
+          <p:cNvPr id="2" name="Slide Image Placeholder 1"/>
+          <p:cNvSpPr>
+            <a:spLocks noGrp="1" noRot="1" noChangeAspect="1"/>
+          </p:cNvSpPr>
+          <p:nvPr>
+            <p:ph type="sldImg"/>
+          </p:nvPr>
+        </p:nvSpPr>
+        <p:spPr/>
+      </p:sp>
+      <p:sp>
+        <p:nvSpPr>
+          <p:cNvPr id="3" name="Notes Placeholder 2"/>
+          <p:cNvSpPr>
+            <a:spLocks noGrp="1"/>
+          </p:cNvSpPr>
+          <p:nvPr>
+            <p:ph type="body" idx="1"/>
+          </p:nvPr>
+        </p:nvSpPr>
+        <p:spPr/>
+        <p:txBody>
+          <a:bodyPr/>
+          <a:lstStyle/>
+          <a:p>
+            <a:r>
+              <a:rPr lang="en-US" dirty="0"/>
+              <a:t>Sources for the figures and quotations in this presentation. Figures about the CER's record are counts from reading every PDF in REGDOCS (October 2026). Two figures are estimates: about 75 years assumes two minutes to read a page and 1,600 working hours a year; 13,000 novels assumes about 90,000 words a novel.</a:t>
+            </a:r>
+            <a:endParaRPr lang="en-US" dirty="0"/>
+          </a:p>
+        </p:txBody>
+      </p:sp>
+      <p:sp>
+        <p:nvSpPr>
+          <p:cNvPr id="4" name="Slide Number Placeholder 3"/>
+          <p:cNvSpPr>
+            <a:spLocks noGrp="1"/>
+          </p:cNvSpPr>
+          <p:nvPr>
+            <p:ph type="sldNum" sz="quarter" idx="10"/>
+          </p:nvPr>
+        </p:nvSpPr>
+        <p:spPr/>
+        <p:txBody>
+          <a:bodyPr/>
+          <a:lstStyle/>
+          <a:p>
+            <a:fld id="{F7021451-1387-4CA6-816F-3879F97B5CBC}" type="slidenum">
+              <a:rPr lang="en-US"/>
+              <a:t>14</a:t>
             </a:fld>
             <a:endParaRPr lang="en-US"/>
           </a:p>
@@ -6019,6 +6113,618 @@
             <a:fld id="{F7021451-1387-4CA6-816F-3879F97B5CBC}" type="slidenum">
               <a:rPr b="0" lang="en-US"/>
               <a:t>13</a:t>
+            </a:fld>
+            <a:endParaRPr lang="en-US"/>
+          </a:p>
+        </p:txBody>
+      </p:sp>
+    </p:spTree>
+  </p:cSld>
+  <p:clrMapOvr>
+    <a:masterClrMapping/>
+  </p:clrMapOvr>
+</p:sld>
+</file>
+
+<file path=ppt/slides/slide14.xml><?xml version="1.0" encoding="utf-8"?>
+<p:sld xmlns:a="http://schemas.openxmlformats.org/drawingml/2006/main" xmlns:r="http://schemas.openxmlformats.org/officeDocument/2006/relationships" xmlns:p="http://schemas.openxmlformats.org/presentationml/2006/main">
+  <p:cSld name="Slide 14">
+    <p:spTree>
+      <p:nvGrpSpPr>
+        <p:cNvPr id="1" name=""/>
+        <p:cNvGrpSpPr/>
+        <p:nvPr/>
+      </p:nvGrpSpPr>
+      <p:grpSpPr>
+        <a:xfrm>
+          <a:off x="0" y="0"/>
+          <a:ext cx="0" cy="0"/>
+          <a:chOff x="0" y="0"/>
+          <a:chExt cx="0" cy="0"/>
+        </a:xfrm>
+      </p:grpSpPr>
+      <p:sp>
+        <p:nvSpPr>
+          <p:cNvPr id="2" name="Text 0"/>
+          <p:cNvSpPr/>
+          <p:nvPr>
+            <p:ph idx="100" type="title" hasCustomPrompt="1"/>
+          </p:nvPr>
+        </p:nvSpPr>
+        <p:spPr>
+          <a:xfrm>
+            <a:off x="548640" y="365760"/>
+            <a:ext cx="11064240" cy="822960"/>
+          </a:xfrm>
+          <a:prstGeom prst="rect">
+            <a:avLst/>
+          </a:prstGeom>
+          <a:noFill/>
+          <a:ln/>
+        </p:spPr>
+        <p:txBody>
+          <a:bodyPr wrap="square" lIns="0" tIns="0" rIns="0" bIns="0" rtlCol="0" anchor="ctr"/>
+          <a:lstStyle/>
+          <a:p>
+            <a:pPr indent="0" marL="0">
+              <a:buNone/>
+            </a:pPr>
+            <a:r>
+              <a:rPr lang="en-US" sz="3400" b="1" dirty="0">
+                <a:solidFill>
+                  <a:schemeClr val="tx2"/>
+                </a:solidFill>
+              </a:rPr>
+              <a:t>Sources</a:t>
+            </a:r>
+            <a:endParaRPr lang="en-US" sz="3400" dirty="0"/>
+          </a:p>
+        </p:txBody>
+      </p:sp>
+      <p:sp>
+        <p:nvSpPr>
+          <p:cNvPr id="3" name="Text 1"/>
+          <p:cNvSpPr txBox="1"/>
+          <p:nvPr/>
+        </p:nvSpPr>
+        <p:spPr>
+          <a:xfrm>
+            <a:off x="548640" y="1371600"/>
+            <a:ext cx="3291840" cy="640080"/>
+          </a:xfrm>
+          <a:prstGeom prst="rect">
+            <a:avLst/>
+          </a:prstGeom>
+          <a:noFill/>
+          <a:ln/>
+        </p:spPr>
+        <p:txBody>
+          <a:bodyPr wrap="square" lIns="0" tIns="0" rIns="0" bIns="0" rtlCol="0" anchor="t"/>
+          <a:lstStyle/>
+          <a:p>
+            <a:pPr indent="0" marL="0">
+              <a:buNone/>
+            </a:pPr>
+            <a:r>
+              <a:rPr lang="en-US" sz="1300" b="1" dirty="0">
+                <a:solidFill>
+                  <a:schemeClr val="tx2"/>
+                </a:solidFill>
+              </a:rPr>
+              <a:t>Our record</a:t>
+            </a:r>
+            <a:endParaRPr lang="en-US" sz="1300" dirty="0"/>
+          </a:p>
+        </p:txBody>
+      </p:sp>
+      <p:sp>
+        <p:nvSpPr>
+          <p:cNvPr id="4" name="Text 2"/>
+          <p:cNvSpPr txBox="1"/>
+          <p:nvPr/>
+        </p:nvSpPr>
+        <p:spPr>
+          <a:xfrm>
+            <a:off x="4023360" y="1371600"/>
+            <a:ext cx="7589520" cy="640080"/>
+          </a:xfrm>
+          <a:prstGeom prst="rect">
+            <a:avLst/>
+          </a:prstGeom>
+          <a:noFill/>
+          <a:ln/>
+        </p:spPr>
+        <p:txBody>
+          <a:bodyPr wrap="square" lIns="0" tIns="0" rIns="0" bIns="0" rtlCol="0" anchor="t"/>
+          <a:lstStyle/>
+          <a:p>
+            <a:pPr indent="0" marL="0">
+              <a:buNone/>
+            </a:pPr>
+            <a:r>
+              <a:rPr lang="en-US" sz="1300" dirty="0">
+                <a:solidFill>
+                  <a:schemeClr val="tx1"/>
+                </a:solidFill>
+              </a:rPr>
+              <a:t>Every PDF in REGDOCS read page by page, October 2026: 269,025 documents. Reports and code in the cer-regdocs5 project (census, integrity pass, filing guidance).</a:t>
+            </a:r>
+            <a:endParaRPr lang="en-US" sz="1300" dirty="0"/>
+          </a:p>
+        </p:txBody>
+      </p:sp>
+      <p:sp>
+        <p:nvSpPr>
+          <p:cNvPr id="5" name="Text 3"/>
+          <p:cNvSpPr txBox="1"/>
+          <p:nvPr/>
+        </p:nvSpPr>
+        <p:spPr>
+          <a:xfrm>
+            <a:off x="548640" y="2057400"/>
+            <a:ext cx="3291840" cy="640080"/>
+          </a:xfrm>
+          <a:prstGeom prst="rect">
+            <a:avLst/>
+          </a:prstGeom>
+          <a:noFill/>
+          <a:ln/>
+        </p:spPr>
+        <p:txBody>
+          <a:bodyPr wrap="square" lIns="0" tIns="0" rIns="0" bIns="0" rtlCol="0" anchor="t"/>
+          <a:lstStyle/>
+          <a:p>
+            <a:pPr indent="0" marL="0">
+              <a:buNone/>
+            </a:pPr>
+            <a:r>
+              <a:rPr lang="en-US" sz="1300" b="1" dirty="0">
+                <a:solidFill>
+                  <a:schemeClr val="tx2"/>
+                </a:solidFill>
+              </a:rPr>
+              <a:t>UK Local Government Association</a:t>
+            </a:r>
+            <a:endParaRPr lang="en-US" sz="1300" dirty="0"/>
+          </a:p>
+        </p:txBody>
+      </p:sp>
+      <p:sp>
+        <p:nvSpPr>
+          <p:cNvPr id="6" name="Text 4"/>
+          <p:cNvSpPr txBox="1"/>
+          <p:nvPr/>
+        </p:nvSpPr>
+        <p:spPr>
+          <a:xfrm>
+            <a:off x="4023360" y="2057400"/>
+            <a:ext cx="7589520" cy="640080"/>
+          </a:xfrm>
+          <a:prstGeom prst="rect">
+            <a:avLst/>
+          </a:prstGeom>
+          <a:noFill/>
+          <a:ln/>
+        </p:spPr>
+        <p:txBody>
+          <a:bodyPr wrap="square" lIns="0" tIns="0" rIns="0" bIns="0" rtlCol="0" anchor="t"/>
+          <a:lstStyle/>
+          <a:p>
+            <a:pPr indent="0" marL="0">
+              <a:buNone/>
+            </a:pPr>
+            <a:r>
+              <a:rPr lang="en-US" sz="1300" dirty="0">
+                <a:solidFill>
+                  <a:schemeClr val="tx1"/>
+                </a:solidFill>
+              </a:rPr>
+              <a:t>A playbook for agentic AI in local government, 9 October 2026. local.gov.uk/publications/playbook-agentic-ai-local-government</a:t>
+            </a:r>
+            <a:endParaRPr lang="en-US" sz="1300" dirty="0"/>
+          </a:p>
+        </p:txBody>
+      </p:sp>
+      <p:sp>
+        <p:nvSpPr>
+          <p:cNvPr id="7" name="Text 5"/>
+          <p:cNvSpPr txBox="1"/>
+          <p:nvPr/>
+        </p:nvSpPr>
+        <p:spPr>
+          <a:xfrm>
+            <a:off x="548640" y="2743200"/>
+            <a:ext cx="3291840" cy="640080"/>
+          </a:xfrm>
+          <a:prstGeom prst="rect">
+            <a:avLst/>
+          </a:prstGeom>
+          <a:noFill/>
+          <a:ln/>
+        </p:spPr>
+        <p:txBody>
+          <a:bodyPr wrap="square" lIns="0" tIns="0" rIns="0" bIns="0" rtlCol="0" anchor="t"/>
+          <a:lstStyle/>
+          <a:p>
+            <a:pPr indent="0" marL="0">
+              <a:buNone/>
+            </a:pPr>
+            <a:r>
+              <a:rPr lang="en-US" sz="1300" b="1" dirty="0">
+                <a:solidFill>
+                  <a:schemeClr val="tx2"/>
+                </a:solidFill>
+              </a:rPr>
+              <a:t>Cyber security agencies incl. the Canadian Centre for Cyber Security</a:t>
+            </a:r>
+            <a:endParaRPr lang="en-US" sz="1300" dirty="0"/>
+          </a:p>
+        </p:txBody>
+      </p:sp>
+      <p:sp>
+        <p:nvSpPr>
+          <p:cNvPr id="8" name="Text 6"/>
+          <p:cNvSpPr txBox="1"/>
+          <p:nvPr/>
+        </p:nvSpPr>
+        <p:spPr>
+          <a:xfrm>
+            <a:off x="4023360" y="2743200"/>
+            <a:ext cx="7589520" cy="640080"/>
+          </a:xfrm>
+          <a:prstGeom prst="rect">
+            <a:avLst/>
+          </a:prstGeom>
+          <a:noFill/>
+          <a:ln/>
+        </p:spPr>
+        <p:txBody>
+          <a:bodyPr wrap="square" lIns="0" tIns="0" rIns="0" bIns="0" rtlCol="0" anchor="t"/>
+          <a:lstStyle/>
+          <a:p>
+            <a:pPr indent="0" marL="0">
+              <a:buNone/>
+            </a:pPr>
+            <a:r>
+              <a:rPr lang="en-US" sz="1300" dirty="0">
+                <a:solidFill>
+                  <a:schemeClr val="tx1"/>
+                </a:solidFill>
+              </a:rPr>
+              <a:t>Careful adoption of agentic AI services, 1 May 2026. cyber.gov.au (secure design: artificial intelligence)</a:t>
+            </a:r>
+            <a:endParaRPr lang="en-US" sz="1300" dirty="0"/>
+          </a:p>
+        </p:txBody>
+      </p:sp>
+      <p:sp>
+        <p:nvSpPr>
+          <p:cNvPr id="9" name="Text 7"/>
+          <p:cNvSpPr txBox="1"/>
+          <p:nvPr/>
+        </p:nvSpPr>
+        <p:spPr>
+          <a:xfrm>
+            <a:off x="548640" y="3429000"/>
+            <a:ext cx="3291840" cy="640080"/>
+          </a:xfrm>
+          <a:prstGeom prst="rect">
+            <a:avLst/>
+          </a:prstGeom>
+          <a:noFill/>
+          <a:ln/>
+        </p:spPr>
+        <p:txBody>
+          <a:bodyPr wrap="square" lIns="0" tIns="0" rIns="0" bIns="0" rtlCol="0" anchor="t"/>
+          <a:lstStyle/>
+          <a:p>
+            <a:pPr indent="0" marL="0">
+              <a:buNone/>
+            </a:pPr>
+            <a:r>
+              <a:rPr lang="en-US" sz="1300" b="1" dirty="0">
+                <a:solidFill>
+                  <a:schemeClr val="tx2"/>
+                </a:solidFill>
+              </a:rPr>
+              <a:t>Government of Canada</a:t>
+            </a:r>
+            <a:endParaRPr lang="en-US" sz="1300" dirty="0"/>
+          </a:p>
+        </p:txBody>
+      </p:sp>
+      <p:sp>
+        <p:nvSpPr>
+          <p:cNvPr id="10" name="Text 8"/>
+          <p:cNvSpPr txBox="1"/>
+          <p:nvPr/>
+        </p:nvSpPr>
+        <p:spPr>
+          <a:xfrm>
+            <a:off x="4023360" y="3429000"/>
+            <a:ext cx="7589520" cy="640080"/>
+          </a:xfrm>
+          <a:prstGeom prst="rect">
+            <a:avLst/>
+          </a:prstGeom>
+          <a:noFill/>
+          <a:ln/>
+        </p:spPr>
+        <p:txBody>
+          <a:bodyPr wrap="square" lIns="0" tIns="0" rIns="0" bIns="0" rtlCol="0" anchor="t"/>
+          <a:lstStyle/>
+          <a:p>
+            <a:pPr indent="0" marL="0">
+              <a:buNone/>
+            </a:pPr>
+            <a:r>
+              <a:rPr lang="en-US" sz="1300" dirty="0">
+                <a:solidFill>
+                  <a:schemeClr val="tx1"/>
+                </a:solidFill>
+              </a:rPr>
+              <a:t>AI Strategy for the Federal Public Service 2025–2027. canada.ca/en/government/system/digital-government/digital-government-innovations/responsible-use-ai</a:t>
+            </a:r>
+            <a:endParaRPr lang="en-US" sz="1300" dirty="0"/>
+          </a:p>
+        </p:txBody>
+      </p:sp>
+      <p:sp>
+        <p:nvSpPr>
+          <p:cNvPr id="11" name="Text 9"/>
+          <p:cNvSpPr txBox="1"/>
+          <p:nvPr/>
+        </p:nvSpPr>
+        <p:spPr>
+          <a:xfrm>
+            <a:off x="548640" y="4114800"/>
+            <a:ext cx="3291840" cy="640080"/>
+          </a:xfrm>
+          <a:prstGeom prst="rect">
+            <a:avLst/>
+          </a:prstGeom>
+          <a:noFill/>
+          <a:ln/>
+        </p:spPr>
+        <p:txBody>
+          <a:bodyPr wrap="square" lIns="0" tIns="0" rIns="0" bIns="0" rtlCol="0" anchor="t"/>
+          <a:lstStyle/>
+          <a:p>
+            <a:pPr indent="0" marL="0">
+              <a:buNone/>
+            </a:pPr>
+            <a:r>
+              <a:rPr lang="en-US" sz="1300" b="1" dirty="0">
+                <a:solidFill>
+                  <a:schemeClr val="tx2"/>
+                </a:solidFill>
+              </a:rPr>
+              <a:t>BC Energy Regulator</a:t>
+            </a:r>
+            <a:endParaRPr lang="en-US" sz="1300" dirty="0"/>
+          </a:p>
+        </p:txBody>
+      </p:sp>
+      <p:sp>
+        <p:nvSpPr>
+          <p:cNvPr id="12" name="Text 10"/>
+          <p:cNvSpPr txBox="1"/>
+          <p:nvPr/>
+        </p:nvSpPr>
+        <p:spPr>
+          <a:xfrm>
+            <a:off x="4023360" y="4114800"/>
+            <a:ext cx="7589520" cy="640080"/>
+          </a:xfrm>
+          <a:prstGeom prst="rect">
+            <a:avLst/>
+          </a:prstGeom>
+          <a:noFill/>
+          <a:ln/>
+        </p:spPr>
+        <p:txBody>
+          <a:bodyPr wrap="square" lIns="0" tIns="0" rIns="0" bIns="0" rtlCol="0" anchor="t"/>
+          <a:lstStyle/>
+          <a:p>
+            <a:pPr indent="0" marL="0">
+              <a:buNone/>
+            </a:pPr>
+            <a:r>
+              <a:rPr lang="en-US" sz="1300" dirty="0">
+                <a:solidFill>
+                  <a:schemeClr val="tx1"/>
+                </a:solidFill>
+              </a:rPr>
+              <a:t>AI enhancement services for permit automation, CanadaBuys tender BC231865, July 2026.</a:t>
+            </a:r>
+            <a:endParaRPr lang="en-US" sz="1300" dirty="0"/>
+          </a:p>
+        </p:txBody>
+      </p:sp>
+      <p:sp>
+        <p:nvSpPr>
+          <p:cNvPr id="13" name="Text 11"/>
+          <p:cNvSpPr txBox="1"/>
+          <p:nvPr/>
+        </p:nvSpPr>
+        <p:spPr>
+          <a:xfrm>
+            <a:off x="548640" y="4800600"/>
+            <a:ext cx="3291840" cy="640080"/>
+          </a:xfrm>
+          <a:prstGeom prst="rect">
+            <a:avLst/>
+          </a:prstGeom>
+          <a:noFill/>
+          <a:ln/>
+        </p:spPr>
+        <p:txBody>
+          <a:bodyPr wrap="square" lIns="0" tIns="0" rIns="0" bIns="0" rtlCol="0" anchor="t"/>
+          <a:lstStyle/>
+          <a:p>
+            <a:pPr indent="0" marL="0">
+              <a:buNone/>
+            </a:pPr>
+            <a:r>
+              <a:rPr lang="en-US" sz="1300" b="1" dirty="0">
+                <a:solidFill>
+                  <a:schemeClr val="tx2"/>
+                </a:solidFill>
+              </a:rPr>
+              <a:t>Alberta Energy Regulator</a:t>
+            </a:r>
+            <a:endParaRPr lang="en-US" sz="1300" dirty="0"/>
+          </a:p>
+        </p:txBody>
+      </p:sp>
+      <p:sp>
+        <p:nvSpPr>
+          <p:cNvPr id="14" name="Text 12"/>
+          <p:cNvSpPr txBox="1"/>
+          <p:nvPr/>
+        </p:nvSpPr>
+        <p:spPr>
+          <a:xfrm>
+            <a:off x="4023360" y="4800600"/>
+            <a:ext cx="7589520" cy="640080"/>
+          </a:xfrm>
+          <a:prstGeom prst="rect">
+            <a:avLst/>
+          </a:prstGeom>
+          <a:noFill/>
+          <a:ln/>
+        </p:spPr>
+        <p:txBody>
+          <a:bodyPr wrap="square" lIns="0" tIns="0" rIns="0" bIns="0" rtlCol="0" anchor="t"/>
+          <a:lstStyle/>
+          <a:p>
+            <a:pPr indent="0" marL="0">
+              <a:buNone/>
+            </a:pPr>
+            <a:r>
+              <a:rPr lang="en-US" sz="1300" dirty="0">
+                <a:solidFill>
+                  <a:schemeClr val="tx1"/>
+                </a:solidFill>
+              </a:rPr>
+              <a:t>OneStop results as reported by IT World Canada (itbusiness.ca), citing the AER 2017/18 annual report.</a:t>
+            </a:r>
+            <a:endParaRPr lang="en-US" sz="1300" dirty="0"/>
+          </a:p>
+        </p:txBody>
+      </p:sp>
+      <p:sp>
+        <p:nvSpPr>
+          <p:cNvPr id="15" name="Text 13"/>
+          <p:cNvSpPr txBox="1"/>
+          <p:nvPr/>
+        </p:nvSpPr>
+        <p:spPr>
+          <a:xfrm>
+            <a:off x="548640" y="5486400"/>
+            <a:ext cx="3291840" cy="640080"/>
+          </a:xfrm>
+          <a:prstGeom prst="rect">
+            <a:avLst/>
+          </a:prstGeom>
+          <a:noFill/>
+          <a:ln/>
+        </p:spPr>
+        <p:txBody>
+          <a:bodyPr wrap="square" lIns="0" tIns="0" rIns="0" bIns="0" rtlCol="0" anchor="t"/>
+          <a:lstStyle/>
+          <a:p>
+            <a:pPr indent="0" marL="0">
+              <a:buNone/>
+            </a:pPr>
+            <a:r>
+              <a:rPr lang="en-US" sz="1300" b="1" dirty="0">
+                <a:solidFill>
+                  <a:schemeClr val="tx2"/>
+                </a:solidFill>
+              </a:rPr>
+              <a:t>Canada Energy Regulator</a:t>
+            </a:r>
+            <a:endParaRPr lang="en-US" sz="1300" dirty="0"/>
+          </a:p>
+        </p:txBody>
+      </p:sp>
+      <p:sp>
+        <p:nvSpPr>
+          <p:cNvPr id="16" name="Text 14"/>
+          <p:cNvSpPr txBox="1"/>
+          <p:nvPr/>
+        </p:nvSpPr>
+        <p:spPr>
+          <a:xfrm>
+            <a:off x="4023360" y="5486400"/>
+            <a:ext cx="7589520" cy="640080"/>
+          </a:xfrm>
+          <a:prstGeom prst="rect">
+            <a:avLst/>
+          </a:prstGeom>
+          <a:noFill/>
+          <a:ln/>
+        </p:spPr>
+        <p:txBody>
+          <a:bodyPr wrap="square" lIns="0" tIns="0" rIns="0" bIns="0" rtlCol="0" anchor="t"/>
+          <a:lstStyle/>
+          <a:p>
+            <a:pPr indent="0" marL="0">
+              <a:buNone/>
+            </a:pPr>
+            <a:r>
+              <a:rPr lang="en-US" sz="1300" dirty="0">
+                <a:solidFill>
+                  <a:schemeClr val="tx1"/>
+                </a:solidFill>
+              </a:rPr>
+              <a:t>Filer’s Guide to Electronic Submission (June 2025); Filing Manual, chapter 1 (July 2025); Strategic Plan 2024–2027; Rules of Practice and Procedure review (2024–).</a:t>
+            </a:r>
+            <a:endParaRPr lang="en-US" sz="1300" dirty="0"/>
+          </a:p>
+        </p:txBody>
+      </p:sp>
+      <p:sp>
+        <p:nvSpPr>
+          <p:cNvPr id="25" name="Slide Number Placeholder 0"/>
+          <p:cNvSpPr>
+            <a:spLocks noGrp="1"/>
+          </p:cNvSpPr>
+          <p:nvPr>
+            <p:ph type="sldNum" sz="quarter" idx="4294967295"/>
+          </p:nvPr>
+        </p:nvSpPr>
+        <p:spPr>
+          <a:xfrm>
+            <a:off x="11155680" y="6400800"/>
+            <a:ext cx="457200" cy="274320"/>
+          </a:xfrm>
+          <a:prstGeom prst="rect">
+            <a:avLst/>
+          </a:prstGeom>
+          <a:extLst>
+            <a:ext uri="{C572A759-6A51-4108-AA02-DFA0A04FC94B}">
+              <ma14:wrappingTextBoxFlag xmlns:ma14="http://schemas.microsoft.com/office/mac/drawingml/2011/main" val="0"/>
+            </a:ext>
+          </a:extLst>
+        </p:spPr>
+        <p:txBody>
+          <a:bodyPr/>
+          <a:lstStyle>
+            <a:lvl1pPr>
+              <a:defRPr sz="1000">
+                <a:solidFill>
+                  <a:schemeClr val="accent3"/>
+                </a:solidFill>
+              </a:defRPr>
+            </a:lvl1pPr>
+          </a:lstStyle>
+          <a:p>
+            <a:pPr algn="r"/>
+            <a:fld id="{F7021451-1387-4CA6-816F-3879F97B5CBC}" type="slidenum">
+              <a:rPr b="0" lang="en-US"/>
+              <a:t>14</a:t>
             </a:fld>
             <a:endParaRPr lang="en-US"/>
           </a:p>

--- a/docs/ceo-deck/Getting our filings ready for AI.pptx
+++ b/docs/ceo-deck/Getting our filings ready for AI.pptx
@@ -19,9 +19,10 @@
     <p:sldId id="267" r:id="rId13"/>
     <p:sldId id="268" r:id="rId14"/>
     <p:sldId id="269" r:id="rId15"/>
+    <p:sldId id="270" r:id="rId16"/>
   </p:sldIdLst>
   <p:notesMasterIdLst>
-    <p:notesMasterId r:id="rId16"/>
+    <p:notesMasterId r:id="rId17"/>
   </p:notesMasterIdLst>
   <p:sldSz cx="12192000" cy="6858000"/>
   <p:notesSz cx="6858000" cy="12192000"/>
@@ -120,38 +121,39 @@
   <p:extLst>
     <p:ext uri="{521415D9-36F7-43E2-AB2F-B90AF26B5E84}">
       <p14:sectionLst xmlns:p14="http://schemas.microsoft.com/office/powerpoint/2010/main">
-        <p14:section name="The record" id="{9917285b-4e8a-f238-c225-27a6b6e30bff}">
+        <p14:section name="The record" id="{b2b137fd-1256-5e41-f2da-649a5348e58e}">
           <p14:sldIdLst>
             <p14:sldId id="256"/>
             <p14:sldId id="257"/>
             <p14:sldId id="258"/>
           </p14:sldIdLst>
         </p14:section>
-        <p14:section name="The problems" id="{6447ab15-4ccd-3f3d-516d-9708622eee4d}">
+        <p14:section name="The problems" id="{9d8c030b-21d3-a6bd-d44e-5bc261c239ec}">
           <p14:sldIdLst>
             <p14:sldId id="259"/>
             <p14:sldId id="260"/>
             <p14:sldId id="261"/>
             <p14:sldId id="262"/>
             <p14:sldId id="263"/>
+            <p14:sldId id="264"/>
           </p14:sldIdLst>
         </p14:section>
-        <p14:section name="The solution" id="{62c768b5-7f7a-198c-dff8-882491674b5d}">
+        <p14:section name="The solution" id="{5388c25a-4363-7ab4-5ea7-b8b0f03c1b64}">
           <p14:sldIdLst>
-            <p14:sldId id="264"/>
             <p14:sldId id="265"/>
             <p14:sldId id="266"/>
             <p14:sldId id="267"/>
-          </p14:sldIdLst>
-        </p14:section>
-        <p14:section name="Making change happen" id="{d7248157-e542-05ce-9832-51e670886962}">
-          <p14:sldIdLst>
             <p14:sldId id="268"/>
           </p14:sldIdLst>
         </p14:section>
-        <p14:section name="Sources" id="{b7370835-5e41-6e39-692e-2e68a70aaffb}">
+        <p14:section name="Making change happen" id="{3a14ef85-ea99-ea07-eae1-68179fb3b3c4}">
           <p14:sldIdLst>
             <p14:sldId id="269"/>
+          </p14:sldIdLst>
+        </p14:section>
+        <p14:section name="Sources" id="{8a817e11-391f-3c9c-2368-d95f37012999}">
+          <p14:sldIdLst>
+            <p14:sldId id="270"/>
           </p14:sldIdLst>
         </p14:section>
       </p14:sectionLst>
@@ -646,7 +648,7 @@
           <a:p>
             <a:r>
               <a:rPr lang="en-US" dirty="0"/>
-              <a:t>The second part is our own portal. First and most important, check every file automatically when it is uploaded, and tell the filer exactly what is wrong while they can still fix it - a rule built into the system works where advice in a manual does not. Second, fingerprint and time-stamp every file so anyone can prove a copy is the original without a paper receipt. Third, accept spreadsheets, map files and digital signatures, not just PDFs. Fourth, open the record to automation with bulk access, so our own AI tools, and the public's, can use it.</a:t>
+              <a:t>The first part of the solution is what we ask of filers - mostly settings and habits, not new work. Save documents as PDF from the software that made them instead of printing and scanning. Sign digitally, including sworn statements. Send tables as spreadsheets and maps as map files alongside the document. Redact with tools that actually remove the words. And turn on the accessibility tagging most office software already offers - the same setting that helps blind readers also tells a computer what is a heading and what is a table. The CER's review of its Rules of Practice and Procedure, which already lists modernizing electronic filing, is the natural place to make these changes.</a:t>
             </a:r>
             <a:endParaRPr lang="en-US" dirty="0"/>
           </a:p>
@@ -734,7 +736,7 @@
           <a:p>
             <a:r>
               <a:rPr lang="en-US" dirty="0"/>
-              <a:t>The third part is the capability to do this well. AI is a team effort, not a tool you buy. A typical AI program needs a business owner who sets priorities and measures value; regulatory experts who define what a right answer looks like; data engineers who turn the record into reliable data; AI engineers who build, test and monitor the tools; a cloud and security team for a secure, scalable platform; information management for records and fingerprints; privacy, legal and ethics under the federal rules on automated decision-making; and change and training to bring staff and filers along. Others are already moving. The BC Energy Regulator is expanding an AI permit assistant on its cloud platform (CanadaBuys tender, July 2026). The Alberta Energy Regulator's OneStop portal approved about 70 per cent of reclamation, pipeline and water applications automatically (AER 2017/18 annual report, as reported by IT World Canada). The federal AI Strategy for the Public Service 2025-2027 creates an AI Centre of Expertise, sets responsible-AI expectations, and notes a 30 per cent vacancy rate in digital roles - so talent is the constraint to plan for.</a:t>
+              <a:t>The second part is our own portal. First and most important, check every file automatically when it is uploaded, and tell the filer exactly what is wrong while they can still fix it - a rule built into the system works where advice in a manual does not. Second, fingerprint and time-stamp every file so anyone can prove a copy is the original without a paper receipt. Third, accept spreadsheets, map files and digital signatures, not just PDFs. Fourth, open the record to automation with bulk access, so our own AI tools, and the public's, can use it.</a:t>
             </a:r>
             <a:endParaRPr lang="en-US" dirty="0"/>
           </a:p>
@@ -822,7 +824,7 @@
           <a:p>
             <a:r>
               <a:rPr lang="en-US" dirty="0"/>
-              <a:t>How to start safely, drawing on the UK Local Government Association's playbook for agentic AI (October 2026), written with councils and endorsed by the LGA. Scale governance with risk, in three tiers. Tier one is personal use - drafting and summarising - low risk, covered by staff guidance. Tier two is team use - knowledge assistants and triage within a service - with a named service owner and central oversight. Tier three is organisation-wide, public-facing or decision support, which needs formal approval and assurance. And manage each AI tool like a new employee: a job description that sets its task, data and limits; a trial period before full roll-out; performance reviews; and the ability to switch it off, with a person always accountable. Train every level - all staff to use AI safely, team leads to build it into their work, and executives to weigh risk and value. The playbook's cyber-security guidance was co-written with the Canadian Centre for Cyber Security.</a:t>
+              <a:t>The third part is the capability to do this well. AI is a team effort, not a tool you buy. A typical AI program needs a business owner who sets priorities and measures value; regulatory experts who define what a right answer looks like; data engineers who turn the record into reliable data; AI engineers who build, test and monitor the tools; a cloud and security team for a secure, scalable platform; information management for records and fingerprints; privacy, legal and ethics under the federal rules on automated decision-making; and change and training to bring staff and filers along. Others are already moving. The BC Energy Regulator is expanding an AI permit assistant on its cloud platform (CanadaBuys tender, July 2026). The Alberta Energy Regulator's OneStop portal approved about 70 per cent of reclamation, pipeline and water applications automatically (AER 2017/18 annual report, as reported by IT World Canada). The federal AI Strategy for the Public Service 2025-2027 creates an AI Centre of Expertise, sets responsible-AI expectations, and notes a 30 per cent vacancy rate in digital roles - so talent is the constraint to plan for.</a:t>
             </a:r>
             <a:endParaRPr lang="en-US" dirty="0"/>
           </a:p>
@@ -910,7 +912,7 @@
           <a:p>
             <a:r>
               <a:rPr lang="en-US" dirty="0"/>
-              <a:t>These lessons apply well beyond filings. AI is only as good as its data, so fix data where it is created. Failures are silent - a system can look finished and still be wrong, so ask for proof. Rules beat advice - build checks into systems rather than writing more guidance. And small habits add up - printing documents just to sign them created nearly half of this problem. What we are asking for: stand up an AI build team and a cloud strategy with an executive sponsor; change our filing rules and portal through the Rules of Practice review that is already under way; and start now with two quick wins - the automatic upload check, and a privacy review of the documents whose redactions do not hide anything. Others have reached the same conclusion: the UK Local Government Association's playbook for agentic AI (October 2026) says agentic AI is not primarily a technology challenge, and that adoption depends on data maturity, process clarity and leadership discipline as much as on technical capability.</a:t>
+              <a:t>How to start safely, drawing on the UK Local Government Association's playbook for agentic AI (October 2026), written with councils and endorsed by the LGA. Scale governance with risk, in three tiers. Tier one is personal use - drafting and summarising - low risk, covered by staff guidance. Tier two is team use - knowledge assistants and triage within a service - with a named service owner and central oversight. Tier three is organisation-wide, public-facing or decision support, which needs formal approval and assurance. And manage each AI tool like a new employee: a job description that sets its task, data and limits; a trial period before full roll-out; performance reviews; and the ability to switch it off, with a person always accountable. Train every level - all staff to use AI safely, team leads to build it into their work, and executives to weigh risk and value. The playbook's cyber-security guidance was co-written with the Canadian Centre for Cyber Security.</a:t>
             </a:r>
             <a:endParaRPr lang="en-US" dirty="0"/>
           </a:p>
@@ -998,7 +1000,7 @@
           <a:p>
             <a:r>
               <a:rPr lang="en-US" dirty="0"/>
-              <a:t>Sources for the figures and quotations in this presentation. Figures about the CER's record are counts from reading every PDF in REGDOCS (October 2026). Two figures are estimates: about 75 years assumes two minutes to read a page and 1,600 working hours a year; 13,000 novels assumes about 90,000 words a novel.</a:t>
+              <a:t>These lessons apply well beyond filings. AI is only as good as its data, so fix data where it is created. Failures are silent - a system can look finished and still be wrong, so ask for proof. Rules beat advice - build checks into systems rather than writing more guidance. And small habits add up - printing documents just to sign them created nearly half of this problem. What we are asking for: stand up an AI build team and a cloud strategy with an executive sponsor; change our filing rules and portal through the Rules of Practice review that is already under way; and start now with two quick wins - the automatic upload check, and a privacy review of the documents whose redactions do not hide anything. Others have reached the same conclusion: the UK Local Government Association's playbook for agentic AI (October 2026) says agentic AI is not primarily a technology challenge, and that adoption depends on data maturity, process clarity and leadership discipline as much as on technical capability.</a:t>
             </a:r>
             <a:endParaRPr lang="en-US" dirty="0"/>
           </a:p>
@@ -1022,6 +1024,94 @@
             <a:fld id="{F7021451-1387-4CA6-816F-3879F97B5CBC}" type="slidenum">
               <a:rPr lang="en-US"/>
               <a:t>14</a:t>
+            </a:fld>
+            <a:endParaRPr lang="en-US"/>
+          </a:p>
+        </p:txBody>
+      </p:sp>
+    </p:spTree>
+    <p:extLst>
+      <p:ext uri="{BB962C8B-B14F-4D97-AF65-F5344CB8AC3E}">
+        <p14:creationId xmlns:p14="http://schemas.microsoft.com/office/powerpoint/2010/main" val="1024086991"/>
+      </p:ext>
+    </p:extLst>
+  </p:cSld>
+  <p:clrMapOvr>
+    <a:masterClrMapping/>
+  </p:clrMapOvr>
+</p:notes>
+</file>
+
+<file path=ppt/notesSlides/notesSlide15.xml><?xml version="1.0" encoding="utf-8"?>
+<p:notes xmlns:a="http://schemas.openxmlformats.org/drawingml/2006/main" xmlns:r="http://schemas.openxmlformats.org/officeDocument/2006/relationships" xmlns:p="http://schemas.openxmlformats.org/presentationml/2006/main">
+  <p:cSld>
+    <p:spTree>
+      <p:nvGrpSpPr>
+        <p:cNvPr id="1" name=""/>
+        <p:cNvGrpSpPr/>
+        <p:nvPr/>
+      </p:nvGrpSpPr>
+      <p:grpSpPr>
+        <a:xfrm>
+          <a:off x="0" y="0"/>
+          <a:ext cx="0" cy="0"/>
+          <a:chOff x="0" y="0"/>
+          <a:chExt cx="0" cy="0"/>
+        </a:xfrm>
+      </p:grpSpPr>
+      <p:sp>
+        <p:nvSpPr>
+          <p:cNvPr id="2" name="Slide Image Placeholder 1"/>
+          <p:cNvSpPr>
+            <a:spLocks noGrp="1" noRot="1" noChangeAspect="1"/>
+          </p:cNvSpPr>
+          <p:nvPr>
+            <p:ph type="sldImg"/>
+          </p:nvPr>
+        </p:nvSpPr>
+        <p:spPr/>
+      </p:sp>
+      <p:sp>
+        <p:nvSpPr>
+          <p:cNvPr id="3" name="Notes Placeholder 2"/>
+          <p:cNvSpPr>
+            <a:spLocks noGrp="1"/>
+          </p:cNvSpPr>
+          <p:nvPr>
+            <p:ph type="body" idx="1"/>
+          </p:nvPr>
+        </p:nvSpPr>
+        <p:spPr/>
+        <p:txBody>
+          <a:bodyPr/>
+          <a:lstStyle/>
+          <a:p>
+            <a:r>
+              <a:rPr lang="en-US" dirty="0"/>
+              <a:t>Sources for the figures and quotations in this presentation. Figures about the CER's record are counts from reading every PDF in REGDOCS (October 2026). Two figures are estimates: about 75 years assumes two minutes to read a page and 1,600 working hours a year; 13,000 novels assumes about 90,000 words a novel; the printed spreadsheet's year of reading assumes the same two minutes a page, and its two days of computer time is measured at about three seconds a page.</a:t>
+            </a:r>
+            <a:endParaRPr lang="en-US" dirty="0"/>
+          </a:p>
+        </p:txBody>
+      </p:sp>
+      <p:sp>
+        <p:nvSpPr>
+          <p:cNvPr id="4" name="Slide Number Placeholder 3"/>
+          <p:cNvSpPr>
+            <a:spLocks noGrp="1"/>
+          </p:cNvSpPr>
+          <p:nvPr>
+            <p:ph type="sldNum" sz="quarter" idx="10"/>
+          </p:nvPr>
+        </p:nvSpPr>
+        <p:spPr/>
+        <p:txBody>
+          <a:bodyPr/>
+          <a:lstStyle/>
+          <a:p>
+            <a:fld id="{F7021451-1387-4CA6-816F-3879F97B5CBC}" type="slidenum">
+              <a:rPr lang="en-US"/>
+              <a:t>15</a:t>
             </a:fld>
             <a:endParaRPr lang="en-US"/>
           </a:p>
@@ -1702,7 +1792,7 @@
           <a:p>
             <a:r>
               <a:rPr lang="en-US" dirty="0"/>
-              <a:t>The first part of the solution is what we ask of filers - mostly settings and habits, not new work. Save documents as PDF from the software that made them instead of printing and scanning. Sign digitally, including sworn statements. Send tables as spreadsheets and maps as map files alongside the document. Redact with tools that actually remove the words. And turn on the accessibility tagging most office software already offers - the same setting that helps blind readers also tells a computer what is a heading and what is a table. The CER's review of its Rules of Practice and Procedure, which already lists modernizing electronic filing, is the natural place to make these changes.</a:t>
+              <a:t>This is the clearest example in the whole record. The single largest document in REGDOCS - 11,563 pages - is not a report at all. It is a spreadsheet of weather readings, one wind reading every minute for over a year, printed out page by page and filed as a PDF. The same readings were filed again in other parts and to other parties: six documents and about 52,000 pages, more than one page in every hundred in our entire record. A person would need about a year just to read those pages. A computer can read them, but it takes about two days to rebuild the table - and the original spreadsheet, had it been filed, is one small file a computer reads exactly in seconds. Nothing was gained by printing it; accuracy and time were lost.</a:t>
             </a:r>
             <a:endParaRPr lang="en-US" dirty="0"/>
           </a:p>
@@ -2663,7 +2753,7 @@
                   <a:schemeClr val="tx2"/>
                 </a:solidFill>
               </a:rPr>
-              <a:t>Check and protect every file at the portal</a:t>
+              <a:t>Ask for files a computer can read</a:t>
             </a:r>
             <a:endParaRPr lang="en-US" sz="3400" dirty="0"/>
           </a:p>
@@ -2678,12 +2768,10 @@
         <p:spPr>
           <a:xfrm>
             <a:off x="548640" y="1463040"/>
-            <a:ext cx="5394960" cy="2103120"/>
-          </a:xfrm>
-          <a:prstGeom prst="roundRect">
-            <a:avLst>
-              <a:gd name="adj" fmla="val 6522"/>
-            </a:avLst>
+            <a:ext cx="777240" cy="777240"/>
+          </a:xfrm>
+          <a:prstGeom prst="ellipse">
+            <a:avLst/>
           </a:prstGeom>
           <a:solidFill>
             <a:schemeClr val="tx2"/>
@@ -2707,8 +2795,8 @@
         </p:blipFill>
         <p:spPr>
           <a:xfrm>
-            <a:off x="822960" y="1737360"/>
-            <a:ext cx="548640" cy="548640"/>
+            <a:off x="731520" y="1645920"/>
+            <a:ext cx="411480" cy="411480"/>
           </a:xfrm>
           <a:prstGeom prst="rect">
             <a:avLst/>
@@ -2723,8 +2811,8 @@
         </p:nvSpPr>
         <p:spPr>
           <a:xfrm>
-            <a:off x="1554480" y="1691640"/>
-            <a:ext cx="4114800" cy="685800"/>
+            <a:off x="1600200" y="1417320"/>
+            <a:ext cx="9966960" cy="411480"/>
           </a:xfrm>
           <a:prstGeom prst="rect">
             <a:avLst/>
@@ -2740,14 +2828,14 @@
               <a:buNone/>
             </a:pPr>
             <a:r>
-              <a:rPr lang="en-US" sz="1900" b="1" dirty="0">
-                <a:solidFill>
-                  <a:schemeClr val="bg1"/>
-                </a:solidFill>
-              </a:rPr>
-              <a:t>Check every file on upload</a:t>
-            </a:r>
-            <a:endParaRPr lang="en-US" sz="1900" dirty="0"/>
+              <a:rPr lang="en-US" sz="2000" b="1" dirty="0">
+                <a:solidFill>
+                  <a:schemeClr val="tx2"/>
+                </a:solidFill>
+              </a:rPr>
+              <a:t>Save as PDF — do not print and scan</a:t>
+            </a:r>
+            <a:endParaRPr lang="en-US" sz="2000" dirty="0"/>
           </a:p>
         </p:txBody>
       </p:sp>
@@ -2759,8 +2847,8 @@
         </p:nvSpPr>
         <p:spPr>
           <a:xfrm>
-            <a:off x="822960" y="2468880"/>
-            <a:ext cx="4846320" cy="914400"/>
+            <a:off x="1600200" y="1828800"/>
+            <a:ext cx="9966960" cy="502920"/>
           </a:xfrm>
           <a:prstGeom prst="rect">
             <a:avLst/>
@@ -2776,14 +2864,14 @@
               <a:buNone/>
             </a:pPr>
             <a:r>
-              <a:rPr lang="en-US" sz="1500" dirty="0">
-                <a:solidFill>
-                  <a:schemeClr val="bg2"/>
-                </a:solidFill>
-              </a:rPr>
-              <a:t>Tell the filer “page 47 has no readable text” while they can still fix it. A rule beats advice.</a:t>
-            </a:r>
-            <a:endParaRPr lang="en-US" sz="1500" dirty="0"/>
+              <a:rPr lang="en-US" sz="1600" dirty="0">
+                <a:solidFill>
+                  <a:schemeClr val="tx1"/>
+                </a:solidFill>
+              </a:rPr>
+              <a:t>Filers keep their documents digital from start to finish.</a:t>
+            </a:r>
+            <a:endParaRPr lang="en-US" sz="1600" dirty="0"/>
           </a:p>
         </p:txBody>
       </p:sp>
@@ -2795,16 +2883,14 @@
         </p:nvSpPr>
         <p:spPr>
           <a:xfrm>
-            <a:off x="6217920" y="1463040"/>
-            <a:ext cx="5394960" cy="2103120"/>
-          </a:xfrm>
-          <a:prstGeom prst="roundRect">
-            <a:avLst>
-              <a:gd name="adj" fmla="val 6522"/>
-            </a:avLst>
+            <a:off x="548640" y="2423160"/>
+            <a:ext cx="777240" cy="777240"/>
+          </a:xfrm>
+          <a:prstGeom prst="ellipse">
+            <a:avLst/>
           </a:prstGeom>
           <a:solidFill>
-            <a:schemeClr val="bg2"/>
+            <a:schemeClr val="tx2"/>
           </a:solidFill>
           <a:ln/>
         </p:spPr>
@@ -2825,8 +2911,8 @@
         </p:blipFill>
         <p:spPr>
           <a:xfrm>
-            <a:off x="6492240" y="1737360"/>
-            <a:ext cx="548640" cy="548640"/>
+            <a:off x="731520" y="2606040"/>
+            <a:ext cx="411480" cy="411480"/>
           </a:xfrm>
           <a:prstGeom prst="rect">
             <a:avLst/>
@@ -2841,8 +2927,8 @@
         </p:nvSpPr>
         <p:spPr>
           <a:xfrm>
-            <a:off x="7223760" y="1691640"/>
-            <a:ext cx="4114800" cy="685800"/>
+            <a:off x="1600200" y="2377440"/>
+            <a:ext cx="9966960" cy="411480"/>
           </a:xfrm>
           <a:prstGeom prst="rect">
             <a:avLst/>
@@ -2858,14 +2944,14 @@
               <a:buNone/>
             </a:pPr>
             <a:r>
-              <a:rPr lang="en-US" sz="1900" b="1" dirty="0">
+              <a:rPr lang="en-US" sz="2000" b="1" dirty="0">
                 <a:solidFill>
                   <a:schemeClr val="tx2"/>
                 </a:solidFill>
               </a:rPr>
-              <a:t>Fingerprint and time-stamp every file</a:t>
-            </a:r>
-            <a:endParaRPr lang="en-US" sz="1900" dirty="0"/>
+              <a:t>Sign digitally</a:t>
+            </a:r>
+            <a:endParaRPr lang="en-US" sz="2000" dirty="0"/>
           </a:p>
         </p:txBody>
       </p:sp>
@@ -2877,8 +2963,8 @@
         </p:nvSpPr>
         <p:spPr>
           <a:xfrm>
-            <a:off x="6492240" y="2468880"/>
-            <a:ext cx="4846320" cy="914400"/>
+            <a:off x="1600200" y="2788920"/>
+            <a:ext cx="9966960" cy="502920"/>
           </a:xfrm>
           <a:prstGeom prst="rect">
             <a:avLst/>
@@ -2894,14 +2980,14 @@
               <a:buNone/>
             </a:pPr>
             <a:r>
-              <a:rPr lang="en-US" sz="1500" dirty="0">
+              <a:rPr lang="en-US" sz="1600" dirty="0">
                 <a:solidFill>
                   <a:schemeClr val="tx1"/>
                 </a:solidFill>
               </a:rPr>
-              <a:t>Anyone can prove a copy is the original — no paper receipt needed.</a:t>
-            </a:r>
-            <a:endParaRPr lang="en-US" sz="1500" dirty="0"/>
+              <a:t>Including sworn statements, so signing no longer turns documents into pictures.</a:t>
+            </a:r>
+            <a:endParaRPr lang="en-US" sz="1600" dirty="0"/>
           </a:p>
         </p:txBody>
       </p:sp>
@@ -2913,16 +2999,14 @@
         </p:nvSpPr>
         <p:spPr>
           <a:xfrm>
-            <a:off x="548640" y="3794760"/>
-            <a:ext cx="5394960" cy="2103120"/>
-          </a:xfrm>
-          <a:prstGeom prst="roundRect">
-            <a:avLst>
-              <a:gd name="adj" fmla="val 6522"/>
-            </a:avLst>
+            <a:off x="548640" y="3383280"/>
+            <a:ext cx="777240" cy="777240"/>
+          </a:xfrm>
+          <a:prstGeom prst="ellipse">
+            <a:avLst/>
           </a:prstGeom>
           <a:solidFill>
-            <a:schemeClr val="bg2"/>
+            <a:schemeClr val="tx2"/>
           </a:solidFill>
           <a:ln/>
         </p:spPr>
@@ -2943,8 +3027,8 @@
         </p:blipFill>
         <p:spPr>
           <a:xfrm>
-            <a:off x="822960" y="4069080"/>
-            <a:ext cx="548640" cy="548640"/>
+            <a:off x="731520" y="3566160"/>
+            <a:ext cx="411480" cy="411480"/>
           </a:xfrm>
           <a:prstGeom prst="rect">
             <a:avLst/>
@@ -2959,8 +3043,8 @@
         </p:nvSpPr>
         <p:spPr>
           <a:xfrm>
-            <a:off x="1554480" y="4023360"/>
-            <a:ext cx="4114800" cy="685800"/>
+            <a:off x="1600200" y="3337560"/>
+            <a:ext cx="9966960" cy="411480"/>
           </a:xfrm>
           <a:prstGeom prst="rect">
             <a:avLst/>
@@ -2976,14 +3060,14 @@
               <a:buNone/>
             </a:pPr>
             <a:r>
-              <a:rPr lang="en-US" sz="1900" b="1" dirty="0">
+              <a:rPr lang="en-US" sz="2000" b="1" dirty="0">
                 <a:solidFill>
                   <a:schemeClr val="tx2"/>
                 </a:solidFill>
               </a:rPr>
-              <a:t>Accept spreadsheets, maps and digital signatures</a:t>
-            </a:r>
-            <a:endParaRPr lang="en-US" sz="1900" dirty="0"/>
+              <a:t>Send data as data</a:t>
+            </a:r>
+            <a:endParaRPr lang="en-US" sz="2000" dirty="0"/>
           </a:p>
         </p:txBody>
       </p:sp>
@@ -2995,8 +3079,8 @@
         </p:nvSpPr>
         <p:spPr>
           <a:xfrm>
-            <a:off x="822960" y="4800600"/>
-            <a:ext cx="4846320" cy="914400"/>
+            <a:off x="1600200" y="3749040"/>
+            <a:ext cx="9966960" cy="502920"/>
           </a:xfrm>
           <a:prstGeom prst="rect">
             <a:avLst/>
@@ -3012,14 +3096,14 @@
               <a:buNone/>
             </a:pPr>
             <a:r>
-              <a:rPr lang="en-US" sz="1500" dirty="0">
+              <a:rPr lang="en-US" sz="1600" dirty="0">
                 <a:solidFill>
                   <a:schemeClr val="tx1"/>
                 </a:solidFill>
               </a:rPr>
-              <a:t>Not only PDFs, so data stops travelling as pictures, e-mails and USB sticks.</a:t>
-            </a:r>
-            <a:endParaRPr lang="en-US" sz="1500" dirty="0"/>
+              <a:t>Tables as spreadsheets and maps as map files, alongside the document.</a:t>
+            </a:r>
+            <a:endParaRPr lang="en-US" sz="1600" dirty="0"/>
           </a:p>
         </p:txBody>
       </p:sp>
@@ -3031,16 +3115,14 @@
         </p:nvSpPr>
         <p:spPr>
           <a:xfrm>
-            <a:off x="6217920" y="3794760"/>
-            <a:ext cx="5394960" cy="2103120"/>
-          </a:xfrm>
-          <a:prstGeom prst="roundRect">
-            <a:avLst>
-              <a:gd name="adj" fmla="val 6522"/>
-            </a:avLst>
+            <a:off x="548640" y="4343400"/>
+            <a:ext cx="777240" cy="777240"/>
+          </a:xfrm>
+          <a:prstGeom prst="ellipse">
+            <a:avLst/>
           </a:prstGeom>
           <a:solidFill>
-            <a:schemeClr val="bg2"/>
+            <a:schemeClr val="tx2"/>
           </a:solidFill>
           <a:ln/>
         </p:spPr>
@@ -3061,8 +3143,8 @@
         </p:blipFill>
         <p:spPr>
           <a:xfrm>
-            <a:off x="6492240" y="4069080"/>
-            <a:ext cx="548640" cy="548640"/>
+            <a:off x="731520" y="4526280"/>
+            <a:ext cx="411480" cy="411480"/>
           </a:xfrm>
           <a:prstGeom prst="rect">
             <a:avLst/>
@@ -3077,8 +3159,8 @@
         </p:nvSpPr>
         <p:spPr>
           <a:xfrm>
-            <a:off x="7223760" y="4023360"/>
-            <a:ext cx="4114800" cy="685800"/>
+            <a:off x="1600200" y="4297680"/>
+            <a:ext cx="9966960" cy="411480"/>
           </a:xfrm>
           <a:prstGeom prst="rect">
             <a:avLst/>
@@ -3094,14 +3176,14 @@
               <a:buNone/>
             </a:pPr>
             <a:r>
-              <a:rPr lang="en-US" sz="1900" b="1" dirty="0">
+              <a:rPr lang="en-US" sz="2000" b="1" dirty="0">
                 <a:solidFill>
                   <a:schemeClr val="tx2"/>
                 </a:solidFill>
               </a:rPr>
-              <a:t>Open the record to automation</a:t>
-            </a:r>
-            <a:endParaRPr lang="en-US" sz="1900" dirty="0"/>
+              <a:t>Redact properly</a:t>
+            </a:r>
+            <a:endParaRPr lang="en-US" sz="2000" dirty="0"/>
           </a:p>
         </p:txBody>
       </p:sp>
@@ -3113,8 +3195,8 @@
         </p:nvSpPr>
         <p:spPr>
           <a:xfrm>
-            <a:off x="6492240" y="4800600"/>
-            <a:ext cx="4846320" cy="914400"/>
+            <a:off x="1600200" y="4709160"/>
+            <a:ext cx="9966960" cy="502920"/>
           </a:xfrm>
           <a:prstGeom prst="rect">
             <a:avLst/>
@@ -3130,14 +3212,130 @@
               <a:buNone/>
             </a:pPr>
             <a:r>
-              <a:rPr lang="en-US" sz="1500" dirty="0">
+              <a:rPr lang="en-US" sz="1600" dirty="0">
                 <a:solidFill>
                   <a:schemeClr val="tx1"/>
                 </a:solidFill>
               </a:rPr>
-              <a:t>Bulk access with each file’s details, so our own tools — and the public’s — can use it.</a:t>
-            </a:r>
-            <a:endParaRPr lang="en-US" sz="1500" dirty="0"/>
+              <a:t>Use tools that remove the words, and say what was withheld.</a:t>
+            </a:r>
+            <a:endParaRPr lang="en-US" sz="1600" dirty="0"/>
+          </a:p>
+        </p:txBody>
+      </p:sp>
+      <p:sp>
+        <p:nvSpPr>
+          <p:cNvPr id="19" name="Shape 13"/>
+          <p:cNvSpPr/>
+          <p:nvPr/>
+        </p:nvSpPr>
+        <p:spPr>
+          <a:xfrm>
+            <a:off x="548640" y="5303520"/>
+            <a:ext cx="777240" cy="777240"/>
+          </a:xfrm>
+          <a:prstGeom prst="ellipse">
+            <a:avLst/>
+          </a:prstGeom>
+          <a:solidFill>
+            <a:schemeClr val="tx2"/>
+          </a:solidFill>
+          <a:ln/>
+        </p:spPr>
+      </p:sp>
+      <p:pic>
+        <p:nvPicPr>
+          <p:cNvPr id="20" name="Image 4" descr="preencoded.png">    </p:cNvPr>
+          <p:cNvPicPr>
+            <a:picLocks noChangeAspect="1"/>
+          </p:cNvPicPr>
+          <p:nvPr/>
+        </p:nvPicPr>
+        <p:blipFill>
+          <a:blip r:embed="rId5"/>
+          <a:stretch>
+            <a:fillRect/>
+          </a:stretch>
+        </p:blipFill>
+        <p:spPr>
+          <a:xfrm>
+            <a:off x="731520" y="5486400"/>
+            <a:ext cx="411480" cy="411480"/>
+          </a:xfrm>
+          <a:prstGeom prst="rect">
+            <a:avLst/>
+          </a:prstGeom>
+        </p:spPr>
+      </p:pic>
+      <p:sp>
+        <p:nvSpPr>
+          <p:cNvPr id="21" name="Text 14"/>
+          <p:cNvSpPr txBox="1"/>
+          <p:nvPr/>
+        </p:nvSpPr>
+        <p:spPr>
+          <a:xfrm>
+            <a:off x="1600200" y="5257800"/>
+            <a:ext cx="9966960" cy="411480"/>
+          </a:xfrm>
+          <a:prstGeom prst="rect">
+            <a:avLst/>
+          </a:prstGeom>
+          <a:noFill/>
+          <a:ln/>
+        </p:spPr>
+        <p:txBody>
+          <a:bodyPr wrap="square" lIns="0" tIns="0" rIns="0" bIns="0" rtlCol="0" anchor="ctr"/>
+          <a:lstStyle/>
+          <a:p>
+            <a:pPr indent="0" marL="0">
+              <a:buNone/>
+            </a:pPr>
+            <a:r>
+              <a:rPr lang="en-US" sz="2000" b="1" dirty="0">
+                <a:solidFill>
+                  <a:schemeClr val="tx2"/>
+                </a:solidFill>
+              </a:rPr>
+              <a:t>Turn on accessibility tagging</a:t>
+            </a:r>
+            <a:endParaRPr lang="en-US" sz="2000" dirty="0"/>
+          </a:p>
+        </p:txBody>
+      </p:sp>
+      <p:sp>
+        <p:nvSpPr>
+          <p:cNvPr id="22" name="Text 15"/>
+          <p:cNvSpPr txBox="1"/>
+          <p:nvPr/>
+        </p:nvSpPr>
+        <p:spPr>
+          <a:xfrm>
+            <a:off x="1600200" y="5669280"/>
+            <a:ext cx="9966960" cy="502920"/>
+          </a:xfrm>
+          <a:prstGeom prst="rect">
+            <a:avLst/>
+          </a:prstGeom>
+          <a:noFill/>
+          <a:ln/>
+        </p:spPr>
+        <p:txBody>
+          <a:bodyPr wrap="square" lIns="0" tIns="0" rIns="0" bIns="0" rtlCol="0" anchor="t"/>
+          <a:lstStyle/>
+          <a:p>
+            <a:pPr indent="0" marL="0">
+              <a:buNone/>
+            </a:pPr>
+            <a:r>
+              <a:rPr lang="en-US" sz="1600" dirty="0">
+                <a:solidFill>
+                  <a:schemeClr val="tx1"/>
+                </a:solidFill>
+              </a:rPr>
+              <a:t>The same setting that helps screen readers tells a computer what is a heading or a table.</a:t>
+            </a:r>
+            <a:endParaRPr lang="en-US" sz="1600" dirty="0"/>
           </a:p>
         </p:txBody>
       </p:sp>
@@ -3243,7 +3441,7 @@
                   <a:schemeClr val="tx2"/>
                 </a:solidFill>
               </a:rPr>
-              <a:t>Build an AI team and a cloud strategy</a:t>
+              <a:t>Check and protect every file at the portal</a:t>
             </a:r>
             <a:endParaRPr lang="en-US" sz="3400" dirty="0"/>
           </a:p>
@@ -3257,16 +3455,16 @@
         </p:nvSpPr>
         <p:spPr>
           <a:xfrm>
-            <a:off x="548640" y="1417320"/>
-            <a:ext cx="2606040" cy="1508760"/>
+            <a:off x="548640" y="1463040"/>
+            <a:ext cx="5394960" cy="2103120"/>
           </a:xfrm>
           <a:prstGeom prst="roundRect">
             <a:avLst>
-              <a:gd name="adj" fmla="val 9091"/>
+              <a:gd name="adj" fmla="val 6522"/>
             </a:avLst>
           </a:prstGeom>
           <a:solidFill>
-            <a:schemeClr val="bg2"/>
+            <a:schemeClr val="tx2"/>
           </a:solidFill>
           <a:ln/>
         </p:spPr>
@@ -3287,8 +3485,8 @@
         </p:blipFill>
         <p:spPr>
           <a:xfrm>
-            <a:off x="731520" y="1618488"/>
-            <a:ext cx="411480" cy="411480"/>
+            <a:off x="822960" y="1737360"/>
+            <a:ext cx="548640" cy="548640"/>
           </a:xfrm>
           <a:prstGeom prst="rect">
             <a:avLst/>
@@ -3303,8 +3501,8 @@
         </p:nvSpPr>
         <p:spPr>
           <a:xfrm>
-            <a:off x="1280160" y="1554480"/>
-            <a:ext cx="1783080" cy="548640"/>
+            <a:off x="1554480" y="1691640"/>
+            <a:ext cx="4114800" cy="685800"/>
           </a:xfrm>
           <a:prstGeom prst="rect">
             <a:avLst/>
@@ -3320,50 +3518,50 @@
               <a:buNone/>
             </a:pPr>
             <a:r>
-              <a:rPr lang="en-US" sz="1500" b="1" dirty="0">
-                <a:solidFill>
-                  <a:schemeClr val="tx2"/>
-                </a:solidFill>
-              </a:rPr>
-              <a:t>Business owner</a:t>
+              <a:rPr lang="en-US" sz="1900" b="1" dirty="0">
+                <a:solidFill>
+                  <a:schemeClr val="bg1"/>
+                </a:solidFill>
+              </a:rPr>
+              <a:t>Check every file on upload</a:t>
+            </a:r>
+            <a:endParaRPr lang="en-US" sz="1900" dirty="0"/>
+          </a:p>
+        </p:txBody>
+      </p:sp>
+      <p:sp>
+        <p:nvSpPr>
+          <p:cNvPr id="6" name="Text 3"/>
+          <p:cNvSpPr txBox="1"/>
+          <p:nvPr/>
+        </p:nvSpPr>
+        <p:spPr>
+          <a:xfrm>
+            <a:off x="822960" y="2468880"/>
+            <a:ext cx="4846320" cy="914400"/>
+          </a:xfrm>
+          <a:prstGeom prst="rect">
+            <a:avLst/>
+          </a:prstGeom>
+          <a:noFill/>
+          <a:ln/>
+        </p:spPr>
+        <p:txBody>
+          <a:bodyPr wrap="square" lIns="0" tIns="0" rIns="0" bIns="0" rtlCol="0" anchor="t"/>
+          <a:lstStyle/>
+          <a:p>
+            <a:pPr indent="0" marL="0">
+              <a:buNone/>
+            </a:pPr>
+            <a:r>
+              <a:rPr lang="en-US" sz="1500" dirty="0">
+                <a:solidFill>
+                  <a:schemeClr val="bg2"/>
+                </a:solidFill>
+              </a:rPr>
+              <a:t>Tell the filer “page 47 has no readable text” while they can still fix it. A rule beats advice.</a:t>
             </a:r>
             <a:endParaRPr lang="en-US" sz="1500" dirty="0"/>
-          </a:p>
-        </p:txBody>
-      </p:sp>
-      <p:sp>
-        <p:nvSpPr>
-          <p:cNvPr id="6" name="Text 3"/>
-          <p:cNvSpPr txBox="1"/>
-          <p:nvPr/>
-        </p:nvSpPr>
-        <p:spPr>
-          <a:xfrm>
-            <a:off x="731520" y="2194560"/>
-            <a:ext cx="2286000" cy="640080"/>
-          </a:xfrm>
-          <a:prstGeom prst="rect">
-            <a:avLst/>
-          </a:prstGeom>
-          <a:noFill/>
-          <a:ln/>
-        </p:spPr>
-        <p:txBody>
-          <a:bodyPr wrap="square" lIns="0" tIns="0" rIns="0" bIns="0" rtlCol="0" anchor="t"/>
-          <a:lstStyle/>
-          <a:p>
-            <a:pPr indent="0" marL="0">
-              <a:buNone/>
-            </a:pPr>
-            <a:r>
-              <a:rPr lang="en-US" sz="1300" dirty="0">
-                <a:solidFill>
-                  <a:schemeClr val="tx1"/>
-                </a:solidFill>
-              </a:rPr>
-              <a:t>sets priorities and measures value</a:t>
-            </a:r>
-            <a:endParaRPr lang="en-US" sz="1300" dirty="0"/>
           </a:p>
         </p:txBody>
       </p:sp>
@@ -3375,12 +3573,12 @@
         </p:nvSpPr>
         <p:spPr>
           <a:xfrm>
-            <a:off x="3337560" y="1417320"/>
-            <a:ext cx="2606040" cy="1508760"/>
+            <a:off x="6217920" y="1463040"/>
+            <a:ext cx="5394960" cy="2103120"/>
           </a:xfrm>
           <a:prstGeom prst="roundRect">
             <a:avLst>
-              <a:gd name="adj" fmla="val 9091"/>
+              <a:gd name="adj" fmla="val 6522"/>
             </a:avLst>
           </a:prstGeom>
           <a:solidFill>
@@ -3405,8 +3603,8 @@
         </p:blipFill>
         <p:spPr>
           <a:xfrm>
-            <a:off x="3520440" y="1618488"/>
-            <a:ext cx="411480" cy="411480"/>
+            <a:off x="6492240" y="1737360"/>
+            <a:ext cx="548640" cy="548640"/>
           </a:xfrm>
           <a:prstGeom prst="rect">
             <a:avLst/>
@@ -3421,8 +3619,8 @@
         </p:nvSpPr>
         <p:spPr>
           <a:xfrm>
-            <a:off x="4069080" y="1554480"/>
-            <a:ext cx="1783080" cy="548640"/>
+            <a:off x="7223760" y="1691640"/>
+            <a:ext cx="4114800" cy="685800"/>
           </a:xfrm>
           <a:prstGeom prst="rect">
             <a:avLst/>
@@ -3438,50 +3636,50 @@
               <a:buNone/>
             </a:pPr>
             <a:r>
-              <a:rPr lang="en-US" sz="1500" b="1" dirty="0">
+              <a:rPr lang="en-US" sz="1900" b="1" dirty="0">
                 <a:solidFill>
                   <a:schemeClr val="tx2"/>
                 </a:solidFill>
               </a:rPr>
-              <a:t>Regulatory experts</a:t>
+              <a:t>Fingerprint and time-stamp every file</a:t>
+            </a:r>
+            <a:endParaRPr lang="en-US" sz="1900" dirty="0"/>
+          </a:p>
+        </p:txBody>
+      </p:sp>
+      <p:sp>
+        <p:nvSpPr>
+          <p:cNvPr id="10" name="Text 6"/>
+          <p:cNvSpPr txBox="1"/>
+          <p:nvPr/>
+        </p:nvSpPr>
+        <p:spPr>
+          <a:xfrm>
+            <a:off x="6492240" y="2468880"/>
+            <a:ext cx="4846320" cy="914400"/>
+          </a:xfrm>
+          <a:prstGeom prst="rect">
+            <a:avLst/>
+          </a:prstGeom>
+          <a:noFill/>
+          <a:ln/>
+        </p:spPr>
+        <p:txBody>
+          <a:bodyPr wrap="square" lIns="0" tIns="0" rIns="0" bIns="0" rtlCol="0" anchor="t"/>
+          <a:lstStyle/>
+          <a:p>
+            <a:pPr indent="0" marL="0">
+              <a:buNone/>
+            </a:pPr>
+            <a:r>
+              <a:rPr lang="en-US" sz="1500" dirty="0">
+                <a:solidFill>
+                  <a:schemeClr val="tx1"/>
+                </a:solidFill>
+              </a:rPr>
+              <a:t>Anyone can prove a copy is the original — no paper receipt needed.</a:t>
             </a:r>
             <a:endParaRPr lang="en-US" sz="1500" dirty="0"/>
-          </a:p>
-        </p:txBody>
-      </p:sp>
-      <p:sp>
-        <p:nvSpPr>
-          <p:cNvPr id="10" name="Text 6"/>
-          <p:cNvSpPr txBox="1"/>
-          <p:nvPr/>
-        </p:nvSpPr>
-        <p:spPr>
-          <a:xfrm>
-            <a:off x="3520440" y="2194560"/>
-            <a:ext cx="2286000" cy="640080"/>
-          </a:xfrm>
-          <a:prstGeom prst="rect">
-            <a:avLst/>
-          </a:prstGeom>
-          <a:noFill/>
-          <a:ln/>
-        </p:spPr>
-        <p:txBody>
-          <a:bodyPr wrap="square" lIns="0" tIns="0" rIns="0" bIns="0" rtlCol="0" anchor="t"/>
-          <a:lstStyle/>
-          <a:p>
-            <a:pPr indent="0" marL="0">
-              <a:buNone/>
-            </a:pPr>
-            <a:r>
-              <a:rPr lang="en-US" sz="1300" dirty="0">
-                <a:solidFill>
-                  <a:schemeClr val="tx1"/>
-                </a:solidFill>
-              </a:rPr>
-              <a:t>define what “right” looks like</a:t>
-            </a:r>
-            <a:endParaRPr lang="en-US" sz="1300" dirty="0"/>
           </a:p>
         </p:txBody>
       </p:sp>
@@ -3493,12 +3691,12 @@
         </p:nvSpPr>
         <p:spPr>
           <a:xfrm>
-            <a:off x="6126480" y="1417320"/>
-            <a:ext cx="2606040" cy="1508760"/>
+            <a:off x="548640" y="3794760"/>
+            <a:ext cx="5394960" cy="2103120"/>
           </a:xfrm>
           <a:prstGeom prst="roundRect">
             <a:avLst>
-              <a:gd name="adj" fmla="val 9091"/>
+              <a:gd name="adj" fmla="val 6522"/>
             </a:avLst>
           </a:prstGeom>
           <a:solidFill>
@@ -3523,8 +3721,8 @@
         </p:blipFill>
         <p:spPr>
           <a:xfrm>
-            <a:off x="6309360" y="1618488"/>
-            <a:ext cx="411480" cy="411480"/>
+            <a:off x="822960" y="4069080"/>
+            <a:ext cx="548640" cy="548640"/>
           </a:xfrm>
           <a:prstGeom prst="rect">
             <a:avLst/>
@@ -3539,8 +3737,8 @@
         </p:nvSpPr>
         <p:spPr>
           <a:xfrm>
-            <a:off x="6858000" y="1554480"/>
-            <a:ext cx="1783080" cy="548640"/>
+            <a:off x="1554480" y="4023360"/>
+            <a:ext cx="4114800" cy="685800"/>
           </a:xfrm>
           <a:prstGeom prst="rect">
             <a:avLst/>
@@ -3556,50 +3754,50 @@
               <a:buNone/>
             </a:pPr>
             <a:r>
-              <a:rPr lang="en-US" sz="1500" b="1" dirty="0">
+              <a:rPr lang="en-US" sz="1900" b="1" dirty="0">
                 <a:solidFill>
                   <a:schemeClr val="tx2"/>
                 </a:solidFill>
               </a:rPr>
-              <a:t>Data engineers</a:t>
+              <a:t>Accept spreadsheets, maps and digital signatures</a:t>
+            </a:r>
+            <a:endParaRPr lang="en-US" sz="1900" dirty="0"/>
+          </a:p>
+        </p:txBody>
+      </p:sp>
+      <p:sp>
+        <p:nvSpPr>
+          <p:cNvPr id="14" name="Text 9"/>
+          <p:cNvSpPr txBox="1"/>
+          <p:nvPr/>
+        </p:nvSpPr>
+        <p:spPr>
+          <a:xfrm>
+            <a:off x="822960" y="4800600"/>
+            <a:ext cx="4846320" cy="914400"/>
+          </a:xfrm>
+          <a:prstGeom prst="rect">
+            <a:avLst/>
+          </a:prstGeom>
+          <a:noFill/>
+          <a:ln/>
+        </p:spPr>
+        <p:txBody>
+          <a:bodyPr wrap="square" lIns="0" tIns="0" rIns="0" bIns="0" rtlCol="0" anchor="t"/>
+          <a:lstStyle/>
+          <a:p>
+            <a:pPr indent="0" marL="0">
+              <a:buNone/>
+            </a:pPr>
+            <a:r>
+              <a:rPr lang="en-US" sz="1500" dirty="0">
+                <a:solidFill>
+                  <a:schemeClr val="tx1"/>
+                </a:solidFill>
+              </a:rPr>
+              <a:t>Not only PDFs, so data stops travelling as pictures, e-mails and USB sticks.</a:t>
             </a:r>
             <a:endParaRPr lang="en-US" sz="1500" dirty="0"/>
-          </a:p>
-        </p:txBody>
-      </p:sp>
-      <p:sp>
-        <p:nvSpPr>
-          <p:cNvPr id="14" name="Text 9"/>
-          <p:cNvSpPr txBox="1"/>
-          <p:nvPr/>
-        </p:nvSpPr>
-        <p:spPr>
-          <a:xfrm>
-            <a:off x="6309360" y="2194560"/>
-            <a:ext cx="2286000" cy="640080"/>
-          </a:xfrm>
-          <a:prstGeom prst="rect">
-            <a:avLst/>
-          </a:prstGeom>
-          <a:noFill/>
-          <a:ln/>
-        </p:spPr>
-        <p:txBody>
-          <a:bodyPr wrap="square" lIns="0" tIns="0" rIns="0" bIns="0" rtlCol="0" anchor="t"/>
-          <a:lstStyle/>
-          <a:p>
-            <a:pPr indent="0" marL="0">
-              <a:buNone/>
-            </a:pPr>
-            <a:r>
-              <a:rPr lang="en-US" sz="1300" dirty="0">
-                <a:solidFill>
-                  <a:schemeClr val="tx1"/>
-                </a:solidFill>
-              </a:rPr>
-              <a:t>turn the record into reliable data</a:t>
-            </a:r>
-            <a:endParaRPr lang="en-US" sz="1300" dirty="0"/>
           </a:p>
         </p:txBody>
       </p:sp>
@@ -3611,12 +3809,12 @@
         </p:nvSpPr>
         <p:spPr>
           <a:xfrm>
-            <a:off x="8915400" y="1417320"/>
-            <a:ext cx="2606040" cy="1508760"/>
+            <a:off x="6217920" y="3794760"/>
+            <a:ext cx="5394960" cy="2103120"/>
           </a:xfrm>
           <a:prstGeom prst="roundRect">
             <a:avLst>
-              <a:gd name="adj" fmla="val 9091"/>
+              <a:gd name="adj" fmla="val 6522"/>
             </a:avLst>
           </a:prstGeom>
           <a:solidFill>
@@ -3641,8 +3839,8 @@
         </p:blipFill>
         <p:spPr>
           <a:xfrm>
-            <a:off x="9098280" y="1618488"/>
-            <a:ext cx="411480" cy="411480"/>
+            <a:off x="6492240" y="4069080"/>
+            <a:ext cx="548640" cy="548640"/>
           </a:xfrm>
           <a:prstGeom prst="rect">
             <a:avLst/>
@@ -3657,8 +3855,8 @@
         </p:nvSpPr>
         <p:spPr>
           <a:xfrm>
-            <a:off x="9646920" y="1554480"/>
-            <a:ext cx="1783080" cy="548640"/>
+            <a:off x="7223760" y="4023360"/>
+            <a:ext cx="4114800" cy="685800"/>
           </a:xfrm>
           <a:prstGeom prst="rect">
             <a:avLst/>
@@ -3674,649 +3872,50 @@
               <a:buNone/>
             </a:pPr>
             <a:r>
-              <a:rPr lang="en-US" sz="1500" b="1" dirty="0">
+              <a:rPr lang="en-US" sz="1900" b="1" dirty="0">
                 <a:solidFill>
                   <a:schemeClr val="tx2"/>
                 </a:solidFill>
               </a:rPr>
-              <a:t>AI engineers</a:t>
+              <a:t>Open the record to automation</a:t>
+            </a:r>
+            <a:endParaRPr lang="en-US" sz="1900" dirty="0"/>
+          </a:p>
+        </p:txBody>
+      </p:sp>
+      <p:sp>
+        <p:nvSpPr>
+          <p:cNvPr id="18" name="Text 12"/>
+          <p:cNvSpPr txBox="1"/>
+          <p:nvPr/>
+        </p:nvSpPr>
+        <p:spPr>
+          <a:xfrm>
+            <a:off x="6492240" y="4800600"/>
+            <a:ext cx="4846320" cy="914400"/>
+          </a:xfrm>
+          <a:prstGeom prst="rect">
+            <a:avLst/>
+          </a:prstGeom>
+          <a:noFill/>
+          <a:ln/>
+        </p:spPr>
+        <p:txBody>
+          <a:bodyPr wrap="square" lIns="0" tIns="0" rIns="0" bIns="0" rtlCol="0" anchor="t"/>
+          <a:lstStyle/>
+          <a:p>
+            <a:pPr indent="0" marL="0">
+              <a:buNone/>
+            </a:pPr>
+            <a:r>
+              <a:rPr lang="en-US" sz="1500" dirty="0">
+                <a:solidFill>
+                  <a:schemeClr val="tx1"/>
+                </a:solidFill>
+              </a:rPr>
+              <a:t>Bulk access with each file’s details, so our own tools — and the public’s — can use it.</a:t>
             </a:r>
             <a:endParaRPr lang="en-US" sz="1500" dirty="0"/>
-          </a:p>
-        </p:txBody>
-      </p:sp>
-      <p:sp>
-        <p:nvSpPr>
-          <p:cNvPr id="18" name="Text 12"/>
-          <p:cNvSpPr txBox="1"/>
-          <p:nvPr/>
-        </p:nvSpPr>
-        <p:spPr>
-          <a:xfrm>
-            <a:off x="9098280" y="2194560"/>
-            <a:ext cx="2286000" cy="640080"/>
-          </a:xfrm>
-          <a:prstGeom prst="rect">
-            <a:avLst/>
-          </a:prstGeom>
-          <a:noFill/>
-          <a:ln/>
-        </p:spPr>
-        <p:txBody>
-          <a:bodyPr wrap="square" lIns="0" tIns="0" rIns="0" bIns="0" rtlCol="0" anchor="t"/>
-          <a:lstStyle/>
-          <a:p>
-            <a:pPr indent="0" marL="0">
-              <a:buNone/>
-            </a:pPr>
-            <a:r>
-              <a:rPr lang="en-US" sz="1300" dirty="0">
-                <a:solidFill>
-                  <a:schemeClr val="tx1"/>
-                </a:solidFill>
-              </a:rPr>
-              <a:t>build, test and monitor AI tools</a:t>
-            </a:r>
-            <a:endParaRPr lang="en-US" sz="1300" dirty="0"/>
-          </a:p>
-        </p:txBody>
-      </p:sp>
-      <p:sp>
-        <p:nvSpPr>
-          <p:cNvPr id="19" name="Shape 13"/>
-          <p:cNvSpPr/>
-          <p:nvPr/>
-        </p:nvSpPr>
-        <p:spPr>
-          <a:xfrm>
-            <a:off x="548640" y="3108960"/>
-            <a:ext cx="2606040" cy="1508760"/>
-          </a:xfrm>
-          <a:prstGeom prst="roundRect">
-            <a:avLst>
-              <a:gd name="adj" fmla="val 9091"/>
-            </a:avLst>
-          </a:prstGeom>
-          <a:solidFill>
-            <a:schemeClr val="bg2"/>
-          </a:solidFill>
-          <a:ln/>
-        </p:spPr>
-      </p:sp>
-      <p:pic>
-        <p:nvPicPr>
-          <p:cNvPr id="20" name="Image 4" descr="preencoded.png">    </p:cNvPr>
-          <p:cNvPicPr>
-            <a:picLocks noChangeAspect="1"/>
-          </p:cNvPicPr>
-          <p:nvPr/>
-        </p:nvPicPr>
-        <p:blipFill>
-          <a:blip r:embed="rId5"/>
-          <a:stretch>
-            <a:fillRect/>
-          </a:stretch>
-        </p:blipFill>
-        <p:spPr>
-          <a:xfrm>
-            <a:off x="731520" y="3310128"/>
-            <a:ext cx="411480" cy="411480"/>
-          </a:xfrm>
-          <a:prstGeom prst="rect">
-            <a:avLst/>
-          </a:prstGeom>
-        </p:spPr>
-      </p:pic>
-      <p:sp>
-        <p:nvSpPr>
-          <p:cNvPr id="21" name="Text 14"/>
-          <p:cNvSpPr txBox="1"/>
-          <p:nvPr/>
-        </p:nvSpPr>
-        <p:spPr>
-          <a:xfrm>
-            <a:off x="1280160" y="3246120"/>
-            <a:ext cx="1783080" cy="548640"/>
-          </a:xfrm>
-          <a:prstGeom prst="rect">
-            <a:avLst/>
-          </a:prstGeom>
-          <a:noFill/>
-          <a:ln/>
-        </p:spPr>
-        <p:txBody>
-          <a:bodyPr wrap="square" lIns="0" tIns="0" rIns="0" bIns="0" rtlCol="0" anchor="ctr"/>
-          <a:lstStyle/>
-          <a:p>
-            <a:pPr indent="0" marL="0">
-              <a:buNone/>
-            </a:pPr>
-            <a:r>
-              <a:rPr lang="en-US" sz="1500" b="1" dirty="0">
-                <a:solidFill>
-                  <a:schemeClr val="tx2"/>
-                </a:solidFill>
-              </a:rPr>
-              <a:t>Cloud and security</a:t>
-            </a:r>
-            <a:endParaRPr lang="en-US" sz="1500" dirty="0"/>
-          </a:p>
-        </p:txBody>
-      </p:sp>
-      <p:sp>
-        <p:nvSpPr>
-          <p:cNvPr id="22" name="Text 15"/>
-          <p:cNvSpPr txBox="1"/>
-          <p:nvPr/>
-        </p:nvSpPr>
-        <p:spPr>
-          <a:xfrm>
-            <a:off x="731520" y="3886200"/>
-            <a:ext cx="2286000" cy="640080"/>
-          </a:xfrm>
-          <a:prstGeom prst="rect">
-            <a:avLst/>
-          </a:prstGeom>
-          <a:noFill/>
-          <a:ln/>
-        </p:spPr>
-        <p:txBody>
-          <a:bodyPr wrap="square" lIns="0" tIns="0" rIns="0" bIns="0" rtlCol="0" anchor="t"/>
-          <a:lstStyle/>
-          <a:p>
-            <a:pPr indent="0" marL="0">
-              <a:buNone/>
-            </a:pPr>
-            <a:r>
-              <a:rPr lang="en-US" sz="1300" dirty="0">
-                <a:solidFill>
-                  <a:schemeClr val="tx1"/>
-                </a:solidFill>
-              </a:rPr>
-              <a:t>a secure, scalable platform</a:t>
-            </a:r>
-            <a:endParaRPr lang="en-US" sz="1300" dirty="0"/>
-          </a:p>
-        </p:txBody>
-      </p:sp>
-      <p:sp>
-        <p:nvSpPr>
-          <p:cNvPr id="23" name="Shape 16"/>
-          <p:cNvSpPr/>
-          <p:nvPr/>
-        </p:nvSpPr>
-        <p:spPr>
-          <a:xfrm>
-            <a:off x="3337560" y="3108960"/>
-            <a:ext cx="2606040" cy="1508760"/>
-          </a:xfrm>
-          <a:prstGeom prst="roundRect">
-            <a:avLst>
-              <a:gd name="adj" fmla="val 9091"/>
-            </a:avLst>
-          </a:prstGeom>
-          <a:solidFill>
-            <a:schemeClr val="bg2"/>
-          </a:solidFill>
-          <a:ln/>
-        </p:spPr>
-      </p:sp>
-      <p:pic>
-        <p:nvPicPr>
-          <p:cNvPr id="24" name="Image 5" descr="preencoded.png">    </p:cNvPr>
-          <p:cNvPicPr>
-            <a:picLocks noChangeAspect="1"/>
-          </p:cNvPicPr>
-          <p:nvPr/>
-        </p:nvPicPr>
-        <p:blipFill>
-          <a:blip r:embed="rId6"/>
-          <a:stretch>
-            <a:fillRect/>
-          </a:stretch>
-        </p:blipFill>
-        <p:spPr>
-          <a:xfrm>
-            <a:off x="3520440" y="3310128"/>
-            <a:ext cx="411480" cy="411480"/>
-          </a:xfrm>
-          <a:prstGeom prst="rect">
-            <a:avLst/>
-          </a:prstGeom>
-        </p:spPr>
-      </p:pic>
-      <p:sp>
-        <p:nvSpPr>
-          <p:cNvPr id="25" name="Text 17"/>
-          <p:cNvSpPr txBox="1"/>
-          <p:nvPr/>
-        </p:nvSpPr>
-        <p:spPr>
-          <a:xfrm>
-            <a:off x="4069080" y="3246120"/>
-            <a:ext cx="1783080" cy="548640"/>
-          </a:xfrm>
-          <a:prstGeom prst="rect">
-            <a:avLst/>
-          </a:prstGeom>
-          <a:noFill/>
-          <a:ln/>
-        </p:spPr>
-        <p:txBody>
-          <a:bodyPr wrap="square" lIns="0" tIns="0" rIns="0" bIns="0" rtlCol="0" anchor="ctr"/>
-          <a:lstStyle/>
-          <a:p>
-            <a:pPr indent="0" marL="0">
-              <a:buNone/>
-            </a:pPr>
-            <a:r>
-              <a:rPr lang="en-US" sz="1500" b="1" dirty="0">
-                <a:solidFill>
-                  <a:schemeClr val="tx2"/>
-                </a:solidFill>
-              </a:rPr>
-              <a:t>Information management</a:t>
-            </a:r>
-            <a:endParaRPr lang="en-US" sz="1500" dirty="0"/>
-          </a:p>
-        </p:txBody>
-      </p:sp>
-      <p:sp>
-        <p:nvSpPr>
-          <p:cNvPr id="26" name="Text 18"/>
-          <p:cNvSpPr txBox="1"/>
-          <p:nvPr/>
-        </p:nvSpPr>
-        <p:spPr>
-          <a:xfrm>
-            <a:off x="3520440" y="3886200"/>
-            <a:ext cx="2286000" cy="640080"/>
-          </a:xfrm>
-          <a:prstGeom prst="rect">
-            <a:avLst/>
-          </a:prstGeom>
-          <a:noFill/>
-          <a:ln/>
-        </p:spPr>
-        <p:txBody>
-          <a:bodyPr wrap="square" lIns="0" tIns="0" rIns="0" bIns="0" rtlCol="0" anchor="t"/>
-          <a:lstStyle/>
-          <a:p>
-            <a:pPr indent="0" marL="0">
-              <a:buNone/>
-            </a:pPr>
-            <a:r>
-              <a:rPr lang="en-US" sz="1300" dirty="0">
-                <a:solidFill>
-                  <a:schemeClr val="tx1"/>
-                </a:solidFill>
-              </a:rPr>
-              <a:t>records, fingerprints, retention</a:t>
-            </a:r>
-            <a:endParaRPr lang="en-US" sz="1300" dirty="0"/>
-          </a:p>
-        </p:txBody>
-      </p:sp>
-      <p:sp>
-        <p:nvSpPr>
-          <p:cNvPr id="27" name="Shape 19"/>
-          <p:cNvSpPr/>
-          <p:nvPr/>
-        </p:nvSpPr>
-        <p:spPr>
-          <a:xfrm>
-            <a:off x="6126480" y="3108960"/>
-            <a:ext cx="2606040" cy="1508760"/>
-          </a:xfrm>
-          <a:prstGeom prst="roundRect">
-            <a:avLst>
-              <a:gd name="adj" fmla="val 9091"/>
-            </a:avLst>
-          </a:prstGeom>
-          <a:solidFill>
-            <a:schemeClr val="bg2"/>
-          </a:solidFill>
-          <a:ln/>
-        </p:spPr>
-      </p:sp>
-      <p:pic>
-        <p:nvPicPr>
-          <p:cNvPr id="28" name="Image 6" descr="preencoded.png">    </p:cNvPr>
-          <p:cNvPicPr>
-            <a:picLocks noChangeAspect="1"/>
-          </p:cNvPicPr>
-          <p:nvPr/>
-        </p:nvPicPr>
-        <p:blipFill>
-          <a:blip r:embed="rId7"/>
-          <a:stretch>
-            <a:fillRect/>
-          </a:stretch>
-        </p:blipFill>
-        <p:spPr>
-          <a:xfrm>
-            <a:off x="6309360" y="3310128"/>
-            <a:ext cx="411480" cy="411480"/>
-          </a:xfrm>
-          <a:prstGeom prst="rect">
-            <a:avLst/>
-          </a:prstGeom>
-        </p:spPr>
-      </p:pic>
-      <p:sp>
-        <p:nvSpPr>
-          <p:cNvPr id="29" name="Text 20"/>
-          <p:cNvSpPr txBox="1"/>
-          <p:nvPr/>
-        </p:nvSpPr>
-        <p:spPr>
-          <a:xfrm>
-            <a:off x="6858000" y="3246120"/>
-            <a:ext cx="1783080" cy="548640"/>
-          </a:xfrm>
-          <a:prstGeom prst="rect">
-            <a:avLst/>
-          </a:prstGeom>
-          <a:noFill/>
-          <a:ln/>
-        </p:spPr>
-        <p:txBody>
-          <a:bodyPr wrap="square" lIns="0" tIns="0" rIns="0" bIns="0" rtlCol="0" anchor="ctr"/>
-          <a:lstStyle/>
-          <a:p>
-            <a:pPr indent="0" marL="0">
-              <a:buNone/>
-            </a:pPr>
-            <a:r>
-              <a:rPr lang="en-US" sz="1500" b="1" dirty="0">
-                <a:solidFill>
-                  <a:schemeClr val="tx2"/>
-                </a:solidFill>
-              </a:rPr>
-              <a:t>Privacy, legal, ethics</a:t>
-            </a:r>
-            <a:endParaRPr lang="en-US" sz="1500" dirty="0"/>
-          </a:p>
-        </p:txBody>
-      </p:sp>
-      <p:sp>
-        <p:nvSpPr>
-          <p:cNvPr id="30" name="Text 21"/>
-          <p:cNvSpPr txBox="1"/>
-          <p:nvPr/>
-        </p:nvSpPr>
-        <p:spPr>
-          <a:xfrm>
-            <a:off x="6309360" y="3886200"/>
-            <a:ext cx="2286000" cy="640080"/>
-          </a:xfrm>
-          <a:prstGeom prst="rect">
-            <a:avLst/>
-          </a:prstGeom>
-          <a:noFill/>
-          <a:ln/>
-        </p:spPr>
-        <p:txBody>
-          <a:bodyPr wrap="square" lIns="0" tIns="0" rIns="0" bIns="0" rtlCol="0" anchor="t"/>
-          <a:lstStyle/>
-          <a:p>
-            <a:pPr indent="0" marL="0">
-              <a:buNone/>
-            </a:pPr>
-            <a:r>
-              <a:rPr lang="en-US" sz="1300" dirty="0">
-                <a:solidFill>
-                  <a:schemeClr val="tx1"/>
-                </a:solidFill>
-              </a:rPr>
-              <a:t>responsible-AI rules and reviews</a:t>
-            </a:r>
-            <a:endParaRPr lang="en-US" sz="1300" dirty="0"/>
-          </a:p>
-        </p:txBody>
-      </p:sp>
-      <p:sp>
-        <p:nvSpPr>
-          <p:cNvPr id="31" name="Shape 22"/>
-          <p:cNvSpPr/>
-          <p:nvPr/>
-        </p:nvSpPr>
-        <p:spPr>
-          <a:xfrm>
-            <a:off x="8915400" y="3108960"/>
-            <a:ext cx="2606040" cy="1508760"/>
-          </a:xfrm>
-          <a:prstGeom prst="roundRect">
-            <a:avLst>
-              <a:gd name="adj" fmla="val 9091"/>
-            </a:avLst>
-          </a:prstGeom>
-          <a:solidFill>
-            <a:schemeClr val="bg2"/>
-          </a:solidFill>
-          <a:ln/>
-        </p:spPr>
-      </p:sp>
-      <p:pic>
-        <p:nvPicPr>
-          <p:cNvPr id="32" name="Image 7" descr="preencoded.png">    </p:cNvPr>
-          <p:cNvPicPr>
-            <a:picLocks noChangeAspect="1"/>
-          </p:cNvPicPr>
-          <p:nvPr/>
-        </p:nvPicPr>
-        <p:blipFill>
-          <a:blip r:embed="rId8"/>
-          <a:stretch>
-            <a:fillRect/>
-          </a:stretch>
-        </p:blipFill>
-        <p:spPr>
-          <a:xfrm>
-            <a:off x="9098280" y="3310128"/>
-            <a:ext cx="411480" cy="411480"/>
-          </a:xfrm>
-          <a:prstGeom prst="rect">
-            <a:avLst/>
-          </a:prstGeom>
-        </p:spPr>
-      </p:pic>
-      <p:sp>
-        <p:nvSpPr>
-          <p:cNvPr id="33" name="Text 23"/>
-          <p:cNvSpPr txBox="1"/>
-          <p:nvPr/>
-        </p:nvSpPr>
-        <p:spPr>
-          <a:xfrm>
-            <a:off x="9646920" y="3246120"/>
-            <a:ext cx="1783080" cy="548640"/>
-          </a:xfrm>
-          <a:prstGeom prst="rect">
-            <a:avLst/>
-          </a:prstGeom>
-          <a:noFill/>
-          <a:ln/>
-        </p:spPr>
-        <p:txBody>
-          <a:bodyPr wrap="square" lIns="0" tIns="0" rIns="0" bIns="0" rtlCol="0" anchor="ctr"/>
-          <a:lstStyle/>
-          <a:p>
-            <a:pPr indent="0" marL="0">
-              <a:buNone/>
-            </a:pPr>
-            <a:r>
-              <a:rPr lang="en-US" sz="1500" b="1" dirty="0">
-                <a:solidFill>
-                  <a:schemeClr val="tx2"/>
-                </a:solidFill>
-              </a:rPr>
-              <a:t>Change and training</a:t>
-            </a:r>
-            <a:endParaRPr lang="en-US" sz="1500" dirty="0"/>
-          </a:p>
-        </p:txBody>
-      </p:sp>
-      <p:sp>
-        <p:nvSpPr>
-          <p:cNvPr id="34" name="Text 24"/>
-          <p:cNvSpPr txBox="1"/>
-          <p:nvPr/>
-        </p:nvSpPr>
-        <p:spPr>
-          <a:xfrm>
-            <a:off x="9098280" y="3886200"/>
-            <a:ext cx="2286000" cy="640080"/>
-          </a:xfrm>
-          <a:prstGeom prst="rect">
-            <a:avLst/>
-          </a:prstGeom>
-          <a:noFill/>
-          <a:ln/>
-        </p:spPr>
-        <p:txBody>
-          <a:bodyPr wrap="square" lIns="0" tIns="0" rIns="0" bIns="0" rtlCol="0" anchor="t"/>
-          <a:lstStyle/>
-          <a:p>
-            <a:pPr indent="0" marL="0">
-              <a:buNone/>
-            </a:pPr>
-            <a:r>
-              <a:rPr lang="en-US" sz="1300" dirty="0">
-                <a:solidFill>
-                  <a:schemeClr val="tx1"/>
-                </a:solidFill>
-              </a:rPr>
-              <a:t>help staff and filers adopt it</a:t>
-            </a:r>
-            <a:endParaRPr lang="en-US" sz="1300" dirty="0"/>
-          </a:p>
-        </p:txBody>
-      </p:sp>
-      <p:sp>
-        <p:nvSpPr>
-          <p:cNvPr id="35" name="Text 25"/>
-          <p:cNvSpPr txBox="1"/>
-          <p:nvPr/>
-        </p:nvSpPr>
-        <p:spPr>
-          <a:xfrm>
-            <a:off x="548640" y="4892040"/>
-            <a:ext cx="11064240" cy="365760"/>
-          </a:xfrm>
-          <a:prstGeom prst="rect">
-            <a:avLst/>
-          </a:prstGeom>
-          <a:noFill/>
-          <a:ln/>
-        </p:spPr>
-        <p:txBody>
-          <a:bodyPr wrap="square" lIns="0" tIns="0" rIns="0" bIns="0" rtlCol="0" anchor="ctr"/>
-          <a:lstStyle/>
-          <a:p>
-            <a:pPr indent="0" marL="0">
-              <a:buNone/>
-            </a:pPr>
-            <a:r>
-              <a:rPr lang="en-US" sz="1600" b="1" dirty="0">
-                <a:solidFill>
-                  <a:schemeClr val="accent1"/>
-                </a:solidFill>
-              </a:rPr>
-              <a:t>Others are already moving</a:t>
-            </a:r>
-            <a:endParaRPr lang="en-US" sz="1600" dirty="0"/>
-          </a:p>
-        </p:txBody>
-      </p:sp>
-      <p:sp>
-        <p:nvSpPr>
-          <p:cNvPr id="36" name="Text 26"/>
-          <p:cNvSpPr txBox="1"/>
-          <p:nvPr/>
-        </p:nvSpPr>
-        <p:spPr>
-          <a:xfrm>
-            <a:off x="548640" y="5257800"/>
-            <a:ext cx="11064240" cy="914400"/>
-          </a:xfrm>
-          <a:prstGeom prst="rect">
-            <a:avLst/>
-          </a:prstGeom>
-          <a:noFill/>
-          <a:ln/>
-        </p:spPr>
-        <p:txBody>
-          <a:bodyPr wrap="square" lIns="0" tIns="0" rIns="0" bIns="0" rtlCol="0" anchor="t"/>
-          <a:lstStyle/>
-          <a:p>
-            <a:pPr indent="0" marL="0">
-              <a:buNone/>
-            </a:pPr>
-            <a:r>
-              <a:rPr lang="en-US" sz="1300" b="1" dirty="0">
-                <a:solidFill>
-                  <a:schemeClr val="tx1"/>
-                </a:solidFill>
-              </a:rPr>
-              <a:t>BC Energy Regulator</a:t>
-            </a:r>
-            <a:pPr indent="0" marL="0">
-              <a:buNone/>
-            </a:pPr>
-            <a:r>
-              <a:rPr lang="en-US" sz="1300" dirty="0">
-                <a:solidFill>
-                  <a:schemeClr val="tx1"/>
-                </a:solidFill>
-              </a:rPr>
-              <a:t> is expanding an AI permit assistant on its cloud platform (2026).   </a:t>
-            </a:r>
-            <a:pPr indent="0" marL="0">
-              <a:buNone/>
-            </a:pPr>
-            <a:r>
-              <a:rPr lang="en-US" sz="1300" b="1" dirty="0">
-                <a:solidFill>
-                  <a:schemeClr val="tx1"/>
-                </a:solidFill>
-              </a:rPr>
-              <a:t>Alberta Energy Regulator</a:t>
-            </a:r>
-            <a:pPr indent="0" marL="0">
-              <a:buNone/>
-            </a:pPr>
-            <a:r>
-              <a:rPr lang="en-US" sz="1300" dirty="0">
-                <a:solidFill>
-                  <a:schemeClr val="tx1"/>
-                </a:solidFill>
-              </a:rPr>
-              <a:t> built OneStop: most routine applications approved automatically.   </a:t>
-            </a:r>
-            <a:pPr indent="0" marL="0">
-              <a:buNone/>
-            </a:pPr>
-            <a:r>
-              <a:rPr lang="en-US" sz="1300" b="1" dirty="0">
-                <a:solidFill>
-                  <a:schemeClr val="tx1"/>
-                </a:solidFill>
-              </a:rPr>
-              <a:t>Government of Canada</a:t>
-            </a:r>
-            <a:pPr indent="0" marL="0">
-              <a:buNone/>
-            </a:pPr>
-            <a:r>
-              <a:rPr lang="en-US" sz="1300" dirty="0">
-                <a:solidFill>
-                  <a:schemeClr val="tx1"/>
-                </a:solidFill>
-              </a:rPr>
-              <a:t> AI Strategy 2025–27: an AI Centre of Expertise and responsible-AI rules.</a:t>
-            </a:r>
-            <a:endParaRPr lang="en-US" sz="1300" dirty="0"/>
           </a:p>
         </p:txBody>
       </p:sp>
@@ -4422,7 +4021,7 @@
                   <a:schemeClr val="tx2"/>
                 </a:solidFill>
               </a:rPr>
-              <a:t>Start small, scale with care</a:t>
+              <a:t>Build an AI team and a cloud strategy</a:t>
             </a:r>
             <a:endParaRPr lang="en-US" sz="3400" dirty="0"/>
           </a:p>
@@ -4436,12 +4035,12 @@
         </p:nvSpPr>
         <p:spPr>
           <a:xfrm>
-            <a:off x="548640" y="1463040"/>
-            <a:ext cx="6035040" cy="1280160"/>
+            <a:off x="548640" y="1417320"/>
+            <a:ext cx="2606040" cy="1508760"/>
           </a:xfrm>
           <a:prstGeom prst="roundRect">
             <a:avLst>
-              <a:gd name="adj" fmla="val 10714"/>
+              <a:gd name="adj" fmla="val 9091"/>
             </a:avLst>
           </a:prstGeom>
           <a:solidFill>
@@ -4450,550 +4049,9 @@
           <a:ln/>
         </p:spPr>
       </p:sp>
-      <p:sp>
-        <p:nvSpPr>
-          <p:cNvPr id="4" name="Text 2"/>
-          <p:cNvSpPr txBox="1"/>
-          <p:nvPr/>
-        </p:nvSpPr>
-        <p:spPr>
-          <a:xfrm>
-            <a:off x="777240" y="1645920"/>
-            <a:ext cx="548640" cy="914400"/>
-          </a:xfrm>
-          <a:prstGeom prst="rect">
-            <a:avLst/>
-          </a:prstGeom>
-          <a:noFill/>
-          <a:ln/>
-        </p:spPr>
-        <p:txBody>
-          <a:bodyPr wrap="square" lIns="0" tIns="0" rIns="0" bIns="0" rtlCol="0" anchor="ctr"/>
-          <a:lstStyle/>
-          <a:p>
-            <a:pPr indent="0" marL="0">
-              <a:buNone/>
-            </a:pPr>
-            <a:r>
-              <a:rPr lang="en-US" sz="4000" b="1" dirty="0">
-                <a:solidFill>
-                  <a:schemeClr val="accent1"/>
-                </a:solidFill>
-                <a:latin typeface="Cambria" pitchFamily="34" charset="0"/>
-                <a:ea typeface="Cambria" pitchFamily="34" charset="-122"/>
-                <a:cs typeface="Cambria" pitchFamily="34" charset="-120"/>
-              </a:rPr>
-              <a:t>1</a:t>
-            </a:r>
-            <a:endParaRPr lang="en-US" sz="4000" dirty="0"/>
-          </a:p>
-        </p:txBody>
-      </p:sp>
-      <p:sp>
-        <p:nvSpPr>
-          <p:cNvPr id="5" name="Text 3"/>
-          <p:cNvSpPr txBox="1"/>
-          <p:nvPr/>
-        </p:nvSpPr>
-        <p:spPr>
-          <a:xfrm>
-            <a:off x="1463040" y="1600200"/>
-            <a:ext cx="4480560" cy="457200"/>
-          </a:xfrm>
-          <a:prstGeom prst="rect">
-            <a:avLst/>
-          </a:prstGeom>
-          <a:noFill/>
-          <a:ln/>
-        </p:spPr>
-        <p:txBody>
-          <a:bodyPr wrap="square" lIns="0" tIns="0" rIns="0" bIns="0" rtlCol="0" anchor="ctr"/>
-          <a:lstStyle/>
-          <a:p>
-            <a:pPr indent="0" marL="0">
-              <a:buNone/>
-            </a:pPr>
-            <a:r>
-              <a:rPr lang="en-US" sz="2000" b="1" dirty="0">
-                <a:solidFill>
-                  <a:schemeClr val="tx2"/>
-                </a:solidFill>
-              </a:rPr>
-              <a:t>Personal</a:t>
-            </a:r>
-            <a:endParaRPr lang="en-US" sz="2000" dirty="0"/>
-          </a:p>
-        </p:txBody>
-      </p:sp>
-      <p:sp>
-        <p:nvSpPr>
-          <p:cNvPr id="6" name="Text 4"/>
-          <p:cNvSpPr txBox="1"/>
-          <p:nvPr/>
-        </p:nvSpPr>
-        <p:spPr>
-          <a:xfrm>
-            <a:off x="1463040" y="2029968"/>
-            <a:ext cx="4846320" cy="320040"/>
-          </a:xfrm>
-          <a:prstGeom prst="rect">
-            <a:avLst/>
-          </a:prstGeom>
-          <a:noFill/>
-          <a:ln/>
-        </p:spPr>
-        <p:txBody>
-          <a:bodyPr wrap="square" lIns="0" tIns="0" rIns="0" bIns="0" rtlCol="0" anchor="ctr"/>
-          <a:lstStyle/>
-          <a:p>
-            <a:pPr indent="0" marL="0">
-              <a:buNone/>
-            </a:pPr>
-            <a:r>
-              <a:rPr lang="en-US" sz="1500" dirty="0">
-                <a:solidFill>
-                  <a:schemeClr val="tx1"/>
-                </a:solidFill>
-              </a:rPr>
-              <a:t>Drafting, summarising</a:t>
-            </a:r>
-            <a:endParaRPr lang="en-US" sz="1500" dirty="0"/>
-          </a:p>
-        </p:txBody>
-      </p:sp>
-      <p:sp>
-        <p:nvSpPr>
-          <p:cNvPr id="7" name="Text 5"/>
-          <p:cNvSpPr txBox="1"/>
-          <p:nvPr/>
-        </p:nvSpPr>
-        <p:spPr>
-          <a:xfrm>
-            <a:off x="1463040" y="2331720"/>
-            <a:ext cx="4846320" cy="320040"/>
-          </a:xfrm>
-          <a:prstGeom prst="rect">
-            <a:avLst/>
-          </a:prstGeom>
-          <a:noFill/>
-          <a:ln/>
-        </p:spPr>
-        <p:txBody>
-          <a:bodyPr wrap="square" lIns="0" tIns="0" rIns="0" bIns="0" rtlCol="0" anchor="ctr"/>
-          <a:lstStyle/>
-          <a:p>
-            <a:pPr indent="0" marL="0">
-              <a:buNone/>
-            </a:pPr>
-            <a:r>
-              <a:rPr lang="en-US" sz="1300" i="1" dirty="0">
-                <a:solidFill>
-                  <a:schemeClr val="accent3"/>
-                </a:solidFill>
-              </a:rPr>
-              <a:t>Low risk: staff guidance</a:t>
-            </a:r>
-            <a:endParaRPr lang="en-US" sz="1300" dirty="0"/>
-          </a:p>
-        </p:txBody>
-      </p:sp>
-      <p:sp>
-        <p:nvSpPr>
-          <p:cNvPr id="8" name="Shape 6"/>
-          <p:cNvSpPr/>
-          <p:nvPr/>
-        </p:nvSpPr>
-        <p:spPr>
-          <a:xfrm>
-            <a:off x="960120" y="2926080"/>
-            <a:ext cx="5623560" cy="1280160"/>
-          </a:xfrm>
-          <a:prstGeom prst="roundRect">
-            <a:avLst>
-              <a:gd name="adj" fmla="val 10714"/>
-            </a:avLst>
-          </a:prstGeom>
-          <a:solidFill>
-            <a:schemeClr val="bg2"/>
-          </a:solidFill>
-          <a:ln/>
-        </p:spPr>
-      </p:sp>
-      <p:sp>
-        <p:nvSpPr>
-          <p:cNvPr id="9" name="Text 7"/>
-          <p:cNvSpPr txBox="1"/>
-          <p:nvPr/>
-        </p:nvSpPr>
-        <p:spPr>
-          <a:xfrm>
-            <a:off x="1188720" y="3108960"/>
-            <a:ext cx="548640" cy="914400"/>
-          </a:xfrm>
-          <a:prstGeom prst="rect">
-            <a:avLst/>
-          </a:prstGeom>
-          <a:noFill/>
-          <a:ln/>
-        </p:spPr>
-        <p:txBody>
-          <a:bodyPr wrap="square" lIns="0" tIns="0" rIns="0" bIns="0" rtlCol="0" anchor="ctr"/>
-          <a:lstStyle/>
-          <a:p>
-            <a:pPr indent="0" marL="0">
-              <a:buNone/>
-            </a:pPr>
-            <a:r>
-              <a:rPr lang="en-US" sz="4000" b="1" dirty="0">
-                <a:solidFill>
-                  <a:schemeClr val="accent1"/>
-                </a:solidFill>
-                <a:latin typeface="Cambria" pitchFamily="34" charset="0"/>
-                <a:ea typeface="Cambria" pitchFamily="34" charset="-122"/>
-                <a:cs typeface="Cambria" pitchFamily="34" charset="-120"/>
-              </a:rPr>
-              <a:t>2</a:t>
-            </a:r>
-            <a:endParaRPr lang="en-US" sz="4000" dirty="0"/>
-          </a:p>
-        </p:txBody>
-      </p:sp>
-      <p:sp>
-        <p:nvSpPr>
-          <p:cNvPr id="10" name="Text 8"/>
-          <p:cNvSpPr txBox="1"/>
-          <p:nvPr/>
-        </p:nvSpPr>
-        <p:spPr>
-          <a:xfrm>
-            <a:off x="1874520" y="3063240"/>
-            <a:ext cx="4069080" cy="457200"/>
-          </a:xfrm>
-          <a:prstGeom prst="rect">
-            <a:avLst/>
-          </a:prstGeom>
-          <a:noFill/>
-          <a:ln/>
-        </p:spPr>
-        <p:txBody>
-          <a:bodyPr wrap="square" lIns="0" tIns="0" rIns="0" bIns="0" rtlCol="0" anchor="ctr"/>
-          <a:lstStyle/>
-          <a:p>
-            <a:pPr indent="0" marL="0">
-              <a:buNone/>
-            </a:pPr>
-            <a:r>
-              <a:rPr lang="en-US" sz="2000" b="1" dirty="0">
-                <a:solidFill>
-                  <a:schemeClr val="tx2"/>
-                </a:solidFill>
-              </a:rPr>
-              <a:t>Team</a:t>
-            </a:r>
-            <a:endParaRPr lang="en-US" sz="2000" dirty="0"/>
-          </a:p>
-        </p:txBody>
-      </p:sp>
-      <p:sp>
-        <p:nvSpPr>
-          <p:cNvPr id="11" name="Text 9"/>
-          <p:cNvSpPr txBox="1"/>
-          <p:nvPr/>
-        </p:nvSpPr>
-        <p:spPr>
-          <a:xfrm>
-            <a:off x="1874520" y="3493008"/>
-            <a:ext cx="4434840" cy="320040"/>
-          </a:xfrm>
-          <a:prstGeom prst="rect">
-            <a:avLst/>
-          </a:prstGeom>
-          <a:noFill/>
-          <a:ln/>
-        </p:spPr>
-        <p:txBody>
-          <a:bodyPr wrap="square" lIns="0" tIns="0" rIns="0" bIns="0" rtlCol="0" anchor="ctr"/>
-          <a:lstStyle/>
-          <a:p>
-            <a:pPr indent="0" marL="0">
-              <a:buNone/>
-            </a:pPr>
-            <a:r>
-              <a:rPr lang="en-US" sz="1500" dirty="0">
-                <a:solidFill>
-                  <a:schemeClr val="tx1"/>
-                </a:solidFill>
-              </a:rPr>
-              <a:t>Knowledge assistants, triage</a:t>
-            </a:r>
-            <a:endParaRPr lang="en-US" sz="1500" dirty="0"/>
-          </a:p>
-        </p:txBody>
-      </p:sp>
-      <p:sp>
-        <p:nvSpPr>
-          <p:cNvPr id="12" name="Text 10"/>
-          <p:cNvSpPr txBox="1"/>
-          <p:nvPr/>
-        </p:nvSpPr>
-        <p:spPr>
-          <a:xfrm>
-            <a:off x="1874520" y="3794760"/>
-            <a:ext cx="4434840" cy="320040"/>
-          </a:xfrm>
-          <a:prstGeom prst="rect">
-            <a:avLst/>
-          </a:prstGeom>
-          <a:noFill/>
-          <a:ln/>
-        </p:spPr>
-        <p:txBody>
-          <a:bodyPr wrap="square" lIns="0" tIns="0" rIns="0" bIns="0" rtlCol="0" anchor="ctr"/>
-          <a:lstStyle/>
-          <a:p>
-            <a:pPr indent="0" marL="0">
-              <a:buNone/>
-            </a:pPr>
-            <a:r>
-              <a:rPr lang="en-US" sz="1300" i="1" dirty="0">
-                <a:solidFill>
-                  <a:schemeClr val="accent3"/>
-                </a:solidFill>
-              </a:rPr>
-              <a:t>Medium: a service owner, central oversight</a:t>
-            </a:r>
-            <a:endParaRPr lang="en-US" sz="1300" dirty="0"/>
-          </a:p>
-        </p:txBody>
-      </p:sp>
-      <p:sp>
-        <p:nvSpPr>
-          <p:cNvPr id="13" name="Shape 11"/>
-          <p:cNvSpPr/>
-          <p:nvPr/>
-        </p:nvSpPr>
-        <p:spPr>
-          <a:xfrm>
-            <a:off x="1371600" y="4389120"/>
-            <a:ext cx="5212080" cy="1280160"/>
-          </a:xfrm>
-          <a:prstGeom prst="roundRect">
-            <a:avLst>
-              <a:gd name="adj" fmla="val 10714"/>
-            </a:avLst>
-          </a:prstGeom>
-          <a:solidFill>
-            <a:schemeClr val="tx2"/>
-          </a:solidFill>
-          <a:ln/>
-        </p:spPr>
-      </p:sp>
-      <p:sp>
-        <p:nvSpPr>
-          <p:cNvPr id="14" name="Text 12"/>
-          <p:cNvSpPr txBox="1"/>
-          <p:nvPr/>
-        </p:nvSpPr>
-        <p:spPr>
-          <a:xfrm>
-            <a:off x="1600200" y="4572000"/>
-            <a:ext cx="548640" cy="914400"/>
-          </a:xfrm>
-          <a:prstGeom prst="rect">
-            <a:avLst/>
-          </a:prstGeom>
-          <a:noFill/>
-          <a:ln/>
-        </p:spPr>
-        <p:txBody>
-          <a:bodyPr wrap="square" lIns="0" tIns="0" rIns="0" bIns="0" rtlCol="0" anchor="ctr"/>
-          <a:lstStyle/>
-          <a:p>
-            <a:pPr indent="0" marL="0">
-              <a:buNone/>
-            </a:pPr>
-            <a:r>
-              <a:rPr lang="en-US" sz="4000" b="1" dirty="0">
-                <a:solidFill>
-                  <a:schemeClr val="accent1"/>
-                </a:solidFill>
-                <a:latin typeface="Cambria" pitchFamily="34" charset="0"/>
-                <a:ea typeface="Cambria" pitchFamily="34" charset="-122"/>
-                <a:cs typeface="Cambria" pitchFamily="34" charset="-120"/>
-              </a:rPr>
-              <a:t>3</a:t>
-            </a:r>
-            <a:endParaRPr lang="en-US" sz="4000" dirty="0"/>
-          </a:p>
-        </p:txBody>
-      </p:sp>
-      <p:sp>
-        <p:nvSpPr>
-          <p:cNvPr id="15" name="Text 13"/>
-          <p:cNvSpPr txBox="1"/>
-          <p:nvPr/>
-        </p:nvSpPr>
-        <p:spPr>
-          <a:xfrm>
-            <a:off x="2286000" y="4526280"/>
-            <a:ext cx="3657600" cy="457200"/>
-          </a:xfrm>
-          <a:prstGeom prst="rect">
-            <a:avLst/>
-          </a:prstGeom>
-          <a:noFill/>
-          <a:ln/>
-        </p:spPr>
-        <p:txBody>
-          <a:bodyPr wrap="square" lIns="0" tIns="0" rIns="0" bIns="0" rtlCol="0" anchor="ctr"/>
-          <a:lstStyle/>
-          <a:p>
-            <a:pPr indent="0" marL="0">
-              <a:buNone/>
-            </a:pPr>
-            <a:r>
-              <a:rPr lang="en-US" sz="2000" b="1" dirty="0">
-                <a:solidFill>
-                  <a:schemeClr val="bg1"/>
-                </a:solidFill>
-              </a:rPr>
-              <a:t>Organisation</a:t>
-            </a:r>
-            <a:endParaRPr lang="en-US" sz="2000" dirty="0"/>
-          </a:p>
-        </p:txBody>
-      </p:sp>
-      <p:sp>
-        <p:nvSpPr>
-          <p:cNvPr id="16" name="Text 14"/>
-          <p:cNvSpPr txBox="1"/>
-          <p:nvPr/>
-        </p:nvSpPr>
-        <p:spPr>
-          <a:xfrm>
-            <a:off x="2286000" y="4956048"/>
-            <a:ext cx="4023360" cy="320040"/>
-          </a:xfrm>
-          <a:prstGeom prst="rect">
-            <a:avLst/>
-          </a:prstGeom>
-          <a:noFill/>
-          <a:ln/>
-        </p:spPr>
-        <p:txBody>
-          <a:bodyPr wrap="square" lIns="0" tIns="0" rIns="0" bIns="0" rtlCol="0" anchor="ctr"/>
-          <a:lstStyle/>
-          <a:p>
-            <a:pPr indent="0" marL="0">
-              <a:buNone/>
-            </a:pPr>
-            <a:r>
-              <a:rPr lang="en-US" sz="1500" dirty="0">
-                <a:solidFill>
-                  <a:schemeClr val="bg2"/>
-                </a:solidFill>
-              </a:rPr>
-              <a:t>Public-facing tools, decision support</a:t>
-            </a:r>
-            <a:endParaRPr lang="en-US" sz="1500" dirty="0"/>
-          </a:p>
-        </p:txBody>
-      </p:sp>
-      <p:sp>
-        <p:nvSpPr>
-          <p:cNvPr id="17" name="Text 15"/>
-          <p:cNvSpPr txBox="1"/>
-          <p:nvPr/>
-        </p:nvSpPr>
-        <p:spPr>
-          <a:xfrm>
-            <a:off x="2286000" y="5257800"/>
-            <a:ext cx="4023360" cy="320040"/>
-          </a:xfrm>
-          <a:prstGeom prst="rect">
-            <a:avLst/>
-          </a:prstGeom>
-          <a:noFill/>
-          <a:ln/>
-        </p:spPr>
-        <p:txBody>
-          <a:bodyPr wrap="square" lIns="0" tIns="0" rIns="0" bIns="0" rtlCol="0" anchor="ctr"/>
-          <a:lstStyle/>
-          <a:p>
-            <a:pPr indent="0" marL="0">
-              <a:buNone/>
-            </a:pPr>
-            <a:r>
-              <a:rPr lang="en-US" sz="1300" i="1" dirty="0">
-                <a:solidFill>
-                  <a:schemeClr val="accent5"/>
-                </a:solidFill>
-              </a:rPr>
-              <a:t>High: formal approval and assurance</a:t>
-            </a:r>
-            <a:endParaRPr lang="en-US" sz="1300" dirty="0"/>
-          </a:p>
-        </p:txBody>
-      </p:sp>
-      <p:sp>
-        <p:nvSpPr>
-          <p:cNvPr id="18" name="Text 16"/>
-          <p:cNvSpPr txBox="1"/>
-          <p:nvPr/>
-        </p:nvSpPr>
-        <p:spPr>
-          <a:xfrm>
-            <a:off x="7223760" y="1463040"/>
-            <a:ext cx="4389120" cy="457200"/>
-          </a:xfrm>
-          <a:prstGeom prst="rect">
-            <a:avLst/>
-          </a:prstGeom>
-          <a:noFill/>
-          <a:ln/>
-        </p:spPr>
-        <p:txBody>
-          <a:bodyPr wrap="square" lIns="0" tIns="0" rIns="0" bIns="0" rtlCol="0" anchor="ctr"/>
-          <a:lstStyle/>
-          <a:p>
-            <a:pPr indent="0" marL="0">
-              <a:buNone/>
-            </a:pPr>
-            <a:r>
-              <a:rPr lang="en-US" sz="2000" b="1" dirty="0">
-                <a:solidFill>
-                  <a:schemeClr val="tx2"/>
-                </a:solidFill>
-              </a:rPr>
-              <a:t>Manage AI like a new employee</a:t>
-            </a:r>
-            <a:endParaRPr lang="en-US" sz="2000" dirty="0"/>
-          </a:p>
-        </p:txBody>
-      </p:sp>
-      <p:sp>
-        <p:nvSpPr>
-          <p:cNvPr id="19" name="Shape 17"/>
-          <p:cNvSpPr/>
-          <p:nvPr/>
-        </p:nvSpPr>
-        <p:spPr>
-          <a:xfrm>
-            <a:off x="7223760" y="2057400"/>
-            <a:ext cx="594360" cy="594360"/>
-          </a:xfrm>
-          <a:prstGeom prst="ellipse">
-            <a:avLst/>
-          </a:prstGeom>
-          <a:solidFill>
-            <a:schemeClr val="tx2"/>
-          </a:solidFill>
-          <a:ln/>
-        </p:spPr>
-      </p:sp>
       <p:pic>
         <p:nvPicPr>
-          <p:cNvPr id="20" name="Image 0" descr="preencoded.png">    </p:cNvPr>
+          <p:cNvPr id="4" name="Image 0" descr="preencoded.png">    </p:cNvPr>
           <p:cNvPicPr>
             <a:picLocks noChangeAspect="1"/>
           </p:cNvPicPr>
@@ -5007,8 +4065,8 @@
         </p:blipFill>
         <p:spPr>
           <a:xfrm>
-            <a:off x="7370064" y="2203704"/>
-            <a:ext cx="301752" cy="301752"/>
+            <a:off x="731520" y="1618488"/>
+            <a:ext cx="411480" cy="411480"/>
           </a:xfrm>
           <a:prstGeom prst="rect">
             <a:avLst/>
@@ -5017,14 +4075,14 @@
       </p:pic>
       <p:sp>
         <p:nvSpPr>
-          <p:cNvPr id="21" name="Text 18"/>
-          <p:cNvSpPr txBox="1"/>
-          <p:nvPr/>
-        </p:nvSpPr>
-        <p:spPr>
-          <a:xfrm>
-            <a:off x="8001000" y="2011680"/>
-            <a:ext cx="3657600" cy="365760"/>
+          <p:cNvPr id="5" name="Text 2"/>
+          <p:cNvSpPr txBox="1"/>
+          <p:nvPr/>
+        </p:nvSpPr>
+        <p:spPr>
+          <a:xfrm>
+            <a:off x="1280160" y="1554480"/>
+            <a:ext cx="1783080" cy="548640"/>
           </a:xfrm>
           <a:prstGeom prst="rect">
             <a:avLst/>
@@ -5040,76 +4098,78 @@
               <a:buNone/>
             </a:pPr>
             <a:r>
-              <a:rPr lang="en-US" sz="1600" b="1" dirty="0">
+              <a:rPr lang="en-US" sz="1500" b="1" dirty="0">
                 <a:solidFill>
                   <a:schemeClr val="tx2"/>
                 </a:solidFill>
               </a:rPr>
-              <a:t>A job description</a:t>
-            </a:r>
-            <a:endParaRPr lang="en-US" sz="1600" dirty="0"/>
-          </a:p>
-        </p:txBody>
-      </p:sp>
-      <p:sp>
-        <p:nvSpPr>
-          <p:cNvPr id="22" name="Text 19"/>
-          <p:cNvSpPr txBox="1"/>
-          <p:nvPr/>
-        </p:nvSpPr>
-        <p:spPr>
-          <a:xfrm>
-            <a:off x="8001000" y="2350008"/>
-            <a:ext cx="3657600" cy="320040"/>
-          </a:xfrm>
-          <a:prstGeom prst="rect">
-            <a:avLst/>
-          </a:prstGeom>
-          <a:noFill/>
-          <a:ln/>
-        </p:spPr>
-        <p:txBody>
-          <a:bodyPr wrap="square" lIns="0" tIns="0" rIns="0" bIns="0" rtlCol="0" anchor="ctr"/>
-          <a:lstStyle/>
-          <a:p>
-            <a:pPr indent="0" marL="0">
-              <a:buNone/>
-            </a:pPr>
-            <a:r>
-              <a:rPr lang="en-US" sz="1400" dirty="0">
+              <a:t>Business owner</a:t>
+            </a:r>
+            <a:endParaRPr lang="en-US" sz="1500" dirty="0"/>
+          </a:p>
+        </p:txBody>
+      </p:sp>
+      <p:sp>
+        <p:nvSpPr>
+          <p:cNvPr id="6" name="Text 3"/>
+          <p:cNvSpPr txBox="1"/>
+          <p:nvPr/>
+        </p:nvSpPr>
+        <p:spPr>
+          <a:xfrm>
+            <a:off x="731520" y="2194560"/>
+            <a:ext cx="2286000" cy="640080"/>
+          </a:xfrm>
+          <a:prstGeom prst="rect">
+            <a:avLst/>
+          </a:prstGeom>
+          <a:noFill/>
+          <a:ln/>
+        </p:spPr>
+        <p:txBody>
+          <a:bodyPr wrap="square" lIns="0" tIns="0" rIns="0" bIns="0" rtlCol="0" anchor="t"/>
+          <a:lstStyle/>
+          <a:p>
+            <a:pPr indent="0" marL="0">
+              <a:buNone/>
+            </a:pPr>
+            <a:r>
+              <a:rPr lang="en-US" sz="1300" dirty="0">
                 <a:solidFill>
                   <a:schemeClr val="tx1"/>
                 </a:solidFill>
               </a:rPr>
-              <a:t>a clear task, data and limits</a:t>
-            </a:r>
-            <a:endParaRPr lang="en-US" sz="1400" dirty="0"/>
-          </a:p>
-        </p:txBody>
-      </p:sp>
-      <p:sp>
-        <p:nvSpPr>
-          <p:cNvPr id="23" name="Shape 20"/>
+              <a:t>sets priorities and measures value</a:t>
+            </a:r>
+            <a:endParaRPr lang="en-US" sz="1300" dirty="0"/>
+          </a:p>
+        </p:txBody>
+      </p:sp>
+      <p:sp>
+        <p:nvSpPr>
+          <p:cNvPr id="7" name="Shape 4"/>
           <p:cNvSpPr/>
           <p:nvPr/>
         </p:nvSpPr>
         <p:spPr>
           <a:xfrm>
-            <a:off x="7223760" y="2926080"/>
-            <a:ext cx="594360" cy="594360"/>
-          </a:xfrm>
-          <a:prstGeom prst="ellipse">
-            <a:avLst/>
+            <a:off x="3337560" y="1417320"/>
+            <a:ext cx="2606040" cy="1508760"/>
+          </a:xfrm>
+          <a:prstGeom prst="roundRect">
+            <a:avLst>
+              <a:gd name="adj" fmla="val 9091"/>
+            </a:avLst>
           </a:prstGeom>
           <a:solidFill>
-            <a:schemeClr val="tx2"/>
+            <a:schemeClr val="bg2"/>
           </a:solidFill>
           <a:ln/>
         </p:spPr>
       </p:sp>
       <p:pic>
         <p:nvPicPr>
-          <p:cNvPr id="24" name="Image 1" descr="preencoded.png">    </p:cNvPr>
+          <p:cNvPr id="8" name="Image 1" descr="preencoded.png">    </p:cNvPr>
           <p:cNvPicPr>
             <a:picLocks noChangeAspect="1"/>
           </p:cNvPicPr>
@@ -5123,8 +4183,8 @@
         </p:blipFill>
         <p:spPr>
           <a:xfrm>
-            <a:off x="7370064" y="3072384"/>
-            <a:ext cx="301752" cy="301752"/>
+            <a:off x="3520440" y="1618488"/>
+            <a:ext cx="411480" cy="411480"/>
           </a:xfrm>
           <a:prstGeom prst="rect">
             <a:avLst/>
@@ -5133,14 +4193,14 @@
       </p:pic>
       <p:sp>
         <p:nvSpPr>
-          <p:cNvPr id="25" name="Text 21"/>
-          <p:cNvSpPr txBox="1"/>
-          <p:nvPr/>
-        </p:nvSpPr>
-        <p:spPr>
-          <a:xfrm>
-            <a:off x="8001000" y="2880360"/>
-            <a:ext cx="3657600" cy="365760"/>
+          <p:cNvPr id="9" name="Text 5"/>
+          <p:cNvSpPr txBox="1"/>
+          <p:nvPr/>
+        </p:nvSpPr>
+        <p:spPr>
+          <a:xfrm>
+            <a:off x="4069080" y="1554480"/>
+            <a:ext cx="1783080" cy="548640"/>
           </a:xfrm>
           <a:prstGeom prst="rect">
             <a:avLst/>
@@ -5156,76 +4216,78 @@
               <a:buNone/>
             </a:pPr>
             <a:r>
-              <a:rPr lang="en-US" sz="1600" b="1" dirty="0">
+              <a:rPr lang="en-US" sz="1500" b="1" dirty="0">
                 <a:solidFill>
                   <a:schemeClr val="tx2"/>
                 </a:solidFill>
               </a:rPr>
-              <a:t>A trial period</a:t>
-            </a:r>
-            <a:endParaRPr lang="en-US" sz="1600" dirty="0"/>
-          </a:p>
-        </p:txBody>
-      </p:sp>
-      <p:sp>
-        <p:nvSpPr>
-          <p:cNvPr id="26" name="Text 22"/>
-          <p:cNvSpPr txBox="1"/>
-          <p:nvPr/>
-        </p:nvSpPr>
-        <p:spPr>
-          <a:xfrm>
-            <a:off x="8001000" y="3218688"/>
-            <a:ext cx="3657600" cy="320040"/>
-          </a:xfrm>
-          <a:prstGeom prst="rect">
-            <a:avLst/>
-          </a:prstGeom>
-          <a:noFill/>
-          <a:ln/>
-        </p:spPr>
-        <p:txBody>
-          <a:bodyPr wrap="square" lIns="0" tIns="0" rIns="0" bIns="0" rtlCol="0" anchor="ctr"/>
-          <a:lstStyle/>
-          <a:p>
-            <a:pPr indent="0" marL="0">
-              <a:buNone/>
-            </a:pPr>
-            <a:r>
-              <a:rPr lang="en-US" sz="1400" dirty="0">
+              <a:t>Regulatory experts</a:t>
+            </a:r>
+            <a:endParaRPr lang="en-US" sz="1500" dirty="0"/>
+          </a:p>
+        </p:txBody>
+      </p:sp>
+      <p:sp>
+        <p:nvSpPr>
+          <p:cNvPr id="10" name="Text 6"/>
+          <p:cNvSpPr txBox="1"/>
+          <p:nvPr/>
+        </p:nvSpPr>
+        <p:spPr>
+          <a:xfrm>
+            <a:off x="3520440" y="2194560"/>
+            <a:ext cx="2286000" cy="640080"/>
+          </a:xfrm>
+          <a:prstGeom prst="rect">
+            <a:avLst/>
+          </a:prstGeom>
+          <a:noFill/>
+          <a:ln/>
+        </p:spPr>
+        <p:txBody>
+          <a:bodyPr wrap="square" lIns="0" tIns="0" rIns="0" bIns="0" rtlCol="0" anchor="t"/>
+          <a:lstStyle/>
+          <a:p>
+            <a:pPr indent="0" marL="0">
+              <a:buNone/>
+            </a:pPr>
+            <a:r>
+              <a:rPr lang="en-US" sz="1300" dirty="0">
                 <a:solidFill>
                   <a:schemeClr val="tx1"/>
                 </a:solidFill>
               </a:rPr>
-              <a:t>a limited roll-out first</a:t>
-            </a:r>
-            <a:endParaRPr lang="en-US" sz="1400" dirty="0"/>
-          </a:p>
-        </p:txBody>
-      </p:sp>
-      <p:sp>
-        <p:nvSpPr>
-          <p:cNvPr id="27" name="Shape 23"/>
+              <a:t>define what “right” looks like</a:t>
+            </a:r>
+            <a:endParaRPr lang="en-US" sz="1300" dirty="0"/>
+          </a:p>
+        </p:txBody>
+      </p:sp>
+      <p:sp>
+        <p:nvSpPr>
+          <p:cNvPr id="11" name="Shape 7"/>
           <p:cNvSpPr/>
           <p:nvPr/>
         </p:nvSpPr>
         <p:spPr>
           <a:xfrm>
-            <a:off x="7223760" y="3794760"/>
-            <a:ext cx="594360" cy="594360"/>
-          </a:xfrm>
-          <a:prstGeom prst="ellipse">
-            <a:avLst/>
+            <a:off x="6126480" y="1417320"/>
+            <a:ext cx="2606040" cy="1508760"/>
+          </a:xfrm>
+          <a:prstGeom prst="roundRect">
+            <a:avLst>
+              <a:gd name="adj" fmla="val 9091"/>
+            </a:avLst>
           </a:prstGeom>
           <a:solidFill>
-            <a:schemeClr val="tx2"/>
+            <a:schemeClr val="bg2"/>
           </a:solidFill>
           <a:ln/>
         </p:spPr>
       </p:sp>
       <p:pic>
         <p:nvPicPr>
-          <p:cNvPr id="28" name="Image 2" descr="preencoded.png">    </p:cNvPr>
+          <p:cNvPr id="12" name="Image 2" descr="preencoded.png">    </p:cNvPr>
           <p:cNvPicPr>
             <a:picLocks noChangeAspect="1"/>
           </p:cNvPicPr>
@@ -5239,8 +4301,8 @@
         </p:blipFill>
         <p:spPr>
           <a:xfrm>
-            <a:off x="7370064" y="3941064"/>
-            <a:ext cx="301752" cy="301752"/>
+            <a:off x="6309360" y="1618488"/>
+            <a:ext cx="411480" cy="411480"/>
           </a:xfrm>
           <a:prstGeom prst="rect">
             <a:avLst/>
@@ -5249,14 +4311,14 @@
       </p:pic>
       <p:sp>
         <p:nvSpPr>
-          <p:cNvPr id="29" name="Text 24"/>
-          <p:cNvSpPr txBox="1"/>
-          <p:nvPr/>
-        </p:nvSpPr>
-        <p:spPr>
-          <a:xfrm>
-            <a:off x="8001000" y="3749040"/>
-            <a:ext cx="3657600" cy="365760"/>
+          <p:cNvPr id="13" name="Text 8"/>
+          <p:cNvSpPr txBox="1"/>
+          <p:nvPr/>
+        </p:nvSpPr>
+        <p:spPr>
+          <a:xfrm>
+            <a:off x="6858000" y="1554480"/>
+            <a:ext cx="1783080" cy="548640"/>
           </a:xfrm>
           <a:prstGeom prst="rect">
             <a:avLst/>
@@ -5272,76 +4334,78 @@
               <a:buNone/>
             </a:pPr>
             <a:r>
-              <a:rPr lang="en-US" sz="1600" b="1" dirty="0">
+              <a:rPr lang="en-US" sz="1500" b="1" dirty="0">
                 <a:solidFill>
                   <a:schemeClr val="tx2"/>
                 </a:solidFill>
               </a:rPr>
-              <a:t>Performance reviews</a:t>
-            </a:r>
-            <a:endParaRPr lang="en-US" sz="1600" dirty="0"/>
-          </a:p>
-        </p:txBody>
-      </p:sp>
-      <p:sp>
-        <p:nvSpPr>
-          <p:cNvPr id="30" name="Text 25"/>
-          <p:cNvSpPr txBox="1"/>
-          <p:nvPr/>
-        </p:nvSpPr>
-        <p:spPr>
-          <a:xfrm>
-            <a:off x="8001000" y="4087368"/>
-            <a:ext cx="3657600" cy="320040"/>
-          </a:xfrm>
-          <a:prstGeom prst="rect">
-            <a:avLst/>
-          </a:prstGeom>
-          <a:noFill/>
-          <a:ln/>
-        </p:spPr>
-        <p:txBody>
-          <a:bodyPr wrap="square" lIns="0" tIns="0" rIns="0" bIns="0" rtlCol="0" anchor="ctr"/>
-          <a:lstStyle/>
-          <a:p>
-            <a:pPr indent="0" marL="0">
-              <a:buNone/>
-            </a:pPr>
-            <a:r>
-              <a:rPr lang="en-US" sz="1400" dirty="0">
+              <a:t>Data engineers</a:t>
+            </a:r>
+            <a:endParaRPr lang="en-US" sz="1500" dirty="0"/>
+          </a:p>
+        </p:txBody>
+      </p:sp>
+      <p:sp>
+        <p:nvSpPr>
+          <p:cNvPr id="14" name="Text 9"/>
+          <p:cNvSpPr txBox="1"/>
+          <p:nvPr/>
+        </p:nvSpPr>
+        <p:spPr>
+          <a:xfrm>
+            <a:off x="6309360" y="2194560"/>
+            <a:ext cx="2286000" cy="640080"/>
+          </a:xfrm>
+          <a:prstGeom prst="rect">
+            <a:avLst/>
+          </a:prstGeom>
+          <a:noFill/>
+          <a:ln/>
+        </p:spPr>
+        <p:txBody>
+          <a:bodyPr wrap="square" lIns="0" tIns="0" rIns="0" bIns="0" rtlCol="0" anchor="t"/>
+          <a:lstStyle/>
+          <a:p>
+            <a:pPr indent="0" marL="0">
+              <a:buNone/>
+            </a:pPr>
+            <a:r>
+              <a:rPr lang="en-US" sz="1300" dirty="0">
                 <a:solidFill>
                   <a:schemeClr val="tx1"/>
                 </a:solidFill>
               </a:rPr>
-              <a:t>measured and monitored</a:t>
-            </a:r>
-            <a:endParaRPr lang="en-US" sz="1400" dirty="0"/>
-          </a:p>
-        </p:txBody>
-      </p:sp>
-      <p:sp>
-        <p:nvSpPr>
-          <p:cNvPr id="31" name="Shape 26"/>
+              <a:t>turn the record into reliable data</a:t>
+            </a:r>
+            <a:endParaRPr lang="en-US" sz="1300" dirty="0"/>
+          </a:p>
+        </p:txBody>
+      </p:sp>
+      <p:sp>
+        <p:nvSpPr>
+          <p:cNvPr id="15" name="Shape 10"/>
           <p:cNvSpPr/>
           <p:nvPr/>
         </p:nvSpPr>
         <p:spPr>
           <a:xfrm>
-            <a:off x="7223760" y="4663440"/>
-            <a:ext cx="594360" cy="594360"/>
-          </a:xfrm>
-          <a:prstGeom prst="ellipse">
-            <a:avLst/>
+            <a:off x="8915400" y="1417320"/>
+            <a:ext cx="2606040" cy="1508760"/>
+          </a:xfrm>
+          <a:prstGeom prst="roundRect">
+            <a:avLst>
+              <a:gd name="adj" fmla="val 9091"/>
+            </a:avLst>
           </a:prstGeom>
           <a:solidFill>
-            <a:schemeClr val="tx2"/>
+            <a:schemeClr val="bg2"/>
           </a:solidFill>
           <a:ln/>
         </p:spPr>
       </p:sp>
       <p:pic>
         <p:nvPicPr>
-          <p:cNvPr id="32" name="Image 3" descr="preencoded.png">    </p:cNvPr>
+          <p:cNvPr id="16" name="Image 3" descr="preencoded.png">    </p:cNvPr>
           <p:cNvPicPr>
             <a:picLocks noChangeAspect="1"/>
           </p:cNvPicPr>
@@ -5355,8 +4419,8 @@
         </p:blipFill>
         <p:spPr>
           <a:xfrm>
-            <a:off x="7370064" y="4809744"/>
-            <a:ext cx="301752" cy="301752"/>
+            <a:off x="9098280" y="1618488"/>
+            <a:ext cx="411480" cy="411480"/>
           </a:xfrm>
           <a:prstGeom prst="rect">
             <a:avLst/>
@@ -5365,14 +4429,14 @@
       </p:pic>
       <p:sp>
         <p:nvSpPr>
-          <p:cNvPr id="33" name="Text 27"/>
-          <p:cNvSpPr txBox="1"/>
-          <p:nvPr/>
-        </p:nvSpPr>
-        <p:spPr>
-          <a:xfrm>
-            <a:off x="8001000" y="4617720"/>
-            <a:ext cx="3657600" cy="365760"/>
+          <p:cNvPr id="17" name="Text 11"/>
+          <p:cNvSpPr txBox="1"/>
+          <p:nvPr/>
+        </p:nvSpPr>
+        <p:spPr>
+          <a:xfrm>
+            <a:off x="9646920" y="1554480"/>
+            <a:ext cx="1783080" cy="548640"/>
           </a:xfrm>
           <a:prstGeom prst="rect">
             <a:avLst/>
@@ -5388,12 +4452,556 @@
               <a:buNone/>
             </a:pPr>
             <a:r>
+              <a:rPr lang="en-US" sz="1500" b="1" dirty="0">
+                <a:solidFill>
+                  <a:schemeClr val="tx2"/>
+                </a:solidFill>
+              </a:rPr>
+              <a:t>AI engineers</a:t>
+            </a:r>
+            <a:endParaRPr lang="en-US" sz="1500" dirty="0"/>
+          </a:p>
+        </p:txBody>
+      </p:sp>
+      <p:sp>
+        <p:nvSpPr>
+          <p:cNvPr id="18" name="Text 12"/>
+          <p:cNvSpPr txBox="1"/>
+          <p:nvPr/>
+        </p:nvSpPr>
+        <p:spPr>
+          <a:xfrm>
+            <a:off x="9098280" y="2194560"/>
+            <a:ext cx="2286000" cy="640080"/>
+          </a:xfrm>
+          <a:prstGeom prst="rect">
+            <a:avLst/>
+          </a:prstGeom>
+          <a:noFill/>
+          <a:ln/>
+        </p:spPr>
+        <p:txBody>
+          <a:bodyPr wrap="square" lIns="0" tIns="0" rIns="0" bIns="0" rtlCol="0" anchor="t"/>
+          <a:lstStyle/>
+          <a:p>
+            <a:pPr indent="0" marL="0">
+              <a:buNone/>
+            </a:pPr>
+            <a:r>
+              <a:rPr lang="en-US" sz="1300" dirty="0">
+                <a:solidFill>
+                  <a:schemeClr val="tx1"/>
+                </a:solidFill>
+              </a:rPr>
+              <a:t>build, test and monitor AI tools</a:t>
+            </a:r>
+            <a:endParaRPr lang="en-US" sz="1300" dirty="0"/>
+          </a:p>
+        </p:txBody>
+      </p:sp>
+      <p:sp>
+        <p:nvSpPr>
+          <p:cNvPr id="19" name="Shape 13"/>
+          <p:cNvSpPr/>
+          <p:nvPr/>
+        </p:nvSpPr>
+        <p:spPr>
+          <a:xfrm>
+            <a:off x="548640" y="3108960"/>
+            <a:ext cx="2606040" cy="1508760"/>
+          </a:xfrm>
+          <a:prstGeom prst="roundRect">
+            <a:avLst>
+              <a:gd name="adj" fmla="val 9091"/>
+            </a:avLst>
+          </a:prstGeom>
+          <a:solidFill>
+            <a:schemeClr val="bg2"/>
+          </a:solidFill>
+          <a:ln/>
+        </p:spPr>
+      </p:sp>
+      <p:pic>
+        <p:nvPicPr>
+          <p:cNvPr id="20" name="Image 4" descr="preencoded.png">    </p:cNvPr>
+          <p:cNvPicPr>
+            <a:picLocks noChangeAspect="1"/>
+          </p:cNvPicPr>
+          <p:nvPr/>
+        </p:nvPicPr>
+        <p:blipFill>
+          <a:blip r:embed="rId5"/>
+          <a:stretch>
+            <a:fillRect/>
+          </a:stretch>
+        </p:blipFill>
+        <p:spPr>
+          <a:xfrm>
+            <a:off x="731520" y="3310128"/>
+            <a:ext cx="411480" cy="411480"/>
+          </a:xfrm>
+          <a:prstGeom prst="rect">
+            <a:avLst/>
+          </a:prstGeom>
+        </p:spPr>
+      </p:pic>
+      <p:sp>
+        <p:nvSpPr>
+          <p:cNvPr id="21" name="Text 14"/>
+          <p:cNvSpPr txBox="1"/>
+          <p:nvPr/>
+        </p:nvSpPr>
+        <p:spPr>
+          <a:xfrm>
+            <a:off x="1280160" y="3246120"/>
+            <a:ext cx="1783080" cy="548640"/>
+          </a:xfrm>
+          <a:prstGeom prst="rect">
+            <a:avLst/>
+          </a:prstGeom>
+          <a:noFill/>
+          <a:ln/>
+        </p:spPr>
+        <p:txBody>
+          <a:bodyPr wrap="square" lIns="0" tIns="0" rIns="0" bIns="0" rtlCol="0" anchor="ctr"/>
+          <a:lstStyle/>
+          <a:p>
+            <a:pPr indent="0" marL="0">
+              <a:buNone/>
+            </a:pPr>
+            <a:r>
+              <a:rPr lang="en-US" sz="1500" b="1" dirty="0">
+                <a:solidFill>
+                  <a:schemeClr val="tx2"/>
+                </a:solidFill>
+              </a:rPr>
+              <a:t>Cloud and security</a:t>
+            </a:r>
+            <a:endParaRPr lang="en-US" sz="1500" dirty="0"/>
+          </a:p>
+        </p:txBody>
+      </p:sp>
+      <p:sp>
+        <p:nvSpPr>
+          <p:cNvPr id="22" name="Text 15"/>
+          <p:cNvSpPr txBox="1"/>
+          <p:nvPr/>
+        </p:nvSpPr>
+        <p:spPr>
+          <a:xfrm>
+            <a:off x="731520" y="3886200"/>
+            <a:ext cx="2286000" cy="640080"/>
+          </a:xfrm>
+          <a:prstGeom prst="rect">
+            <a:avLst/>
+          </a:prstGeom>
+          <a:noFill/>
+          <a:ln/>
+        </p:spPr>
+        <p:txBody>
+          <a:bodyPr wrap="square" lIns="0" tIns="0" rIns="0" bIns="0" rtlCol="0" anchor="t"/>
+          <a:lstStyle/>
+          <a:p>
+            <a:pPr indent="0" marL="0">
+              <a:buNone/>
+            </a:pPr>
+            <a:r>
+              <a:rPr lang="en-US" sz="1300" dirty="0">
+                <a:solidFill>
+                  <a:schemeClr val="tx1"/>
+                </a:solidFill>
+              </a:rPr>
+              <a:t>a secure, scalable platform</a:t>
+            </a:r>
+            <a:endParaRPr lang="en-US" sz="1300" dirty="0"/>
+          </a:p>
+        </p:txBody>
+      </p:sp>
+      <p:sp>
+        <p:nvSpPr>
+          <p:cNvPr id="23" name="Shape 16"/>
+          <p:cNvSpPr/>
+          <p:nvPr/>
+        </p:nvSpPr>
+        <p:spPr>
+          <a:xfrm>
+            <a:off x="3337560" y="3108960"/>
+            <a:ext cx="2606040" cy="1508760"/>
+          </a:xfrm>
+          <a:prstGeom prst="roundRect">
+            <a:avLst>
+              <a:gd name="adj" fmla="val 9091"/>
+            </a:avLst>
+          </a:prstGeom>
+          <a:solidFill>
+            <a:schemeClr val="bg2"/>
+          </a:solidFill>
+          <a:ln/>
+        </p:spPr>
+      </p:sp>
+      <p:pic>
+        <p:nvPicPr>
+          <p:cNvPr id="24" name="Image 5" descr="preencoded.png">    </p:cNvPr>
+          <p:cNvPicPr>
+            <a:picLocks noChangeAspect="1"/>
+          </p:cNvPicPr>
+          <p:nvPr/>
+        </p:nvPicPr>
+        <p:blipFill>
+          <a:blip r:embed="rId6"/>
+          <a:stretch>
+            <a:fillRect/>
+          </a:stretch>
+        </p:blipFill>
+        <p:spPr>
+          <a:xfrm>
+            <a:off x="3520440" y="3310128"/>
+            <a:ext cx="411480" cy="411480"/>
+          </a:xfrm>
+          <a:prstGeom prst="rect">
+            <a:avLst/>
+          </a:prstGeom>
+        </p:spPr>
+      </p:pic>
+      <p:sp>
+        <p:nvSpPr>
+          <p:cNvPr id="25" name="Text 17"/>
+          <p:cNvSpPr txBox="1"/>
+          <p:nvPr/>
+        </p:nvSpPr>
+        <p:spPr>
+          <a:xfrm>
+            <a:off x="4069080" y="3246120"/>
+            <a:ext cx="1783080" cy="548640"/>
+          </a:xfrm>
+          <a:prstGeom prst="rect">
+            <a:avLst/>
+          </a:prstGeom>
+          <a:noFill/>
+          <a:ln/>
+        </p:spPr>
+        <p:txBody>
+          <a:bodyPr wrap="square" lIns="0" tIns="0" rIns="0" bIns="0" rtlCol="0" anchor="ctr"/>
+          <a:lstStyle/>
+          <a:p>
+            <a:pPr indent="0" marL="0">
+              <a:buNone/>
+            </a:pPr>
+            <a:r>
+              <a:rPr lang="en-US" sz="1500" b="1" dirty="0">
+                <a:solidFill>
+                  <a:schemeClr val="tx2"/>
+                </a:solidFill>
+              </a:rPr>
+              <a:t>Information management</a:t>
+            </a:r>
+            <a:endParaRPr lang="en-US" sz="1500" dirty="0"/>
+          </a:p>
+        </p:txBody>
+      </p:sp>
+      <p:sp>
+        <p:nvSpPr>
+          <p:cNvPr id="26" name="Text 18"/>
+          <p:cNvSpPr txBox="1"/>
+          <p:nvPr/>
+        </p:nvSpPr>
+        <p:spPr>
+          <a:xfrm>
+            <a:off x="3520440" y="3886200"/>
+            <a:ext cx="2286000" cy="640080"/>
+          </a:xfrm>
+          <a:prstGeom prst="rect">
+            <a:avLst/>
+          </a:prstGeom>
+          <a:noFill/>
+          <a:ln/>
+        </p:spPr>
+        <p:txBody>
+          <a:bodyPr wrap="square" lIns="0" tIns="0" rIns="0" bIns="0" rtlCol="0" anchor="t"/>
+          <a:lstStyle/>
+          <a:p>
+            <a:pPr indent="0" marL="0">
+              <a:buNone/>
+            </a:pPr>
+            <a:r>
+              <a:rPr lang="en-US" sz="1300" dirty="0">
+                <a:solidFill>
+                  <a:schemeClr val="tx1"/>
+                </a:solidFill>
+              </a:rPr>
+              <a:t>records, fingerprints, retention</a:t>
+            </a:r>
+            <a:endParaRPr lang="en-US" sz="1300" dirty="0"/>
+          </a:p>
+        </p:txBody>
+      </p:sp>
+      <p:sp>
+        <p:nvSpPr>
+          <p:cNvPr id="27" name="Shape 19"/>
+          <p:cNvSpPr/>
+          <p:nvPr/>
+        </p:nvSpPr>
+        <p:spPr>
+          <a:xfrm>
+            <a:off x="6126480" y="3108960"/>
+            <a:ext cx="2606040" cy="1508760"/>
+          </a:xfrm>
+          <a:prstGeom prst="roundRect">
+            <a:avLst>
+              <a:gd name="adj" fmla="val 9091"/>
+            </a:avLst>
+          </a:prstGeom>
+          <a:solidFill>
+            <a:schemeClr val="bg2"/>
+          </a:solidFill>
+          <a:ln/>
+        </p:spPr>
+      </p:sp>
+      <p:pic>
+        <p:nvPicPr>
+          <p:cNvPr id="28" name="Image 6" descr="preencoded.png">    </p:cNvPr>
+          <p:cNvPicPr>
+            <a:picLocks noChangeAspect="1"/>
+          </p:cNvPicPr>
+          <p:nvPr/>
+        </p:nvPicPr>
+        <p:blipFill>
+          <a:blip r:embed="rId7"/>
+          <a:stretch>
+            <a:fillRect/>
+          </a:stretch>
+        </p:blipFill>
+        <p:spPr>
+          <a:xfrm>
+            <a:off x="6309360" y="3310128"/>
+            <a:ext cx="411480" cy="411480"/>
+          </a:xfrm>
+          <a:prstGeom prst="rect">
+            <a:avLst/>
+          </a:prstGeom>
+        </p:spPr>
+      </p:pic>
+      <p:sp>
+        <p:nvSpPr>
+          <p:cNvPr id="29" name="Text 20"/>
+          <p:cNvSpPr txBox="1"/>
+          <p:nvPr/>
+        </p:nvSpPr>
+        <p:spPr>
+          <a:xfrm>
+            <a:off x="6858000" y="3246120"/>
+            <a:ext cx="1783080" cy="548640"/>
+          </a:xfrm>
+          <a:prstGeom prst="rect">
+            <a:avLst/>
+          </a:prstGeom>
+          <a:noFill/>
+          <a:ln/>
+        </p:spPr>
+        <p:txBody>
+          <a:bodyPr wrap="square" lIns="0" tIns="0" rIns="0" bIns="0" rtlCol="0" anchor="ctr"/>
+          <a:lstStyle/>
+          <a:p>
+            <a:pPr indent="0" marL="0">
+              <a:buNone/>
+            </a:pPr>
+            <a:r>
+              <a:rPr lang="en-US" sz="1500" b="1" dirty="0">
+                <a:solidFill>
+                  <a:schemeClr val="tx2"/>
+                </a:solidFill>
+              </a:rPr>
+              <a:t>Privacy, legal, ethics</a:t>
+            </a:r>
+            <a:endParaRPr lang="en-US" sz="1500" dirty="0"/>
+          </a:p>
+        </p:txBody>
+      </p:sp>
+      <p:sp>
+        <p:nvSpPr>
+          <p:cNvPr id="30" name="Text 21"/>
+          <p:cNvSpPr txBox="1"/>
+          <p:nvPr/>
+        </p:nvSpPr>
+        <p:spPr>
+          <a:xfrm>
+            <a:off x="6309360" y="3886200"/>
+            <a:ext cx="2286000" cy="640080"/>
+          </a:xfrm>
+          <a:prstGeom prst="rect">
+            <a:avLst/>
+          </a:prstGeom>
+          <a:noFill/>
+          <a:ln/>
+        </p:spPr>
+        <p:txBody>
+          <a:bodyPr wrap="square" lIns="0" tIns="0" rIns="0" bIns="0" rtlCol="0" anchor="t"/>
+          <a:lstStyle/>
+          <a:p>
+            <a:pPr indent="0" marL="0">
+              <a:buNone/>
+            </a:pPr>
+            <a:r>
+              <a:rPr lang="en-US" sz="1300" dirty="0">
+                <a:solidFill>
+                  <a:schemeClr val="tx1"/>
+                </a:solidFill>
+              </a:rPr>
+              <a:t>responsible-AI rules and reviews</a:t>
+            </a:r>
+            <a:endParaRPr lang="en-US" sz="1300" dirty="0"/>
+          </a:p>
+        </p:txBody>
+      </p:sp>
+      <p:sp>
+        <p:nvSpPr>
+          <p:cNvPr id="31" name="Shape 22"/>
+          <p:cNvSpPr/>
+          <p:nvPr/>
+        </p:nvSpPr>
+        <p:spPr>
+          <a:xfrm>
+            <a:off x="8915400" y="3108960"/>
+            <a:ext cx="2606040" cy="1508760"/>
+          </a:xfrm>
+          <a:prstGeom prst="roundRect">
+            <a:avLst>
+              <a:gd name="adj" fmla="val 9091"/>
+            </a:avLst>
+          </a:prstGeom>
+          <a:solidFill>
+            <a:schemeClr val="bg2"/>
+          </a:solidFill>
+          <a:ln/>
+        </p:spPr>
+      </p:sp>
+      <p:pic>
+        <p:nvPicPr>
+          <p:cNvPr id="32" name="Image 7" descr="preencoded.png">    </p:cNvPr>
+          <p:cNvPicPr>
+            <a:picLocks noChangeAspect="1"/>
+          </p:cNvPicPr>
+          <p:nvPr/>
+        </p:nvPicPr>
+        <p:blipFill>
+          <a:blip r:embed="rId8"/>
+          <a:stretch>
+            <a:fillRect/>
+          </a:stretch>
+        </p:blipFill>
+        <p:spPr>
+          <a:xfrm>
+            <a:off x="9098280" y="3310128"/>
+            <a:ext cx="411480" cy="411480"/>
+          </a:xfrm>
+          <a:prstGeom prst="rect">
+            <a:avLst/>
+          </a:prstGeom>
+        </p:spPr>
+      </p:pic>
+      <p:sp>
+        <p:nvSpPr>
+          <p:cNvPr id="33" name="Text 23"/>
+          <p:cNvSpPr txBox="1"/>
+          <p:nvPr/>
+        </p:nvSpPr>
+        <p:spPr>
+          <a:xfrm>
+            <a:off x="9646920" y="3246120"/>
+            <a:ext cx="1783080" cy="548640"/>
+          </a:xfrm>
+          <a:prstGeom prst="rect">
+            <a:avLst/>
+          </a:prstGeom>
+          <a:noFill/>
+          <a:ln/>
+        </p:spPr>
+        <p:txBody>
+          <a:bodyPr wrap="square" lIns="0" tIns="0" rIns="0" bIns="0" rtlCol="0" anchor="ctr"/>
+          <a:lstStyle/>
+          <a:p>
+            <a:pPr indent="0" marL="0">
+              <a:buNone/>
+            </a:pPr>
+            <a:r>
+              <a:rPr lang="en-US" sz="1500" b="1" dirty="0">
+                <a:solidFill>
+                  <a:schemeClr val="tx2"/>
+                </a:solidFill>
+              </a:rPr>
+              <a:t>Change and training</a:t>
+            </a:r>
+            <a:endParaRPr lang="en-US" sz="1500" dirty="0"/>
+          </a:p>
+        </p:txBody>
+      </p:sp>
+      <p:sp>
+        <p:nvSpPr>
+          <p:cNvPr id="34" name="Text 24"/>
+          <p:cNvSpPr txBox="1"/>
+          <p:nvPr/>
+        </p:nvSpPr>
+        <p:spPr>
+          <a:xfrm>
+            <a:off x="9098280" y="3886200"/>
+            <a:ext cx="2286000" cy="640080"/>
+          </a:xfrm>
+          <a:prstGeom prst="rect">
+            <a:avLst/>
+          </a:prstGeom>
+          <a:noFill/>
+          <a:ln/>
+        </p:spPr>
+        <p:txBody>
+          <a:bodyPr wrap="square" lIns="0" tIns="0" rIns="0" bIns="0" rtlCol="0" anchor="t"/>
+          <a:lstStyle/>
+          <a:p>
+            <a:pPr indent="0" marL="0">
+              <a:buNone/>
+            </a:pPr>
+            <a:r>
+              <a:rPr lang="en-US" sz="1300" dirty="0">
+                <a:solidFill>
+                  <a:schemeClr val="tx1"/>
+                </a:solidFill>
+              </a:rPr>
+              <a:t>help staff and filers adopt it</a:t>
+            </a:r>
+            <a:endParaRPr lang="en-US" sz="1300" dirty="0"/>
+          </a:p>
+        </p:txBody>
+      </p:sp>
+      <p:sp>
+        <p:nvSpPr>
+          <p:cNvPr id="35" name="Text 25"/>
+          <p:cNvSpPr txBox="1"/>
+          <p:nvPr/>
+        </p:nvSpPr>
+        <p:spPr>
+          <a:xfrm>
+            <a:off x="548640" y="4892040"/>
+            <a:ext cx="11064240" cy="365760"/>
+          </a:xfrm>
+          <a:prstGeom prst="rect">
+            <a:avLst/>
+          </a:prstGeom>
+          <a:noFill/>
+          <a:ln/>
+        </p:spPr>
+        <p:txBody>
+          <a:bodyPr wrap="square" lIns="0" tIns="0" rIns="0" bIns="0" rtlCol="0" anchor="ctr"/>
+          <a:lstStyle/>
+          <a:p>
+            <a:pPr indent="0" marL="0">
+              <a:buNone/>
+            </a:pPr>
+            <a:r>
               <a:rPr lang="en-US" sz="1600" b="1" dirty="0">
                 <a:solidFill>
-                  <a:schemeClr val="tx2"/>
-                </a:solidFill>
-              </a:rPr>
-              <a:t>Can be switched off</a:t>
+                  <a:schemeClr val="accent1"/>
+                </a:solidFill>
+              </a:rPr>
+              <a:t>Others are already moving</a:t>
             </a:r>
             <a:endParaRPr lang="en-US" sz="1600" dirty="0"/>
           </a:p>
@@ -5401,109 +5009,92 @@
       </p:sp>
       <p:sp>
         <p:nvSpPr>
-          <p:cNvPr id="34" name="Text 28"/>
-          <p:cNvSpPr txBox="1"/>
-          <p:nvPr/>
-        </p:nvSpPr>
-        <p:spPr>
-          <a:xfrm>
-            <a:off x="8001000" y="4956048"/>
-            <a:ext cx="3657600" cy="320040"/>
-          </a:xfrm>
-          <a:prstGeom prst="rect">
-            <a:avLst/>
-          </a:prstGeom>
-          <a:noFill/>
-          <a:ln/>
-        </p:spPr>
-        <p:txBody>
-          <a:bodyPr wrap="square" lIns="0" tIns="0" rIns="0" bIns="0" rtlCol="0" anchor="ctr"/>
-          <a:lstStyle/>
-          <a:p>
-            <a:pPr indent="0" marL="0">
-              <a:buNone/>
-            </a:pPr>
-            <a:r>
-              <a:rPr lang="en-US" sz="1400" dirty="0">
+          <p:cNvPr id="36" name="Text 26"/>
+          <p:cNvSpPr txBox="1"/>
+          <p:nvPr/>
+        </p:nvSpPr>
+        <p:spPr>
+          <a:xfrm>
+            <a:off x="548640" y="5257800"/>
+            <a:ext cx="11064240" cy="914400"/>
+          </a:xfrm>
+          <a:prstGeom prst="rect">
+            <a:avLst/>
+          </a:prstGeom>
+          <a:noFill/>
+          <a:ln/>
+        </p:spPr>
+        <p:txBody>
+          <a:bodyPr wrap="square" lIns="0" tIns="0" rIns="0" bIns="0" rtlCol="0" anchor="t"/>
+          <a:lstStyle/>
+          <a:p>
+            <a:pPr indent="0" marL="0">
+              <a:buNone/>
+            </a:pPr>
+            <a:r>
+              <a:rPr lang="en-US" sz="1300" b="1" dirty="0">
                 <a:solidFill>
                   <a:schemeClr val="tx1"/>
                 </a:solidFill>
               </a:rPr>
-              <a:t>a person stays accountable</a:t>
-            </a:r>
-            <a:endParaRPr lang="en-US" sz="1400" dirty="0"/>
-          </a:p>
-        </p:txBody>
-      </p:sp>
-      <p:sp>
-        <p:nvSpPr>
-          <p:cNvPr id="35" name="Text 29"/>
-          <p:cNvSpPr txBox="1"/>
-          <p:nvPr/>
-        </p:nvSpPr>
-        <p:spPr>
-          <a:xfrm>
-            <a:off x="7223760" y="5577840"/>
-            <a:ext cx="4389120" cy="685800"/>
-          </a:xfrm>
-          <a:prstGeom prst="rect">
-            <a:avLst/>
-          </a:prstGeom>
-          <a:noFill/>
-          <a:ln/>
-        </p:spPr>
-        <p:txBody>
-          <a:bodyPr wrap="square" lIns="0" tIns="0" rIns="0" bIns="0" rtlCol="0" anchor="t"/>
-          <a:lstStyle/>
-          <a:p>
-            <a:pPr indent="0" marL="0">
-              <a:buNone/>
-            </a:pPr>
-            <a:r>
-              <a:rPr lang="en-US" sz="1300" i="1" dirty="0">
-                <a:solidFill>
-                  <a:schemeClr val="accent3"/>
-                </a:solidFill>
-              </a:rPr>
-              <a:t>Train every level: all staff to use AI safely, team leads to build it into their work, executives to weigh risk and value.</a:t>
+              <a:t>BC Energy Regulator</a:t>
+            </a:r>
+            <a:pPr indent="0" marL="0">
+              <a:buNone/>
+            </a:pPr>
+            <a:r>
+              <a:rPr lang="en-US" sz="1300" dirty="0">
+                <a:solidFill>
+                  <a:schemeClr val="tx1"/>
+                </a:solidFill>
+              </a:rPr>
+              <a:t> is expanding an AI permit assistant on its cloud platform (2026).   </a:t>
+            </a:r>
+            <a:pPr indent="0" marL="0">
+              <a:buNone/>
+            </a:pPr>
+            <a:r>
+              <a:rPr lang="en-US" sz="1300" b="1" dirty="0">
+                <a:solidFill>
+                  <a:schemeClr val="tx1"/>
+                </a:solidFill>
+              </a:rPr>
+              <a:t>Alberta Energy Regulator</a:t>
+            </a:r>
+            <a:pPr indent="0" marL="0">
+              <a:buNone/>
+            </a:pPr>
+            <a:r>
+              <a:rPr lang="en-US" sz="1300" dirty="0">
+                <a:solidFill>
+                  <a:schemeClr val="tx1"/>
+                </a:solidFill>
+              </a:rPr>
+              <a:t> built OneStop: most routine applications approved automatically.   </a:t>
+            </a:r>
+            <a:pPr indent="0" marL="0">
+              <a:buNone/>
+            </a:pPr>
+            <a:r>
+              <a:rPr lang="en-US" sz="1300" b="1" dirty="0">
+                <a:solidFill>
+                  <a:schemeClr val="tx1"/>
+                </a:solidFill>
+              </a:rPr>
+              <a:t>Government of Canada</a:t>
+            </a:r>
+            <a:pPr indent="0" marL="0">
+              <a:buNone/>
+            </a:pPr>
+            <a:r>
+              <a:rPr lang="en-US" sz="1300" dirty="0">
+                <a:solidFill>
+                  <a:schemeClr val="tx1"/>
+                </a:solidFill>
+              </a:rPr>
+              <a:t> AI Strategy 2025–27: an AI Centre of Expertise and responsible-AI rules.</a:t>
             </a:r>
             <a:endParaRPr lang="en-US" sz="1300" dirty="0"/>
-          </a:p>
-        </p:txBody>
-      </p:sp>
-      <p:sp>
-        <p:nvSpPr>
-          <p:cNvPr id="36" name="Text 30"/>
-          <p:cNvSpPr txBox="1"/>
-          <p:nvPr/>
-        </p:nvSpPr>
-        <p:spPr>
-          <a:xfrm>
-            <a:off x="548640" y="5989320"/>
-            <a:ext cx="6400800" cy="320040"/>
-          </a:xfrm>
-          <a:prstGeom prst="rect">
-            <a:avLst/>
-          </a:prstGeom>
-          <a:noFill/>
-          <a:ln/>
-        </p:spPr>
-        <p:txBody>
-          <a:bodyPr wrap="square" lIns="0" tIns="0" rIns="0" bIns="0" rtlCol="0" anchor="ctr"/>
-          <a:lstStyle/>
-          <a:p>
-            <a:pPr indent="0" marL="0">
-              <a:buNone/>
-            </a:pPr>
-            <a:r>
-              <a:rPr lang="en-US" sz="1100" dirty="0">
-                <a:solidFill>
-                  <a:schemeClr val="accent3"/>
-                </a:solidFill>
-              </a:rPr>
-              <a:t>Adapted from the UK Local Government Association’s playbook for agentic AI (2026).</a:t>
-            </a:r>
-            <a:endParaRPr lang="en-US" sz="1100" dirty="0"/>
           </a:p>
         </p:txBody>
       </p:sp>
@@ -5606,10 +5197,10 @@
             <a:r>
               <a:rPr lang="en-US" sz="3400" b="1" dirty="0">
                 <a:solidFill>
-                  <a:schemeClr val="bg1"/>
-                </a:solidFill>
-              </a:rPr>
-              <a:t>Lessons for every part of the organization</a:t>
+                  <a:schemeClr val="tx2"/>
+                </a:solidFill>
+              </a:rPr>
+              <a:t>Start small, scale with care</a:t>
             </a:r>
             <a:endParaRPr lang="en-US" sz="3400" dirty="0"/>
           </a:p>
@@ -5617,324 +5208,316 @@
       </p:sp>
       <p:sp>
         <p:nvSpPr>
-          <p:cNvPr id="3" name="Text 1"/>
-          <p:cNvSpPr txBox="1"/>
-          <p:nvPr/>
-        </p:nvSpPr>
-        <p:spPr>
-          <a:xfrm>
-            <a:off x="548640" y="1417320"/>
-            <a:ext cx="5394960" cy="502920"/>
-          </a:xfrm>
-          <a:prstGeom prst="rect">
-            <a:avLst/>
-          </a:prstGeom>
-          <a:noFill/>
-          <a:ln/>
-        </p:spPr>
-        <p:txBody>
-          <a:bodyPr wrap="square" lIns="0" tIns="0" rIns="0" bIns="0" rtlCol="0" anchor="ctr"/>
-          <a:lstStyle/>
-          <a:p>
-            <a:pPr indent="0" marL="0">
-              <a:buNone/>
-            </a:pPr>
-            <a:r>
-              <a:rPr lang="en-US" sz="2100" b="1" dirty="0">
-                <a:solidFill>
-                  <a:schemeClr val="accent1"/>
-                </a:solidFill>
-              </a:rPr>
-              <a:t>AI is only as good as its data</a:t>
-            </a:r>
-            <a:endParaRPr lang="en-US" sz="2100" dirty="0"/>
-          </a:p>
-        </p:txBody>
-      </p:sp>
-      <p:sp>
-        <p:nvSpPr>
-          <p:cNvPr id="4" name="Text 2"/>
-          <p:cNvSpPr txBox="1"/>
-          <p:nvPr/>
-        </p:nvSpPr>
-        <p:spPr>
-          <a:xfrm>
-            <a:off x="548640" y="1920240"/>
-            <a:ext cx="5394960" cy="548640"/>
-          </a:xfrm>
-          <a:prstGeom prst="rect">
-            <a:avLst/>
-          </a:prstGeom>
-          <a:noFill/>
-          <a:ln/>
-        </p:spPr>
-        <p:txBody>
-          <a:bodyPr wrap="square" lIns="0" tIns="0" rIns="0" bIns="0" rtlCol="0" anchor="t"/>
-          <a:lstStyle/>
-          <a:p>
-            <a:pPr indent="0" marL="0">
-              <a:buNone/>
-            </a:pPr>
-            <a:r>
-              <a:rPr lang="en-US" sz="1600" dirty="0">
-                <a:solidFill>
-                  <a:schemeClr val="bg2"/>
-                </a:solidFill>
-              </a:rPr>
-              <a:t>Fix data where it is created, not after.</a:t>
-            </a:r>
-            <a:endParaRPr lang="en-US" sz="1600" dirty="0"/>
-          </a:p>
-        </p:txBody>
-      </p:sp>
-      <p:sp>
-        <p:nvSpPr>
-          <p:cNvPr id="5" name="Text 3"/>
-          <p:cNvSpPr txBox="1"/>
-          <p:nvPr/>
-        </p:nvSpPr>
-        <p:spPr>
-          <a:xfrm>
-            <a:off x="6217920" y="1417320"/>
-            <a:ext cx="5394960" cy="502920"/>
-          </a:xfrm>
-          <a:prstGeom prst="rect">
-            <a:avLst/>
-          </a:prstGeom>
-          <a:noFill/>
-          <a:ln/>
-        </p:spPr>
-        <p:txBody>
-          <a:bodyPr wrap="square" lIns="0" tIns="0" rIns="0" bIns="0" rtlCol="0" anchor="ctr"/>
-          <a:lstStyle/>
-          <a:p>
-            <a:pPr indent="0" marL="0">
-              <a:buNone/>
-            </a:pPr>
-            <a:r>
-              <a:rPr lang="en-US" sz="2100" b="1" dirty="0">
-                <a:solidFill>
-                  <a:schemeClr val="accent1"/>
-                </a:solidFill>
-              </a:rPr>
-              <a:t>Failures are silent</a:t>
-            </a:r>
-            <a:endParaRPr lang="en-US" sz="2100" dirty="0"/>
-          </a:p>
-        </p:txBody>
-      </p:sp>
-      <p:sp>
-        <p:nvSpPr>
-          <p:cNvPr id="6" name="Text 4"/>
-          <p:cNvSpPr txBox="1"/>
-          <p:nvPr/>
-        </p:nvSpPr>
-        <p:spPr>
-          <a:xfrm>
-            <a:off x="6217920" y="1920240"/>
-            <a:ext cx="5394960" cy="548640"/>
-          </a:xfrm>
-          <a:prstGeom prst="rect">
-            <a:avLst/>
-          </a:prstGeom>
-          <a:noFill/>
-          <a:ln/>
-        </p:spPr>
-        <p:txBody>
-          <a:bodyPr wrap="square" lIns="0" tIns="0" rIns="0" bIns="0" rtlCol="0" anchor="t"/>
-          <a:lstStyle/>
-          <a:p>
-            <a:pPr indent="0" marL="0">
-              <a:buNone/>
-            </a:pPr>
-            <a:r>
-              <a:rPr lang="en-US" sz="1600" dirty="0">
-                <a:solidFill>
-                  <a:schemeClr val="bg2"/>
-                </a:solidFill>
-              </a:rPr>
-              <a:t>A system can look finished and be wrong. Ask for proof.</a:t>
-            </a:r>
-            <a:endParaRPr lang="en-US" sz="1600" dirty="0"/>
-          </a:p>
-        </p:txBody>
-      </p:sp>
-      <p:sp>
-        <p:nvSpPr>
-          <p:cNvPr id="7" name="Text 5"/>
-          <p:cNvSpPr txBox="1"/>
-          <p:nvPr/>
-        </p:nvSpPr>
-        <p:spPr>
-          <a:xfrm>
-            <a:off x="548640" y="2651760"/>
-            <a:ext cx="5394960" cy="502920"/>
-          </a:xfrm>
-          <a:prstGeom prst="rect">
-            <a:avLst/>
-          </a:prstGeom>
-          <a:noFill/>
-          <a:ln/>
-        </p:spPr>
-        <p:txBody>
-          <a:bodyPr wrap="square" lIns="0" tIns="0" rIns="0" bIns="0" rtlCol="0" anchor="ctr"/>
-          <a:lstStyle/>
-          <a:p>
-            <a:pPr indent="0" marL="0">
-              <a:buNone/>
-            </a:pPr>
-            <a:r>
-              <a:rPr lang="en-US" sz="2100" b="1" dirty="0">
-                <a:solidFill>
-                  <a:schemeClr val="accent1"/>
-                </a:solidFill>
-              </a:rPr>
-              <a:t>Rules beat advice</a:t>
-            </a:r>
-            <a:endParaRPr lang="en-US" sz="2100" dirty="0"/>
-          </a:p>
-        </p:txBody>
-      </p:sp>
-      <p:sp>
-        <p:nvSpPr>
-          <p:cNvPr id="8" name="Text 6"/>
-          <p:cNvSpPr txBox="1"/>
-          <p:nvPr/>
-        </p:nvSpPr>
-        <p:spPr>
-          <a:xfrm>
-            <a:off x="548640" y="3154680"/>
-            <a:ext cx="5394960" cy="548640"/>
-          </a:xfrm>
-          <a:prstGeom prst="rect">
-            <a:avLst/>
-          </a:prstGeom>
-          <a:noFill/>
-          <a:ln/>
-        </p:spPr>
-        <p:txBody>
-          <a:bodyPr wrap="square" lIns="0" tIns="0" rIns="0" bIns="0" rtlCol="0" anchor="t"/>
-          <a:lstStyle/>
-          <a:p>
-            <a:pPr indent="0" marL="0">
-              <a:buNone/>
-            </a:pPr>
-            <a:r>
-              <a:rPr lang="en-US" sz="1600" dirty="0">
-                <a:solidFill>
-                  <a:schemeClr val="bg2"/>
-                </a:solidFill>
-              </a:rPr>
-              <a:t>Build checks into systems instead of writing guidance.</a:t>
-            </a:r>
-            <a:endParaRPr lang="en-US" sz="1600" dirty="0"/>
-          </a:p>
-        </p:txBody>
-      </p:sp>
-      <p:sp>
-        <p:nvSpPr>
-          <p:cNvPr id="9" name="Text 7"/>
-          <p:cNvSpPr txBox="1"/>
-          <p:nvPr/>
-        </p:nvSpPr>
-        <p:spPr>
-          <a:xfrm>
-            <a:off x="6217920" y="2651760"/>
-            <a:ext cx="5394960" cy="502920"/>
-          </a:xfrm>
-          <a:prstGeom prst="rect">
-            <a:avLst/>
-          </a:prstGeom>
-          <a:noFill/>
-          <a:ln/>
-        </p:spPr>
-        <p:txBody>
-          <a:bodyPr wrap="square" lIns="0" tIns="0" rIns="0" bIns="0" rtlCol="0" anchor="ctr"/>
-          <a:lstStyle/>
-          <a:p>
-            <a:pPr indent="0" marL="0">
-              <a:buNone/>
-            </a:pPr>
-            <a:r>
-              <a:rPr lang="en-US" sz="2100" b="1" dirty="0">
-                <a:solidFill>
-                  <a:schemeClr val="accent1"/>
-                </a:solidFill>
-              </a:rPr>
-              <a:t>Small habits add up</a:t>
-            </a:r>
-            <a:endParaRPr lang="en-US" sz="2100" dirty="0"/>
-          </a:p>
-        </p:txBody>
-      </p:sp>
-      <p:sp>
-        <p:nvSpPr>
-          <p:cNvPr id="10" name="Text 8"/>
-          <p:cNvSpPr txBox="1"/>
-          <p:nvPr/>
-        </p:nvSpPr>
-        <p:spPr>
-          <a:xfrm>
-            <a:off x="6217920" y="3154680"/>
-            <a:ext cx="5394960" cy="548640"/>
-          </a:xfrm>
-          <a:prstGeom prst="rect">
-            <a:avLst/>
-          </a:prstGeom>
-          <a:noFill/>
-          <a:ln/>
-        </p:spPr>
-        <p:txBody>
-          <a:bodyPr wrap="square" lIns="0" tIns="0" rIns="0" bIns="0" rtlCol="0" anchor="t"/>
-          <a:lstStyle/>
-          <a:p>
-            <a:pPr indent="0" marL="0">
-              <a:buNone/>
-            </a:pPr>
-            <a:r>
-              <a:rPr lang="en-US" sz="1600" dirty="0">
-                <a:solidFill>
-                  <a:schemeClr val="bg2"/>
-                </a:solidFill>
-              </a:rPr>
-              <a:t>Printing to sign made nearly half the problem.</a:t>
-            </a:r>
-            <a:endParaRPr lang="en-US" sz="1600" dirty="0"/>
-          </a:p>
-        </p:txBody>
-      </p:sp>
-      <p:sp>
-        <p:nvSpPr>
-          <p:cNvPr id="11" name="Shape 9"/>
+          <p:cNvPr id="3" name="Shape 1"/>
           <p:cNvSpPr/>
           <p:nvPr/>
         </p:nvSpPr>
         <p:spPr>
           <a:xfrm>
-            <a:off x="548640" y="3977640"/>
-            <a:ext cx="11064240" cy="2194560"/>
+            <a:off x="548640" y="1463040"/>
+            <a:ext cx="6035040" cy="1280160"/>
           </a:xfrm>
           <a:prstGeom prst="roundRect">
             <a:avLst>
-              <a:gd name="adj" fmla="val 6250"/>
+              <a:gd name="adj" fmla="val 10714"/>
             </a:avLst>
           </a:prstGeom>
           <a:solidFill>
-            <a:schemeClr val="bg1"/>
+            <a:schemeClr val="bg2"/>
           </a:solidFill>
           <a:ln/>
         </p:spPr>
       </p:sp>
       <p:sp>
         <p:nvSpPr>
+          <p:cNvPr id="4" name="Text 2"/>
+          <p:cNvSpPr txBox="1"/>
+          <p:nvPr/>
+        </p:nvSpPr>
+        <p:spPr>
+          <a:xfrm>
+            <a:off x="777240" y="1645920"/>
+            <a:ext cx="548640" cy="914400"/>
+          </a:xfrm>
+          <a:prstGeom prst="rect">
+            <a:avLst/>
+          </a:prstGeom>
+          <a:noFill/>
+          <a:ln/>
+        </p:spPr>
+        <p:txBody>
+          <a:bodyPr wrap="square" lIns="0" tIns="0" rIns="0" bIns="0" rtlCol="0" anchor="ctr"/>
+          <a:lstStyle/>
+          <a:p>
+            <a:pPr indent="0" marL="0">
+              <a:buNone/>
+            </a:pPr>
+            <a:r>
+              <a:rPr lang="en-US" sz="4000" b="1" dirty="0">
+                <a:solidFill>
+                  <a:schemeClr val="accent1"/>
+                </a:solidFill>
+                <a:latin typeface="Cambria" pitchFamily="34" charset="0"/>
+                <a:ea typeface="Cambria" pitchFamily="34" charset="-122"/>
+                <a:cs typeface="Cambria" pitchFamily="34" charset="-120"/>
+              </a:rPr>
+              <a:t>1</a:t>
+            </a:r>
+            <a:endParaRPr lang="en-US" sz="4000" dirty="0"/>
+          </a:p>
+        </p:txBody>
+      </p:sp>
+      <p:sp>
+        <p:nvSpPr>
+          <p:cNvPr id="5" name="Text 3"/>
+          <p:cNvSpPr txBox="1"/>
+          <p:nvPr/>
+        </p:nvSpPr>
+        <p:spPr>
+          <a:xfrm>
+            <a:off x="1463040" y="1600200"/>
+            <a:ext cx="4480560" cy="457200"/>
+          </a:xfrm>
+          <a:prstGeom prst="rect">
+            <a:avLst/>
+          </a:prstGeom>
+          <a:noFill/>
+          <a:ln/>
+        </p:spPr>
+        <p:txBody>
+          <a:bodyPr wrap="square" lIns="0" tIns="0" rIns="0" bIns="0" rtlCol="0" anchor="ctr"/>
+          <a:lstStyle/>
+          <a:p>
+            <a:pPr indent="0" marL="0">
+              <a:buNone/>
+            </a:pPr>
+            <a:r>
+              <a:rPr lang="en-US" sz="2000" b="1" dirty="0">
+                <a:solidFill>
+                  <a:schemeClr val="tx2"/>
+                </a:solidFill>
+              </a:rPr>
+              <a:t>Personal</a:t>
+            </a:r>
+            <a:endParaRPr lang="en-US" sz="2000" dirty="0"/>
+          </a:p>
+        </p:txBody>
+      </p:sp>
+      <p:sp>
+        <p:nvSpPr>
+          <p:cNvPr id="6" name="Text 4"/>
+          <p:cNvSpPr txBox="1"/>
+          <p:nvPr/>
+        </p:nvSpPr>
+        <p:spPr>
+          <a:xfrm>
+            <a:off x="1463040" y="2029968"/>
+            <a:ext cx="4846320" cy="320040"/>
+          </a:xfrm>
+          <a:prstGeom prst="rect">
+            <a:avLst/>
+          </a:prstGeom>
+          <a:noFill/>
+          <a:ln/>
+        </p:spPr>
+        <p:txBody>
+          <a:bodyPr wrap="square" lIns="0" tIns="0" rIns="0" bIns="0" rtlCol="0" anchor="ctr"/>
+          <a:lstStyle/>
+          <a:p>
+            <a:pPr indent="0" marL="0">
+              <a:buNone/>
+            </a:pPr>
+            <a:r>
+              <a:rPr lang="en-US" sz="1500" dirty="0">
+                <a:solidFill>
+                  <a:schemeClr val="tx1"/>
+                </a:solidFill>
+              </a:rPr>
+              <a:t>Drafting, summarising</a:t>
+            </a:r>
+            <a:endParaRPr lang="en-US" sz="1500" dirty="0"/>
+          </a:p>
+        </p:txBody>
+      </p:sp>
+      <p:sp>
+        <p:nvSpPr>
+          <p:cNvPr id="7" name="Text 5"/>
+          <p:cNvSpPr txBox="1"/>
+          <p:nvPr/>
+        </p:nvSpPr>
+        <p:spPr>
+          <a:xfrm>
+            <a:off x="1463040" y="2331720"/>
+            <a:ext cx="4846320" cy="320040"/>
+          </a:xfrm>
+          <a:prstGeom prst="rect">
+            <a:avLst/>
+          </a:prstGeom>
+          <a:noFill/>
+          <a:ln/>
+        </p:spPr>
+        <p:txBody>
+          <a:bodyPr wrap="square" lIns="0" tIns="0" rIns="0" bIns="0" rtlCol="0" anchor="ctr"/>
+          <a:lstStyle/>
+          <a:p>
+            <a:pPr indent="0" marL="0">
+              <a:buNone/>
+            </a:pPr>
+            <a:r>
+              <a:rPr lang="en-US" sz="1300" i="1" dirty="0">
+                <a:solidFill>
+                  <a:schemeClr val="accent3"/>
+                </a:solidFill>
+              </a:rPr>
+              <a:t>Low risk: staff guidance</a:t>
+            </a:r>
+            <a:endParaRPr lang="en-US" sz="1300" dirty="0"/>
+          </a:p>
+        </p:txBody>
+      </p:sp>
+      <p:sp>
+        <p:nvSpPr>
+          <p:cNvPr id="8" name="Shape 6"/>
+          <p:cNvSpPr/>
+          <p:nvPr/>
+        </p:nvSpPr>
+        <p:spPr>
+          <a:xfrm>
+            <a:off x="960120" y="2926080"/>
+            <a:ext cx="5623560" cy="1280160"/>
+          </a:xfrm>
+          <a:prstGeom prst="roundRect">
+            <a:avLst>
+              <a:gd name="adj" fmla="val 10714"/>
+            </a:avLst>
+          </a:prstGeom>
+          <a:solidFill>
+            <a:schemeClr val="bg2"/>
+          </a:solidFill>
+          <a:ln/>
+        </p:spPr>
+      </p:sp>
+      <p:sp>
+        <p:nvSpPr>
+          <p:cNvPr id="9" name="Text 7"/>
+          <p:cNvSpPr txBox="1"/>
+          <p:nvPr/>
+        </p:nvSpPr>
+        <p:spPr>
+          <a:xfrm>
+            <a:off x="1188720" y="3108960"/>
+            <a:ext cx="548640" cy="914400"/>
+          </a:xfrm>
+          <a:prstGeom prst="rect">
+            <a:avLst/>
+          </a:prstGeom>
+          <a:noFill/>
+          <a:ln/>
+        </p:spPr>
+        <p:txBody>
+          <a:bodyPr wrap="square" lIns="0" tIns="0" rIns="0" bIns="0" rtlCol="0" anchor="ctr"/>
+          <a:lstStyle/>
+          <a:p>
+            <a:pPr indent="0" marL="0">
+              <a:buNone/>
+            </a:pPr>
+            <a:r>
+              <a:rPr lang="en-US" sz="4000" b="1" dirty="0">
+                <a:solidFill>
+                  <a:schemeClr val="accent1"/>
+                </a:solidFill>
+                <a:latin typeface="Cambria" pitchFamily="34" charset="0"/>
+                <a:ea typeface="Cambria" pitchFamily="34" charset="-122"/>
+                <a:cs typeface="Cambria" pitchFamily="34" charset="-120"/>
+              </a:rPr>
+              <a:t>2</a:t>
+            </a:r>
+            <a:endParaRPr lang="en-US" sz="4000" dirty="0"/>
+          </a:p>
+        </p:txBody>
+      </p:sp>
+      <p:sp>
+        <p:nvSpPr>
+          <p:cNvPr id="10" name="Text 8"/>
+          <p:cNvSpPr txBox="1"/>
+          <p:nvPr/>
+        </p:nvSpPr>
+        <p:spPr>
+          <a:xfrm>
+            <a:off x="1874520" y="3063240"/>
+            <a:ext cx="4069080" cy="457200"/>
+          </a:xfrm>
+          <a:prstGeom prst="rect">
+            <a:avLst/>
+          </a:prstGeom>
+          <a:noFill/>
+          <a:ln/>
+        </p:spPr>
+        <p:txBody>
+          <a:bodyPr wrap="square" lIns="0" tIns="0" rIns="0" bIns="0" rtlCol="0" anchor="ctr"/>
+          <a:lstStyle/>
+          <a:p>
+            <a:pPr indent="0" marL="0">
+              <a:buNone/>
+            </a:pPr>
+            <a:r>
+              <a:rPr lang="en-US" sz="2000" b="1" dirty="0">
+                <a:solidFill>
+                  <a:schemeClr val="tx2"/>
+                </a:solidFill>
+              </a:rPr>
+              <a:t>Team</a:t>
+            </a:r>
+            <a:endParaRPr lang="en-US" sz="2000" dirty="0"/>
+          </a:p>
+        </p:txBody>
+      </p:sp>
+      <p:sp>
+        <p:nvSpPr>
+          <p:cNvPr id="11" name="Text 9"/>
+          <p:cNvSpPr txBox="1"/>
+          <p:nvPr/>
+        </p:nvSpPr>
+        <p:spPr>
+          <a:xfrm>
+            <a:off x="1874520" y="3493008"/>
+            <a:ext cx="4434840" cy="320040"/>
+          </a:xfrm>
+          <a:prstGeom prst="rect">
+            <a:avLst/>
+          </a:prstGeom>
+          <a:noFill/>
+          <a:ln/>
+        </p:spPr>
+        <p:txBody>
+          <a:bodyPr wrap="square" lIns="0" tIns="0" rIns="0" bIns="0" rtlCol="0" anchor="ctr"/>
+          <a:lstStyle/>
+          <a:p>
+            <a:pPr indent="0" marL="0">
+              <a:buNone/>
+            </a:pPr>
+            <a:r>
+              <a:rPr lang="en-US" sz="1500" dirty="0">
+                <a:solidFill>
+                  <a:schemeClr val="tx1"/>
+                </a:solidFill>
+              </a:rPr>
+              <a:t>Knowledge assistants, triage</a:t>
+            </a:r>
+            <a:endParaRPr lang="en-US" sz="1500" dirty="0"/>
+          </a:p>
+        </p:txBody>
+      </p:sp>
+      <p:sp>
+        <p:nvSpPr>
           <p:cNvPr id="12" name="Text 10"/>
           <p:cNvSpPr txBox="1"/>
           <p:nvPr/>
         </p:nvSpPr>
         <p:spPr>
           <a:xfrm>
-            <a:off x="868680" y="4160520"/>
-            <a:ext cx="10424160" cy="457200"/>
+            <a:off x="1874520" y="3794760"/>
+            <a:ext cx="4434840" cy="320040"/>
           </a:xfrm>
           <a:prstGeom prst="rect">
             <a:avLst/>
@@ -5950,12 +5533,217 @@
               <a:buNone/>
             </a:pPr>
             <a:r>
+              <a:rPr lang="en-US" sz="1300" i="1" dirty="0">
+                <a:solidFill>
+                  <a:schemeClr val="accent3"/>
+                </a:solidFill>
+              </a:rPr>
+              <a:t>Medium: a service owner, central oversight</a:t>
+            </a:r>
+            <a:endParaRPr lang="en-US" sz="1300" dirty="0"/>
+          </a:p>
+        </p:txBody>
+      </p:sp>
+      <p:sp>
+        <p:nvSpPr>
+          <p:cNvPr id="13" name="Shape 11"/>
+          <p:cNvSpPr/>
+          <p:nvPr/>
+        </p:nvSpPr>
+        <p:spPr>
+          <a:xfrm>
+            <a:off x="1371600" y="4389120"/>
+            <a:ext cx="5212080" cy="1280160"/>
+          </a:xfrm>
+          <a:prstGeom prst="roundRect">
+            <a:avLst>
+              <a:gd name="adj" fmla="val 10714"/>
+            </a:avLst>
+          </a:prstGeom>
+          <a:solidFill>
+            <a:schemeClr val="tx2"/>
+          </a:solidFill>
+          <a:ln/>
+        </p:spPr>
+      </p:sp>
+      <p:sp>
+        <p:nvSpPr>
+          <p:cNvPr id="14" name="Text 12"/>
+          <p:cNvSpPr txBox="1"/>
+          <p:nvPr/>
+        </p:nvSpPr>
+        <p:spPr>
+          <a:xfrm>
+            <a:off x="1600200" y="4572000"/>
+            <a:ext cx="548640" cy="914400"/>
+          </a:xfrm>
+          <a:prstGeom prst="rect">
+            <a:avLst/>
+          </a:prstGeom>
+          <a:noFill/>
+          <a:ln/>
+        </p:spPr>
+        <p:txBody>
+          <a:bodyPr wrap="square" lIns="0" tIns="0" rIns="0" bIns="0" rtlCol="0" anchor="ctr"/>
+          <a:lstStyle/>
+          <a:p>
+            <a:pPr indent="0" marL="0">
+              <a:buNone/>
+            </a:pPr>
+            <a:r>
+              <a:rPr lang="en-US" sz="4000" b="1" dirty="0">
+                <a:solidFill>
+                  <a:schemeClr val="accent1"/>
+                </a:solidFill>
+                <a:latin typeface="Cambria" pitchFamily="34" charset="0"/>
+                <a:ea typeface="Cambria" pitchFamily="34" charset="-122"/>
+                <a:cs typeface="Cambria" pitchFamily="34" charset="-120"/>
+              </a:rPr>
+              <a:t>3</a:t>
+            </a:r>
+            <a:endParaRPr lang="en-US" sz="4000" dirty="0"/>
+          </a:p>
+        </p:txBody>
+      </p:sp>
+      <p:sp>
+        <p:nvSpPr>
+          <p:cNvPr id="15" name="Text 13"/>
+          <p:cNvSpPr txBox="1"/>
+          <p:nvPr/>
+        </p:nvSpPr>
+        <p:spPr>
+          <a:xfrm>
+            <a:off x="2286000" y="4526280"/>
+            <a:ext cx="3657600" cy="457200"/>
+          </a:xfrm>
+          <a:prstGeom prst="rect">
+            <a:avLst/>
+          </a:prstGeom>
+          <a:noFill/>
+          <a:ln/>
+        </p:spPr>
+        <p:txBody>
+          <a:bodyPr wrap="square" lIns="0" tIns="0" rIns="0" bIns="0" rtlCol="0" anchor="ctr"/>
+          <a:lstStyle/>
+          <a:p>
+            <a:pPr indent="0" marL="0">
+              <a:buNone/>
+            </a:pPr>
+            <a:r>
               <a:rPr lang="en-US" sz="2000" b="1" dirty="0">
                 <a:solidFill>
+                  <a:schemeClr val="bg1"/>
+                </a:solidFill>
+              </a:rPr>
+              <a:t>Organisation</a:t>
+            </a:r>
+            <a:endParaRPr lang="en-US" sz="2000" dirty="0"/>
+          </a:p>
+        </p:txBody>
+      </p:sp>
+      <p:sp>
+        <p:nvSpPr>
+          <p:cNvPr id="16" name="Text 14"/>
+          <p:cNvSpPr txBox="1"/>
+          <p:nvPr/>
+        </p:nvSpPr>
+        <p:spPr>
+          <a:xfrm>
+            <a:off x="2286000" y="4956048"/>
+            <a:ext cx="4023360" cy="320040"/>
+          </a:xfrm>
+          <a:prstGeom prst="rect">
+            <a:avLst/>
+          </a:prstGeom>
+          <a:noFill/>
+          <a:ln/>
+        </p:spPr>
+        <p:txBody>
+          <a:bodyPr wrap="square" lIns="0" tIns="0" rIns="0" bIns="0" rtlCol="0" anchor="ctr"/>
+          <a:lstStyle/>
+          <a:p>
+            <a:pPr indent="0" marL="0">
+              <a:buNone/>
+            </a:pPr>
+            <a:r>
+              <a:rPr lang="en-US" sz="1500" dirty="0">
+                <a:solidFill>
+                  <a:schemeClr val="bg2"/>
+                </a:solidFill>
+              </a:rPr>
+              <a:t>Public-facing tools, decision support</a:t>
+            </a:r>
+            <a:endParaRPr lang="en-US" sz="1500" dirty="0"/>
+          </a:p>
+        </p:txBody>
+      </p:sp>
+      <p:sp>
+        <p:nvSpPr>
+          <p:cNvPr id="17" name="Text 15"/>
+          <p:cNvSpPr txBox="1"/>
+          <p:nvPr/>
+        </p:nvSpPr>
+        <p:spPr>
+          <a:xfrm>
+            <a:off x="2286000" y="5257800"/>
+            <a:ext cx="4023360" cy="320040"/>
+          </a:xfrm>
+          <a:prstGeom prst="rect">
+            <a:avLst/>
+          </a:prstGeom>
+          <a:noFill/>
+          <a:ln/>
+        </p:spPr>
+        <p:txBody>
+          <a:bodyPr wrap="square" lIns="0" tIns="0" rIns="0" bIns="0" rtlCol="0" anchor="ctr"/>
+          <a:lstStyle/>
+          <a:p>
+            <a:pPr indent="0" marL="0">
+              <a:buNone/>
+            </a:pPr>
+            <a:r>
+              <a:rPr lang="en-US" sz="1300" i="1" dirty="0">
+                <a:solidFill>
+                  <a:schemeClr val="accent5"/>
+                </a:solidFill>
+              </a:rPr>
+              <a:t>High: formal approval and assurance</a:t>
+            </a:r>
+            <a:endParaRPr lang="en-US" sz="1300" dirty="0"/>
+          </a:p>
+        </p:txBody>
+      </p:sp>
+      <p:sp>
+        <p:nvSpPr>
+          <p:cNvPr id="18" name="Text 16"/>
+          <p:cNvSpPr txBox="1"/>
+          <p:nvPr/>
+        </p:nvSpPr>
+        <p:spPr>
+          <a:xfrm>
+            <a:off x="7223760" y="1463040"/>
+            <a:ext cx="4389120" cy="457200"/>
+          </a:xfrm>
+          <a:prstGeom prst="rect">
+            <a:avLst/>
+          </a:prstGeom>
+          <a:noFill/>
+          <a:ln/>
+        </p:spPr>
+        <p:txBody>
+          <a:bodyPr wrap="square" lIns="0" tIns="0" rIns="0" bIns="0" rtlCol="0" anchor="ctr"/>
+          <a:lstStyle/>
+          <a:p>
+            <a:pPr indent="0" marL="0">
+              <a:buNone/>
+            </a:pPr>
+            <a:r>
+              <a:rPr lang="en-US" sz="2000" b="1" dirty="0">
+                <a:solidFill>
                   <a:schemeClr val="tx2"/>
                 </a:solidFill>
               </a:rPr>
-              <a:t>What we are asking for</a:t>
+              <a:t>Manage AI like a new employee</a:t>
             </a:r>
             <a:endParaRPr lang="en-US" sz="2000" dirty="0"/>
           </a:p>
@@ -5963,14 +5751,478 @@
       </p:sp>
       <p:sp>
         <p:nvSpPr>
-          <p:cNvPr id="13" name="Text 11"/>
-          <p:cNvSpPr txBox="1"/>
-          <p:nvPr/>
-        </p:nvSpPr>
-        <p:spPr>
-          <a:xfrm>
-            <a:off x="868680" y="4617720"/>
-            <a:ext cx="10424160" cy="1463040"/>
+          <p:cNvPr id="19" name="Shape 17"/>
+          <p:cNvSpPr/>
+          <p:nvPr/>
+        </p:nvSpPr>
+        <p:spPr>
+          <a:xfrm>
+            <a:off x="7223760" y="2057400"/>
+            <a:ext cx="594360" cy="594360"/>
+          </a:xfrm>
+          <a:prstGeom prst="ellipse">
+            <a:avLst/>
+          </a:prstGeom>
+          <a:solidFill>
+            <a:schemeClr val="tx2"/>
+          </a:solidFill>
+          <a:ln/>
+        </p:spPr>
+      </p:sp>
+      <p:pic>
+        <p:nvPicPr>
+          <p:cNvPr id="20" name="Image 0" descr="preencoded.png">    </p:cNvPr>
+          <p:cNvPicPr>
+            <a:picLocks noChangeAspect="1"/>
+          </p:cNvPicPr>
+          <p:nvPr/>
+        </p:nvPicPr>
+        <p:blipFill>
+          <a:blip r:embed="rId1"/>
+          <a:stretch>
+            <a:fillRect/>
+          </a:stretch>
+        </p:blipFill>
+        <p:spPr>
+          <a:xfrm>
+            <a:off x="7370064" y="2203704"/>
+            <a:ext cx="301752" cy="301752"/>
+          </a:xfrm>
+          <a:prstGeom prst="rect">
+            <a:avLst/>
+          </a:prstGeom>
+        </p:spPr>
+      </p:pic>
+      <p:sp>
+        <p:nvSpPr>
+          <p:cNvPr id="21" name="Text 18"/>
+          <p:cNvSpPr txBox="1"/>
+          <p:nvPr/>
+        </p:nvSpPr>
+        <p:spPr>
+          <a:xfrm>
+            <a:off x="8001000" y="2011680"/>
+            <a:ext cx="3657600" cy="365760"/>
+          </a:xfrm>
+          <a:prstGeom prst="rect">
+            <a:avLst/>
+          </a:prstGeom>
+          <a:noFill/>
+          <a:ln/>
+        </p:spPr>
+        <p:txBody>
+          <a:bodyPr wrap="square" lIns="0" tIns="0" rIns="0" bIns="0" rtlCol="0" anchor="ctr"/>
+          <a:lstStyle/>
+          <a:p>
+            <a:pPr indent="0" marL="0">
+              <a:buNone/>
+            </a:pPr>
+            <a:r>
+              <a:rPr lang="en-US" sz="1600" b="1" dirty="0">
+                <a:solidFill>
+                  <a:schemeClr val="tx2"/>
+                </a:solidFill>
+              </a:rPr>
+              <a:t>A job description</a:t>
+            </a:r>
+            <a:endParaRPr lang="en-US" sz="1600" dirty="0"/>
+          </a:p>
+        </p:txBody>
+      </p:sp>
+      <p:sp>
+        <p:nvSpPr>
+          <p:cNvPr id="22" name="Text 19"/>
+          <p:cNvSpPr txBox="1"/>
+          <p:nvPr/>
+        </p:nvSpPr>
+        <p:spPr>
+          <a:xfrm>
+            <a:off x="8001000" y="2350008"/>
+            <a:ext cx="3657600" cy="320040"/>
+          </a:xfrm>
+          <a:prstGeom prst="rect">
+            <a:avLst/>
+          </a:prstGeom>
+          <a:noFill/>
+          <a:ln/>
+        </p:spPr>
+        <p:txBody>
+          <a:bodyPr wrap="square" lIns="0" tIns="0" rIns="0" bIns="0" rtlCol="0" anchor="ctr"/>
+          <a:lstStyle/>
+          <a:p>
+            <a:pPr indent="0" marL="0">
+              <a:buNone/>
+            </a:pPr>
+            <a:r>
+              <a:rPr lang="en-US" sz="1400" dirty="0">
+                <a:solidFill>
+                  <a:schemeClr val="tx1"/>
+                </a:solidFill>
+              </a:rPr>
+              <a:t>a clear task, data and limits</a:t>
+            </a:r>
+            <a:endParaRPr lang="en-US" sz="1400" dirty="0"/>
+          </a:p>
+        </p:txBody>
+      </p:sp>
+      <p:sp>
+        <p:nvSpPr>
+          <p:cNvPr id="23" name="Shape 20"/>
+          <p:cNvSpPr/>
+          <p:nvPr/>
+        </p:nvSpPr>
+        <p:spPr>
+          <a:xfrm>
+            <a:off x="7223760" y="2926080"/>
+            <a:ext cx="594360" cy="594360"/>
+          </a:xfrm>
+          <a:prstGeom prst="ellipse">
+            <a:avLst/>
+          </a:prstGeom>
+          <a:solidFill>
+            <a:schemeClr val="tx2"/>
+          </a:solidFill>
+          <a:ln/>
+        </p:spPr>
+      </p:sp>
+      <p:pic>
+        <p:nvPicPr>
+          <p:cNvPr id="24" name="Image 1" descr="preencoded.png">    </p:cNvPr>
+          <p:cNvPicPr>
+            <a:picLocks noChangeAspect="1"/>
+          </p:cNvPicPr>
+          <p:nvPr/>
+        </p:nvPicPr>
+        <p:blipFill>
+          <a:blip r:embed="rId2"/>
+          <a:stretch>
+            <a:fillRect/>
+          </a:stretch>
+        </p:blipFill>
+        <p:spPr>
+          <a:xfrm>
+            <a:off x="7370064" y="3072384"/>
+            <a:ext cx="301752" cy="301752"/>
+          </a:xfrm>
+          <a:prstGeom prst="rect">
+            <a:avLst/>
+          </a:prstGeom>
+        </p:spPr>
+      </p:pic>
+      <p:sp>
+        <p:nvSpPr>
+          <p:cNvPr id="25" name="Text 21"/>
+          <p:cNvSpPr txBox="1"/>
+          <p:nvPr/>
+        </p:nvSpPr>
+        <p:spPr>
+          <a:xfrm>
+            <a:off x="8001000" y="2880360"/>
+            <a:ext cx="3657600" cy="365760"/>
+          </a:xfrm>
+          <a:prstGeom prst="rect">
+            <a:avLst/>
+          </a:prstGeom>
+          <a:noFill/>
+          <a:ln/>
+        </p:spPr>
+        <p:txBody>
+          <a:bodyPr wrap="square" lIns="0" tIns="0" rIns="0" bIns="0" rtlCol="0" anchor="ctr"/>
+          <a:lstStyle/>
+          <a:p>
+            <a:pPr indent="0" marL="0">
+              <a:buNone/>
+            </a:pPr>
+            <a:r>
+              <a:rPr lang="en-US" sz="1600" b="1" dirty="0">
+                <a:solidFill>
+                  <a:schemeClr val="tx2"/>
+                </a:solidFill>
+              </a:rPr>
+              <a:t>A trial period</a:t>
+            </a:r>
+            <a:endParaRPr lang="en-US" sz="1600" dirty="0"/>
+          </a:p>
+        </p:txBody>
+      </p:sp>
+      <p:sp>
+        <p:nvSpPr>
+          <p:cNvPr id="26" name="Text 22"/>
+          <p:cNvSpPr txBox="1"/>
+          <p:nvPr/>
+        </p:nvSpPr>
+        <p:spPr>
+          <a:xfrm>
+            <a:off x="8001000" y="3218688"/>
+            <a:ext cx="3657600" cy="320040"/>
+          </a:xfrm>
+          <a:prstGeom prst="rect">
+            <a:avLst/>
+          </a:prstGeom>
+          <a:noFill/>
+          <a:ln/>
+        </p:spPr>
+        <p:txBody>
+          <a:bodyPr wrap="square" lIns="0" tIns="0" rIns="0" bIns="0" rtlCol="0" anchor="ctr"/>
+          <a:lstStyle/>
+          <a:p>
+            <a:pPr indent="0" marL="0">
+              <a:buNone/>
+            </a:pPr>
+            <a:r>
+              <a:rPr lang="en-US" sz="1400" dirty="0">
+                <a:solidFill>
+                  <a:schemeClr val="tx1"/>
+                </a:solidFill>
+              </a:rPr>
+              <a:t>a limited roll-out first</a:t>
+            </a:r>
+            <a:endParaRPr lang="en-US" sz="1400" dirty="0"/>
+          </a:p>
+        </p:txBody>
+      </p:sp>
+      <p:sp>
+        <p:nvSpPr>
+          <p:cNvPr id="27" name="Shape 23"/>
+          <p:cNvSpPr/>
+          <p:nvPr/>
+        </p:nvSpPr>
+        <p:spPr>
+          <a:xfrm>
+            <a:off x="7223760" y="3794760"/>
+            <a:ext cx="594360" cy="594360"/>
+          </a:xfrm>
+          <a:prstGeom prst="ellipse">
+            <a:avLst/>
+          </a:prstGeom>
+          <a:solidFill>
+            <a:schemeClr val="tx2"/>
+          </a:solidFill>
+          <a:ln/>
+        </p:spPr>
+      </p:sp>
+      <p:pic>
+        <p:nvPicPr>
+          <p:cNvPr id="28" name="Image 2" descr="preencoded.png">    </p:cNvPr>
+          <p:cNvPicPr>
+            <a:picLocks noChangeAspect="1"/>
+          </p:cNvPicPr>
+          <p:nvPr/>
+        </p:nvPicPr>
+        <p:blipFill>
+          <a:blip r:embed="rId3"/>
+          <a:stretch>
+            <a:fillRect/>
+          </a:stretch>
+        </p:blipFill>
+        <p:spPr>
+          <a:xfrm>
+            <a:off x="7370064" y="3941064"/>
+            <a:ext cx="301752" cy="301752"/>
+          </a:xfrm>
+          <a:prstGeom prst="rect">
+            <a:avLst/>
+          </a:prstGeom>
+        </p:spPr>
+      </p:pic>
+      <p:sp>
+        <p:nvSpPr>
+          <p:cNvPr id="29" name="Text 24"/>
+          <p:cNvSpPr txBox="1"/>
+          <p:nvPr/>
+        </p:nvSpPr>
+        <p:spPr>
+          <a:xfrm>
+            <a:off x="8001000" y="3749040"/>
+            <a:ext cx="3657600" cy="365760"/>
+          </a:xfrm>
+          <a:prstGeom prst="rect">
+            <a:avLst/>
+          </a:prstGeom>
+          <a:noFill/>
+          <a:ln/>
+        </p:spPr>
+        <p:txBody>
+          <a:bodyPr wrap="square" lIns="0" tIns="0" rIns="0" bIns="0" rtlCol="0" anchor="ctr"/>
+          <a:lstStyle/>
+          <a:p>
+            <a:pPr indent="0" marL="0">
+              <a:buNone/>
+            </a:pPr>
+            <a:r>
+              <a:rPr lang="en-US" sz="1600" b="1" dirty="0">
+                <a:solidFill>
+                  <a:schemeClr val="tx2"/>
+                </a:solidFill>
+              </a:rPr>
+              <a:t>Performance reviews</a:t>
+            </a:r>
+            <a:endParaRPr lang="en-US" sz="1600" dirty="0"/>
+          </a:p>
+        </p:txBody>
+      </p:sp>
+      <p:sp>
+        <p:nvSpPr>
+          <p:cNvPr id="30" name="Text 25"/>
+          <p:cNvSpPr txBox="1"/>
+          <p:nvPr/>
+        </p:nvSpPr>
+        <p:spPr>
+          <a:xfrm>
+            <a:off x="8001000" y="4087368"/>
+            <a:ext cx="3657600" cy="320040"/>
+          </a:xfrm>
+          <a:prstGeom prst="rect">
+            <a:avLst/>
+          </a:prstGeom>
+          <a:noFill/>
+          <a:ln/>
+        </p:spPr>
+        <p:txBody>
+          <a:bodyPr wrap="square" lIns="0" tIns="0" rIns="0" bIns="0" rtlCol="0" anchor="ctr"/>
+          <a:lstStyle/>
+          <a:p>
+            <a:pPr indent="0" marL="0">
+              <a:buNone/>
+            </a:pPr>
+            <a:r>
+              <a:rPr lang="en-US" sz="1400" dirty="0">
+                <a:solidFill>
+                  <a:schemeClr val="tx1"/>
+                </a:solidFill>
+              </a:rPr>
+              <a:t>measured and monitored</a:t>
+            </a:r>
+            <a:endParaRPr lang="en-US" sz="1400" dirty="0"/>
+          </a:p>
+        </p:txBody>
+      </p:sp>
+      <p:sp>
+        <p:nvSpPr>
+          <p:cNvPr id="31" name="Shape 26"/>
+          <p:cNvSpPr/>
+          <p:nvPr/>
+        </p:nvSpPr>
+        <p:spPr>
+          <a:xfrm>
+            <a:off x="7223760" y="4663440"/>
+            <a:ext cx="594360" cy="594360"/>
+          </a:xfrm>
+          <a:prstGeom prst="ellipse">
+            <a:avLst/>
+          </a:prstGeom>
+          <a:solidFill>
+            <a:schemeClr val="tx2"/>
+          </a:solidFill>
+          <a:ln/>
+        </p:spPr>
+      </p:sp>
+      <p:pic>
+        <p:nvPicPr>
+          <p:cNvPr id="32" name="Image 3" descr="preencoded.png">    </p:cNvPr>
+          <p:cNvPicPr>
+            <a:picLocks noChangeAspect="1"/>
+          </p:cNvPicPr>
+          <p:nvPr/>
+        </p:nvPicPr>
+        <p:blipFill>
+          <a:blip r:embed="rId4"/>
+          <a:stretch>
+            <a:fillRect/>
+          </a:stretch>
+        </p:blipFill>
+        <p:spPr>
+          <a:xfrm>
+            <a:off x="7370064" y="4809744"/>
+            <a:ext cx="301752" cy="301752"/>
+          </a:xfrm>
+          <a:prstGeom prst="rect">
+            <a:avLst/>
+          </a:prstGeom>
+        </p:spPr>
+      </p:pic>
+      <p:sp>
+        <p:nvSpPr>
+          <p:cNvPr id="33" name="Text 27"/>
+          <p:cNvSpPr txBox="1"/>
+          <p:nvPr/>
+        </p:nvSpPr>
+        <p:spPr>
+          <a:xfrm>
+            <a:off x="8001000" y="4617720"/>
+            <a:ext cx="3657600" cy="365760"/>
+          </a:xfrm>
+          <a:prstGeom prst="rect">
+            <a:avLst/>
+          </a:prstGeom>
+          <a:noFill/>
+          <a:ln/>
+        </p:spPr>
+        <p:txBody>
+          <a:bodyPr wrap="square" lIns="0" tIns="0" rIns="0" bIns="0" rtlCol="0" anchor="ctr"/>
+          <a:lstStyle/>
+          <a:p>
+            <a:pPr indent="0" marL="0">
+              <a:buNone/>
+            </a:pPr>
+            <a:r>
+              <a:rPr lang="en-US" sz="1600" b="1" dirty="0">
+                <a:solidFill>
+                  <a:schemeClr val="tx2"/>
+                </a:solidFill>
+              </a:rPr>
+              <a:t>Can be switched off</a:t>
+            </a:r>
+            <a:endParaRPr lang="en-US" sz="1600" dirty="0"/>
+          </a:p>
+        </p:txBody>
+      </p:sp>
+      <p:sp>
+        <p:nvSpPr>
+          <p:cNvPr id="34" name="Text 28"/>
+          <p:cNvSpPr txBox="1"/>
+          <p:nvPr/>
+        </p:nvSpPr>
+        <p:spPr>
+          <a:xfrm>
+            <a:off x="8001000" y="4956048"/>
+            <a:ext cx="3657600" cy="320040"/>
+          </a:xfrm>
+          <a:prstGeom prst="rect">
+            <a:avLst/>
+          </a:prstGeom>
+          <a:noFill/>
+          <a:ln/>
+        </p:spPr>
+        <p:txBody>
+          <a:bodyPr wrap="square" lIns="0" tIns="0" rIns="0" bIns="0" rtlCol="0" anchor="ctr"/>
+          <a:lstStyle/>
+          <a:p>
+            <a:pPr indent="0" marL="0">
+              <a:buNone/>
+            </a:pPr>
+            <a:r>
+              <a:rPr lang="en-US" sz="1400" dirty="0">
+                <a:solidFill>
+                  <a:schemeClr val="tx1"/>
+                </a:solidFill>
+              </a:rPr>
+              <a:t>a person stays accountable</a:t>
+            </a:r>
+            <a:endParaRPr lang="en-US" sz="1400" dirty="0"/>
+          </a:p>
+        </p:txBody>
+      </p:sp>
+      <p:sp>
+        <p:nvSpPr>
+          <p:cNvPr id="35" name="Text 29"/>
+          <p:cNvSpPr txBox="1"/>
+          <p:nvPr/>
+        </p:nvSpPr>
+        <p:spPr>
+          <a:xfrm>
+            <a:off x="7223760" y="5577840"/>
+            <a:ext cx="4389120" cy="685800"/>
           </a:xfrm>
           <a:prstGeom prst="rect">
             <a:avLst/>
@@ -5982,71 +6234,31 @@
           <a:bodyPr wrap="square" lIns="0" tIns="0" rIns="0" bIns="0" rtlCol="0" anchor="t"/>
           <a:lstStyle/>
           <a:p>
-            <a:pPr marL="342900" indent="-342900">
-              <a:spcAft>
-                <a:spcPts val="600"/>
-              </a:spcAft>
-              <a:buSzPct val="100000"/>
-              <a:buChar char="•"/>
-            </a:pPr>
-            <a:r>
-              <a:rPr lang="en-US" sz="1700" dirty="0">
-                <a:solidFill>
-                  <a:schemeClr val="tx1"/>
-                </a:solidFill>
-              </a:rPr>
-              <a:t>Stand up an AI build team and a cloud strategy, with an executive sponsor</a:t>
-            </a:r>
-            <a:endParaRPr lang="en-US" sz="1700" dirty="0"/>
-          </a:p>
-          <a:p>
-            <a:pPr marL="342900" indent="-342900">
-              <a:spcAft>
-                <a:spcPts val="600"/>
-              </a:spcAft>
-              <a:buSzPct val="100000"/>
-              <a:buChar char="•"/>
-            </a:pPr>
-            <a:r>
-              <a:rPr lang="en-US" sz="1700" dirty="0">
-                <a:solidFill>
-                  <a:schemeClr val="tx1"/>
-                </a:solidFill>
-              </a:rPr>
-              <a:t>Change our filing rules and portal through the Rules of Practice review already under way</a:t>
-            </a:r>
-            <a:endParaRPr lang="en-US" sz="1700" dirty="0"/>
-          </a:p>
-          <a:p>
-            <a:pPr marL="342900" indent="-342900">
-              <a:spcAft>
-                <a:spcPts val="600"/>
-              </a:spcAft>
-              <a:buSzPct val="100000"/>
-              <a:buChar char="•"/>
-            </a:pPr>
-            <a:r>
-              <a:rPr lang="en-US" sz="1700" dirty="0">
-                <a:solidFill>
-                  <a:schemeClr val="tx1"/>
-                </a:solidFill>
-              </a:rPr>
-              <a:t>Start now with two quick wins: the automatic upload check, and a privacy review of flawed redactions</a:t>
-            </a:r>
-            <a:endParaRPr lang="en-US" sz="1700" dirty="0"/>
-          </a:p>
-        </p:txBody>
-      </p:sp>
-      <p:sp>
-        <p:nvSpPr>
-          <p:cNvPr id="14" name="Text 12"/>
-          <p:cNvSpPr txBox="1"/>
-          <p:nvPr/>
-        </p:nvSpPr>
-        <p:spPr>
-          <a:xfrm>
-            <a:off x="548640" y="6263640"/>
-            <a:ext cx="10424160" cy="365760"/>
+            <a:pPr indent="0" marL="0">
+              <a:buNone/>
+            </a:pPr>
+            <a:r>
+              <a:rPr lang="en-US" sz="1300" i="1" dirty="0">
+                <a:solidFill>
+                  <a:schemeClr val="accent3"/>
+                </a:solidFill>
+              </a:rPr>
+              <a:t>Train every level: all staff to use AI safely, team leads to build it into their work, executives to weigh risk and value.</a:t>
+            </a:r>
+            <a:endParaRPr lang="en-US" sz="1300" dirty="0"/>
+          </a:p>
+        </p:txBody>
+      </p:sp>
+      <p:sp>
+        <p:nvSpPr>
+          <p:cNvPr id="36" name="Text 30"/>
+          <p:cNvSpPr txBox="1"/>
+          <p:nvPr/>
+        </p:nvSpPr>
+        <p:spPr>
+          <a:xfrm>
+            <a:off x="548640" y="5989320"/>
+            <a:ext cx="6400800" cy="320040"/>
           </a:xfrm>
           <a:prstGeom prst="rect">
             <a:avLst/>
@@ -6062,14 +6274,14 @@
               <a:buNone/>
             </a:pPr>
             <a:r>
-              <a:rPr lang="en-US" sz="1200" i="1" dirty="0">
-                <a:solidFill>
-                  <a:schemeClr val="bg2"/>
-                </a:solidFill>
-              </a:rPr>
-              <a:t>“Agentic AI is not primarily a technology challenge.”  — UK Local Government Association, 2026</a:t>
-            </a:r>
-            <a:endParaRPr lang="en-US" sz="1200" dirty="0"/>
+              <a:rPr lang="en-US" sz="1100" dirty="0">
+                <a:solidFill>
+                  <a:schemeClr val="accent3"/>
+                </a:solidFill>
+              </a:rPr>
+              <a:t>Adapted from the UK Local Government Association’s playbook for agentic AI (2026).</a:t>
+            </a:r>
+            <a:endParaRPr lang="en-US" sz="1100" dirty="0"/>
           </a:p>
         </p:txBody>
       </p:sp>
@@ -6103,7 +6315,7 @@
             <a:lvl1pPr>
               <a:defRPr sz="1000">
                 <a:solidFill>
-                  <a:schemeClr val="bg2"/>
+                  <a:schemeClr val="accent3"/>
                 </a:solidFill>
               </a:defRPr>
             </a:lvl1pPr>
@@ -6172,25 +6384,371 @@
             <a:r>
               <a:rPr lang="en-US" sz="3400" b="1" dirty="0">
                 <a:solidFill>
+                  <a:schemeClr val="bg1"/>
+                </a:solidFill>
+              </a:rPr>
+              <a:t>Lessons for every part of the organization</a:t>
+            </a:r>
+            <a:endParaRPr lang="en-US" sz="3400" dirty="0"/>
+          </a:p>
+        </p:txBody>
+      </p:sp>
+      <p:sp>
+        <p:nvSpPr>
+          <p:cNvPr id="3" name="Text 1"/>
+          <p:cNvSpPr txBox="1"/>
+          <p:nvPr/>
+        </p:nvSpPr>
+        <p:spPr>
+          <a:xfrm>
+            <a:off x="548640" y="1417320"/>
+            <a:ext cx="5394960" cy="502920"/>
+          </a:xfrm>
+          <a:prstGeom prst="rect">
+            <a:avLst/>
+          </a:prstGeom>
+          <a:noFill/>
+          <a:ln/>
+        </p:spPr>
+        <p:txBody>
+          <a:bodyPr wrap="square" lIns="0" tIns="0" rIns="0" bIns="0" rtlCol="0" anchor="ctr"/>
+          <a:lstStyle/>
+          <a:p>
+            <a:pPr indent="0" marL="0">
+              <a:buNone/>
+            </a:pPr>
+            <a:r>
+              <a:rPr lang="en-US" sz="2100" b="1" dirty="0">
+                <a:solidFill>
+                  <a:schemeClr val="accent1"/>
+                </a:solidFill>
+              </a:rPr>
+              <a:t>AI is only as good as its data</a:t>
+            </a:r>
+            <a:endParaRPr lang="en-US" sz="2100" dirty="0"/>
+          </a:p>
+        </p:txBody>
+      </p:sp>
+      <p:sp>
+        <p:nvSpPr>
+          <p:cNvPr id="4" name="Text 2"/>
+          <p:cNvSpPr txBox="1"/>
+          <p:nvPr/>
+        </p:nvSpPr>
+        <p:spPr>
+          <a:xfrm>
+            <a:off x="548640" y="1920240"/>
+            <a:ext cx="5394960" cy="548640"/>
+          </a:xfrm>
+          <a:prstGeom prst="rect">
+            <a:avLst/>
+          </a:prstGeom>
+          <a:noFill/>
+          <a:ln/>
+        </p:spPr>
+        <p:txBody>
+          <a:bodyPr wrap="square" lIns="0" tIns="0" rIns="0" bIns="0" rtlCol="0" anchor="t"/>
+          <a:lstStyle/>
+          <a:p>
+            <a:pPr indent="0" marL="0">
+              <a:buNone/>
+            </a:pPr>
+            <a:r>
+              <a:rPr lang="en-US" sz="1600" dirty="0">
+                <a:solidFill>
+                  <a:schemeClr val="bg2"/>
+                </a:solidFill>
+              </a:rPr>
+              <a:t>Fix data where it is created, not after.</a:t>
+            </a:r>
+            <a:endParaRPr lang="en-US" sz="1600" dirty="0"/>
+          </a:p>
+        </p:txBody>
+      </p:sp>
+      <p:sp>
+        <p:nvSpPr>
+          <p:cNvPr id="5" name="Text 3"/>
+          <p:cNvSpPr txBox="1"/>
+          <p:nvPr/>
+        </p:nvSpPr>
+        <p:spPr>
+          <a:xfrm>
+            <a:off x="6217920" y="1417320"/>
+            <a:ext cx="5394960" cy="502920"/>
+          </a:xfrm>
+          <a:prstGeom prst="rect">
+            <a:avLst/>
+          </a:prstGeom>
+          <a:noFill/>
+          <a:ln/>
+        </p:spPr>
+        <p:txBody>
+          <a:bodyPr wrap="square" lIns="0" tIns="0" rIns="0" bIns="0" rtlCol="0" anchor="ctr"/>
+          <a:lstStyle/>
+          <a:p>
+            <a:pPr indent="0" marL="0">
+              <a:buNone/>
+            </a:pPr>
+            <a:r>
+              <a:rPr lang="en-US" sz="2100" b="1" dirty="0">
+                <a:solidFill>
+                  <a:schemeClr val="accent1"/>
+                </a:solidFill>
+              </a:rPr>
+              <a:t>Failures are silent</a:t>
+            </a:r>
+            <a:endParaRPr lang="en-US" sz="2100" dirty="0"/>
+          </a:p>
+        </p:txBody>
+      </p:sp>
+      <p:sp>
+        <p:nvSpPr>
+          <p:cNvPr id="6" name="Text 4"/>
+          <p:cNvSpPr txBox="1"/>
+          <p:nvPr/>
+        </p:nvSpPr>
+        <p:spPr>
+          <a:xfrm>
+            <a:off x="6217920" y="1920240"/>
+            <a:ext cx="5394960" cy="548640"/>
+          </a:xfrm>
+          <a:prstGeom prst="rect">
+            <a:avLst/>
+          </a:prstGeom>
+          <a:noFill/>
+          <a:ln/>
+        </p:spPr>
+        <p:txBody>
+          <a:bodyPr wrap="square" lIns="0" tIns="0" rIns="0" bIns="0" rtlCol="0" anchor="t"/>
+          <a:lstStyle/>
+          <a:p>
+            <a:pPr indent="0" marL="0">
+              <a:buNone/>
+            </a:pPr>
+            <a:r>
+              <a:rPr lang="en-US" sz="1600" dirty="0">
+                <a:solidFill>
+                  <a:schemeClr val="bg2"/>
+                </a:solidFill>
+              </a:rPr>
+              <a:t>A system can look finished and be wrong. Ask for proof.</a:t>
+            </a:r>
+            <a:endParaRPr lang="en-US" sz="1600" dirty="0"/>
+          </a:p>
+        </p:txBody>
+      </p:sp>
+      <p:sp>
+        <p:nvSpPr>
+          <p:cNvPr id="7" name="Text 5"/>
+          <p:cNvSpPr txBox="1"/>
+          <p:nvPr/>
+        </p:nvSpPr>
+        <p:spPr>
+          <a:xfrm>
+            <a:off x="548640" y="2651760"/>
+            <a:ext cx="5394960" cy="502920"/>
+          </a:xfrm>
+          <a:prstGeom prst="rect">
+            <a:avLst/>
+          </a:prstGeom>
+          <a:noFill/>
+          <a:ln/>
+        </p:spPr>
+        <p:txBody>
+          <a:bodyPr wrap="square" lIns="0" tIns="0" rIns="0" bIns="0" rtlCol="0" anchor="ctr"/>
+          <a:lstStyle/>
+          <a:p>
+            <a:pPr indent="0" marL="0">
+              <a:buNone/>
+            </a:pPr>
+            <a:r>
+              <a:rPr lang="en-US" sz="2100" b="1" dirty="0">
+                <a:solidFill>
+                  <a:schemeClr val="accent1"/>
+                </a:solidFill>
+              </a:rPr>
+              <a:t>Rules beat advice</a:t>
+            </a:r>
+            <a:endParaRPr lang="en-US" sz="2100" dirty="0"/>
+          </a:p>
+        </p:txBody>
+      </p:sp>
+      <p:sp>
+        <p:nvSpPr>
+          <p:cNvPr id="8" name="Text 6"/>
+          <p:cNvSpPr txBox="1"/>
+          <p:nvPr/>
+        </p:nvSpPr>
+        <p:spPr>
+          <a:xfrm>
+            <a:off x="548640" y="3154680"/>
+            <a:ext cx="5394960" cy="548640"/>
+          </a:xfrm>
+          <a:prstGeom prst="rect">
+            <a:avLst/>
+          </a:prstGeom>
+          <a:noFill/>
+          <a:ln/>
+        </p:spPr>
+        <p:txBody>
+          <a:bodyPr wrap="square" lIns="0" tIns="0" rIns="0" bIns="0" rtlCol="0" anchor="t"/>
+          <a:lstStyle/>
+          <a:p>
+            <a:pPr indent="0" marL="0">
+              <a:buNone/>
+            </a:pPr>
+            <a:r>
+              <a:rPr lang="en-US" sz="1600" dirty="0">
+                <a:solidFill>
+                  <a:schemeClr val="bg2"/>
+                </a:solidFill>
+              </a:rPr>
+              <a:t>Build checks into systems instead of writing guidance.</a:t>
+            </a:r>
+            <a:endParaRPr lang="en-US" sz="1600" dirty="0"/>
+          </a:p>
+        </p:txBody>
+      </p:sp>
+      <p:sp>
+        <p:nvSpPr>
+          <p:cNvPr id="9" name="Text 7"/>
+          <p:cNvSpPr txBox="1"/>
+          <p:nvPr/>
+        </p:nvSpPr>
+        <p:spPr>
+          <a:xfrm>
+            <a:off x="6217920" y="2651760"/>
+            <a:ext cx="5394960" cy="502920"/>
+          </a:xfrm>
+          <a:prstGeom prst="rect">
+            <a:avLst/>
+          </a:prstGeom>
+          <a:noFill/>
+          <a:ln/>
+        </p:spPr>
+        <p:txBody>
+          <a:bodyPr wrap="square" lIns="0" tIns="0" rIns="0" bIns="0" rtlCol="0" anchor="ctr"/>
+          <a:lstStyle/>
+          <a:p>
+            <a:pPr indent="0" marL="0">
+              <a:buNone/>
+            </a:pPr>
+            <a:r>
+              <a:rPr lang="en-US" sz="2100" b="1" dirty="0">
+                <a:solidFill>
+                  <a:schemeClr val="accent1"/>
+                </a:solidFill>
+              </a:rPr>
+              <a:t>Small habits add up</a:t>
+            </a:r>
+            <a:endParaRPr lang="en-US" sz="2100" dirty="0"/>
+          </a:p>
+        </p:txBody>
+      </p:sp>
+      <p:sp>
+        <p:nvSpPr>
+          <p:cNvPr id="10" name="Text 8"/>
+          <p:cNvSpPr txBox="1"/>
+          <p:nvPr/>
+        </p:nvSpPr>
+        <p:spPr>
+          <a:xfrm>
+            <a:off x="6217920" y="3154680"/>
+            <a:ext cx="5394960" cy="548640"/>
+          </a:xfrm>
+          <a:prstGeom prst="rect">
+            <a:avLst/>
+          </a:prstGeom>
+          <a:noFill/>
+          <a:ln/>
+        </p:spPr>
+        <p:txBody>
+          <a:bodyPr wrap="square" lIns="0" tIns="0" rIns="0" bIns="0" rtlCol="0" anchor="t"/>
+          <a:lstStyle/>
+          <a:p>
+            <a:pPr indent="0" marL="0">
+              <a:buNone/>
+            </a:pPr>
+            <a:r>
+              <a:rPr lang="en-US" sz="1600" dirty="0">
+                <a:solidFill>
+                  <a:schemeClr val="bg2"/>
+                </a:solidFill>
+              </a:rPr>
+              <a:t>Printing to sign made nearly half the problem.</a:t>
+            </a:r>
+            <a:endParaRPr lang="en-US" sz="1600" dirty="0"/>
+          </a:p>
+        </p:txBody>
+      </p:sp>
+      <p:sp>
+        <p:nvSpPr>
+          <p:cNvPr id="11" name="Shape 9"/>
+          <p:cNvSpPr/>
+          <p:nvPr/>
+        </p:nvSpPr>
+        <p:spPr>
+          <a:xfrm>
+            <a:off x="548640" y="3977640"/>
+            <a:ext cx="11064240" cy="2194560"/>
+          </a:xfrm>
+          <a:prstGeom prst="roundRect">
+            <a:avLst>
+              <a:gd name="adj" fmla="val 6250"/>
+            </a:avLst>
+          </a:prstGeom>
+          <a:solidFill>
+            <a:schemeClr val="bg1"/>
+          </a:solidFill>
+          <a:ln/>
+        </p:spPr>
+      </p:sp>
+      <p:sp>
+        <p:nvSpPr>
+          <p:cNvPr id="12" name="Text 10"/>
+          <p:cNvSpPr txBox="1"/>
+          <p:nvPr/>
+        </p:nvSpPr>
+        <p:spPr>
+          <a:xfrm>
+            <a:off x="868680" y="4160520"/>
+            <a:ext cx="10424160" cy="457200"/>
+          </a:xfrm>
+          <a:prstGeom prst="rect">
+            <a:avLst/>
+          </a:prstGeom>
+          <a:noFill/>
+          <a:ln/>
+        </p:spPr>
+        <p:txBody>
+          <a:bodyPr wrap="square" lIns="0" tIns="0" rIns="0" bIns="0" rtlCol="0" anchor="ctr"/>
+          <a:lstStyle/>
+          <a:p>
+            <a:pPr indent="0" marL="0">
+              <a:buNone/>
+            </a:pPr>
+            <a:r>
+              <a:rPr lang="en-US" sz="2000" b="1" dirty="0">
+                <a:solidFill>
                   <a:schemeClr val="tx2"/>
                 </a:solidFill>
               </a:rPr>
-              <a:t>Sources</a:t>
-            </a:r>
-            <a:endParaRPr lang="en-US" sz="3400" dirty="0"/>
-          </a:p>
-        </p:txBody>
-      </p:sp>
-      <p:sp>
-        <p:nvSpPr>
-          <p:cNvPr id="3" name="Text 1"/>
-          <p:cNvSpPr txBox="1"/>
-          <p:nvPr/>
-        </p:nvSpPr>
-        <p:spPr>
-          <a:xfrm>
-            <a:off x="548640" y="1371600"/>
-            <a:ext cx="3291840" cy="640080"/>
+              <a:t>What we are asking for</a:t>
+            </a:r>
+            <a:endParaRPr lang="en-US" sz="2000" dirty="0"/>
+          </a:p>
+        </p:txBody>
+      </p:sp>
+      <p:sp>
+        <p:nvSpPr>
+          <p:cNvPr id="13" name="Text 11"/>
+          <p:cNvSpPr txBox="1"/>
+          <p:nvPr/>
+        </p:nvSpPr>
+        <p:spPr>
+          <a:xfrm>
+            <a:off x="868680" y="4617720"/>
+            <a:ext cx="10424160" cy="1463040"/>
           </a:xfrm>
           <a:prstGeom prst="rect">
             <a:avLst/>
@@ -6202,378 +6760,58 @@
           <a:bodyPr wrap="square" lIns="0" tIns="0" rIns="0" bIns="0" rtlCol="0" anchor="t"/>
           <a:lstStyle/>
           <a:p>
-            <a:pPr indent="0" marL="0">
-              <a:buNone/>
-            </a:pPr>
-            <a:r>
-              <a:rPr lang="en-US" sz="1300" b="1" dirty="0">
-                <a:solidFill>
-                  <a:schemeClr val="tx2"/>
-                </a:solidFill>
-              </a:rPr>
-              <a:t>Our record</a:t>
-            </a:r>
-            <a:endParaRPr lang="en-US" sz="1300" dirty="0"/>
-          </a:p>
-        </p:txBody>
-      </p:sp>
-      <p:sp>
-        <p:nvSpPr>
-          <p:cNvPr id="4" name="Text 2"/>
-          <p:cNvSpPr txBox="1"/>
-          <p:nvPr/>
-        </p:nvSpPr>
-        <p:spPr>
-          <a:xfrm>
-            <a:off x="4023360" y="1371600"/>
-            <a:ext cx="7589520" cy="640080"/>
-          </a:xfrm>
-          <a:prstGeom prst="rect">
-            <a:avLst/>
-          </a:prstGeom>
-          <a:noFill/>
-          <a:ln/>
-        </p:spPr>
-        <p:txBody>
-          <a:bodyPr wrap="square" lIns="0" tIns="0" rIns="0" bIns="0" rtlCol="0" anchor="t"/>
-          <a:lstStyle/>
-          <a:p>
-            <a:pPr indent="0" marL="0">
-              <a:buNone/>
-            </a:pPr>
-            <a:r>
-              <a:rPr lang="en-US" sz="1300" dirty="0">
+            <a:pPr marL="342900" indent="-342900">
+              <a:spcAft>
+                <a:spcPts val="600"/>
+              </a:spcAft>
+              <a:buSzPct val="100000"/>
+              <a:buChar char="•"/>
+            </a:pPr>
+            <a:r>
+              <a:rPr lang="en-US" sz="1700" dirty="0">
                 <a:solidFill>
                   <a:schemeClr val="tx1"/>
                 </a:solidFill>
               </a:rPr>
-              <a:t>Every PDF in REGDOCS read page by page, October 2026: 269,025 documents. Reports and code in the cer-regdocs5 project (census, integrity pass, filing guidance).</a:t>
-            </a:r>
-            <a:endParaRPr lang="en-US" sz="1300" dirty="0"/>
-          </a:p>
-        </p:txBody>
-      </p:sp>
-      <p:sp>
-        <p:nvSpPr>
-          <p:cNvPr id="5" name="Text 3"/>
-          <p:cNvSpPr txBox="1"/>
-          <p:nvPr/>
-        </p:nvSpPr>
-        <p:spPr>
-          <a:xfrm>
-            <a:off x="548640" y="2057400"/>
-            <a:ext cx="3291840" cy="640080"/>
-          </a:xfrm>
-          <a:prstGeom prst="rect">
-            <a:avLst/>
-          </a:prstGeom>
-          <a:noFill/>
-          <a:ln/>
-        </p:spPr>
-        <p:txBody>
-          <a:bodyPr wrap="square" lIns="0" tIns="0" rIns="0" bIns="0" rtlCol="0" anchor="t"/>
-          <a:lstStyle/>
-          <a:p>
-            <a:pPr indent="0" marL="0">
-              <a:buNone/>
-            </a:pPr>
-            <a:r>
-              <a:rPr lang="en-US" sz="1300" b="1" dirty="0">
-                <a:solidFill>
-                  <a:schemeClr val="tx2"/>
-                </a:solidFill>
-              </a:rPr>
-              <a:t>UK Local Government Association</a:t>
-            </a:r>
-            <a:endParaRPr lang="en-US" sz="1300" dirty="0"/>
-          </a:p>
-        </p:txBody>
-      </p:sp>
-      <p:sp>
-        <p:nvSpPr>
-          <p:cNvPr id="6" name="Text 4"/>
-          <p:cNvSpPr txBox="1"/>
-          <p:nvPr/>
-        </p:nvSpPr>
-        <p:spPr>
-          <a:xfrm>
-            <a:off x="4023360" y="2057400"/>
-            <a:ext cx="7589520" cy="640080"/>
-          </a:xfrm>
-          <a:prstGeom prst="rect">
-            <a:avLst/>
-          </a:prstGeom>
-          <a:noFill/>
-          <a:ln/>
-        </p:spPr>
-        <p:txBody>
-          <a:bodyPr wrap="square" lIns="0" tIns="0" rIns="0" bIns="0" rtlCol="0" anchor="t"/>
-          <a:lstStyle/>
-          <a:p>
-            <a:pPr indent="0" marL="0">
-              <a:buNone/>
-            </a:pPr>
-            <a:r>
-              <a:rPr lang="en-US" sz="1300" dirty="0">
+              <a:t>Stand up an AI build team and a cloud strategy, with an executive sponsor</a:t>
+            </a:r>
+            <a:endParaRPr lang="en-US" sz="1700" dirty="0"/>
+          </a:p>
+          <a:p>
+            <a:pPr marL="342900" indent="-342900">
+              <a:spcAft>
+                <a:spcPts val="600"/>
+              </a:spcAft>
+              <a:buSzPct val="100000"/>
+              <a:buChar char="•"/>
+            </a:pPr>
+            <a:r>
+              <a:rPr lang="en-US" sz="1700" dirty="0">
                 <a:solidFill>
                   <a:schemeClr val="tx1"/>
                 </a:solidFill>
               </a:rPr>
-              <a:t>A playbook for agentic AI in local government, 9 October 2026. local.gov.uk/publications/playbook-agentic-ai-local-government</a:t>
-            </a:r>
-            <a:endParaRPr lang="en-US" sz="1300" dirty="0"/>
-          </a:p>
-        </p:txBody>
-      </p:sp>
-      <p:sp>
-        <p:nvSpPr>
-          <p:cNvPr id="7" name="Text 5"/>
-          <p:cNvSpPr txBox="1"/>
-          <p:nvPr/>
-        </p:nvSpPr>
-        <p:spPr>
-          <a:xfrm>
-            <a:off x="548640" y="2743200"/>
-            <a:ext cx="3291840" cy="640080"/>
-          </a:xfrm>
-          <a:prstGeom prst="rect">
-            <a:avLst/>
-          </a:prstGeom>
-          <a:noFill/>
-          <a:ln/>
-        </p:spPr>
-        <p:txBody>
-          <a:bodyPr wrap="square" lIns="0" tIns="0" rIns="0" bIns="0" rtlCol="0" anchor="t"/>
-          <a:lstStyle/>
-          <a:p>
-            <a:pPr indent="0" marL="0">
-              <a:buNone/>
-            </a:pPr>
-            <a:r>
-              <a:rPr lang="en-US" sz="1300" b="1" dirty="0">
-                <a:solidFill>
-                  <a:schemeClr val="tx2"/>
-                </a:solidFill>
-              </a:rPr>
-              <a:t>Cyber security agencies incl. the Canadian Centre for Cyber Security</a:t>
-            </a:r>
-            <a:endParaRPr lang="en-US" sz="1300" dirty="0"/>
-          </a:p>
-        </p:txBody>
-      </p:sp>
-      <p:sp>
-        <p:nvSpPr>
-          <p:cNvPr id="8" name="Text 6"/>
-          <p:cNvSpPr txBox="1"/>
-          <p:nvPr/>
-        </p:nvSpPr>
-        <p:spPr>
-          <a:xfrm>
-            <a:off x="4023360" y="2743200"/>
-            <a:ext cx="7589520" cy="640080"/>
-          </a:xfrm>
-          <a:prstGeom prst="rect">
-            <a:avLst/>
-          </a:prstGeom>
-          <a:noFill/>
-          <a:ln/>
-        </p:spPr>
-        <p:txBody>
-          <a:bodyPr wrap="square" lIns="0" tIns="0" rIns="0" bIns="0" rtlCol="0" anchor="t"/>
-          <a:lstStyle/>
-          <a:p>
-            <a:pPr indent="0" marL="0">
-              <a:buNone/>
-            </a:pPr>
-            <a:r>
-              <a:rPr lang="en-US" sz="1300" dirty="0">
+              <a:t>Change our filing rules and portal through the Rules of Practice review already under way</a:t>
+            </a:r>
+            <a:endParaRPr lang="en-US" sz="1700" dirty="0"/>
+          </a:p>
+          <a:p>
+            <a:pPr marL="342900" indent="-342900">
+              <a:spcAft>
+                <a:spcPts val="600"/>
+              </a:spcAft>
+              <a:buSzPct val="100000"/>
+              <a:buChar char="•"/>
+            </a:pPr>
+            <a:r>
+              <a:rPr lang="en-US" sz="1700" dirty="0">
                 <a:solidFill>
                   <a:schemeClr val="tx1"/>
                 </a:solidFill>
               </a:rPr>
-              <a:t>Careful adoption of agentic AI services, 1 May 2026. cyber.gov.au (secure design: artificial intelligence)</a:t>
-            </a:r>
-            <a:endParaRPr lang="en-US" sz="1300" dirty="0"/>
-          </a:p>
-        </p:txBody>
-      </p:sp>
-      <p:sp>
-        <p:nvSpPr>
-          <p:cNvPr id="9" name="Text 7"/>
-          <p:cNvSpPr txBox="1"/>
-          <p:nvPr/>
-        </p:nvSpPr>
-        <p:spPr>
-          <a:xfrm>
-            <a:off x="548640" y="3429000"/>
-            <a:ext cx="3291840" cy="640080"/>
-          </a:xfrm>
-          <a:prstGeom prst="rect">
-            <a:avLst/>
-          </a:prstGeom>
-          <a:noFill/>
-          <a:ln/>
-        </p:spPr>
-        <p:txBody>
-          <a:bodyPr wrap="square" lIns="0" tIns="0" rIns="0" bIns="0" rtlCol="0" anchor="t"/>
-          <a:lstStyle/>
-          <a:p>
-            <a:pPr indent="0" marL="0">
-              <a:buNone/>
-            </a:pPr>
-            <a:r>
-              <a:rPr lang="en-US" sz="1300" b="1" dirty="0">
-                <a:solidFill>
-                  <a:schemeClr val="tx2"/>
-                </a:solidFill>
-              </a:rPr>
-              <a:t>Government of Canada</a:t>
-            </a:r>
-            <a:endParaRPr lang="en-US" sz="1300" dirty="0"/>
-          </a:p>
-        </p:txBody>
-      </p:sp>
-      <p:sp>
-        <p:nvSpPr>
-          <p:cNvPr id="10" name="Text 8"/>
-          <p:cNvSpPr txBox="1"/>
-          <p:nvPr/>
-        </p:nvSpPr>
-        <p:spPr>
-          <a:xfrm>
-            <a:off x="4023360" y="3429000"/>
-            <a:ext cx="7589520" cy="640080"/>
-          </a:xfrm>
-          <a:prstGeom prst="rect">
-            <a:avLst/>
-          </a:prstGeom>
-          <a:noFill/>
-          <a:ln/>
-        </p:spPr>
-        <p:txBody>
-          <a:bodyPr wrap="square" lIns="0" tIns="0" rIns="0" bIns="0" rtlCol="0" anchor="t"/>
-          <a:lstStyle/>
-          <a:p>
-            <a:pPr indent="0" marL="0">
-              <a:buNone/>
-            </a:pPr>
-            <a:r>
-              <a:rPr lang="en-US" sz="1300" dirty="0">
-                <a:solidFill>
-                  <a:schemeClr val="tx1"/>
-                </a:solidFill>
-              </a:rPr>
-              <a:t>AI Strategy for the Federal Public Service 2025–2027. canada.ca/en/government/system/digital-government/digital-government-innovations/responsible-use-ai</a:t>
-            </a:r>
-            <a:endParaRPr lang="en-US" sz="1300" dirty="0"/>
-          </a:p>
-        </p:txBody>
-      </p:sp>
-      <p:sp>
-        <p:nvSpPr>
-          <p:cNvPr id="11" name="Text 9"/>
-          <p:cNvSpPr txBox="1"/>
-          <p:nvPr/>
-        </p:nvSpPr>
-        <p:spPr>
-          <a:xfrm>
-            <a:off x="548640" y="4114800"/>
-            <a:ext cx="3291840" cy="640080"/>
-          </a:xfrm>
-          <a:prstGeom prst="rect">
-            <a:avLst/>
-          </a:prstGeom>
-          <a:noFill/>
-          <a:ln/>
-        </p:spPr>
-        <p:txBody>
-          <a:bodyPr wrap="square" lIns="0" tIns="0" rIns="0" bIns="0" rtlCol="0" anchor="t"/>
-          <a:lstStyle/>
-          <a:p>
-            <a:pPr indent="0" marL="0">
-              <a:buNone/>
-            </a:pPr>
-            <a:r>
-              <a:rPr lang="en-US" sz="1300" b="1" dirty="0">
-                <a:solidFill>
-                  <a:schemeClr val="tx2"/>
-                </a:solidFill>
-              </a:rPr>
-              <a:t>BC Energy Regulator</a:t>
-            </a:r>
-            <a:endParaRPr lang="en-US" sz="1300" dirty="0"/>
-          </a:p>
-        </p:txBody>
-      </p:sp>
-      <p:sp>
-        <p:nvSpPr>
-          <p:cNvPr id="12" name="Text 10"/>
-          <p:cNvSpPr txBox="1"/>
-          <p:nvPr/>
-        </p:nvSpPr>
-        <p:spPr>
-          <a:xfrm>
-            <a:off x="4023360" y="4114800"/>
-            <a:ext cx="7589520" cy="640080"/>
-          </a:xfrm>
-          <a:prstGeom prst="rect">
-            <a:avLst/>
-          </a:prstGeom>
-          <a:noFill/>
-          <a:ln/>
-        </p:spPr>
-        <p:txBody>
-          <a:bodyPr wrap="square" lIns="0" tIns="0" rIns="0" bIns="0" rtlCol="0" anchor="t"/>
-          <a:lstStyle/>
-          <a:p>
-            <a:pPr indent="0" marL="0">
-              <a:buNone/>
-            </a:pPr>
-            <a:r>
-              <a:rPr lang="en-US" sz="1300" dirty="0">
-                <a:solidFill>
-                  <a:schemeClr val="tx1"/>
-                </a:solidFill>
-              </a:rPr>
-              <a:t>AI enhancement services for permit automation, CanadaBuys tender BC231865, July 2026.</a:t>
-            </a:r>
-            <a:endParaRPr lang="en-US" sz="1300" dirty="0"/>
-          </a:p>
-        </p:txBody>
-      </p:sp>
-      <p:sp>
-        <p:nvSpPr>
-          <p:cNvPr id="13" name="Text 11"/>
-          <p:cNvSpPr txBox="1"/>
-          <p:nvPr/>
-        </p:nvSpPr>
-        <p:spPr>
-          <a:xfrm>
-            <a:off x="548640" y="4800600"/>
-            <a:ext cx="3291840" cy="640080"/>
-          </a:xfrm>
-          <a:prstGeom prst="rect">
-            <a:avLst/>
-          </a:prstGeom>
-          <a:noFill/>
-          <a:ln/>
-        </p:spPr>
-        <p:txBody>
-          <a:bodyPr wrap="square" lIns="0" tIns="0" rIns="0" bIns="0" rtlCol="0" anchor="t"/>
-          <a:lstStyle/>
-          <a:p>
-            <a:pPr indent="0" marL="0">
-              <a:buNone/>
-            </a:pPr>
-            <a:r>
-              <a:rPr lang="en-US" sz="1300" b="1" dirty="0">
-                <a:solidFill>
-                  <a:schemeClr val="tx2"/>
-                </a:solidFill>
-              </a:rPr>
-              <a:t>Alberta Energy Regulator</a:t>
-            </a:r>
-            <a:endParaRPr lang="en-US" sz="1300" dirty="0"/>
+              <a:t>Start now with two quick wins: the automatic upload check, and a privacy review of flawed redactions</a:t>
+            </a:r>
+            <a:endParaRPr lang="en-US" sz="1700" dirty="0"/>
           </a:p>
         </p:txBody>
       </p:sp>
@@ -6585,103 +6823,31 @@
         </p:nvSpPr>
         <p:spPr>
           <a:xfrm>
-            <a:off x="4023360" y="4800600"/>
-            <a:ext cx="7589520" cy="640080"/>
-          </a:xfrm>
-          <a:prstGeom prst="rect">
-            <a:avLst/>
-          </a:prstGeom>
-          <a:noFill/>
-          <a:ln/>
-        </p:spPr>
-        <p:txBody>
-          <a:bodyPr wrap="square" lIns="0" tIns="0" rIns="0" bIns="0" rtlCol="0" anchor="t"/>
-          <a:lstStyle/>
-          <a:p>
-            <a:pPr indent="0" marL="0">
-              <a:buNone/>
-            </a:pPr>
-            <a:r>
-              <a:rPr lang="en-US" sz="1300" dirty="0">
-                <a:solidFill>
-                  <a:schemeClr val="tx1"/>
-                </a:solidFill>
-              </a:rPr>
-              <a:t>OneStop results as reported by IT World Canada (itbusiness.ca), citing the AER 2017/18 annual report.</a:t>
-            </a:r>
-            <a:endParaRPr lang="en-US" sz="1300" dirty="0"/>
-          </a:p>
-        </p:txBody>
-      </p:sp>
-      <p:sp>
-        <p:nvSpPr>
-          <p:cNvPr id="15" name="Text 13"/>
-          <p:cNvSpPr txBox="1"/>
-          <p:nvPr/>
-        </p:nvSpPr>
-        <p:spPr>
-          <a:xfrm>
-            <a:off x="548640" y="5486400"/>
-            <a:ext cx="3291840" cy="640080"/>
-          </a:xfrm>
-          <a:prstGeom prst="rect">
-            <a:avLst/>
-          </a:prstGeom>
-          <a:noFill/>
-          <a:ln/>
-        </p:spPr>
-        <p:txBody>
-          <a:bodyPr wrap="square" lIns="0" tIns="0" rIns="0" bIns="0" rtlCol="0" anchor="t"/>
-          <a:lstStyle/>
-          <a:p>
-            <a:pPr indent="0" marL="0">
-              <a:buNone/>
-            </a:pPr>
-            <a:r>
-              <a:rPr lang="en-US" sz="1300" b="1" dirty="0">
-                <a:solidFill>
-                  <a:schemeClr val="tx2"/>
-                </a:solidFill>
-              </a:rPr>
-              <a:t>Canada Energy Regulator</a:t>
-            </a:r>
-            <a:endParaRPr lang="en-US" sz="1300" dirty="0"/>
-          </a:p>
-        </p:txBody>
-      </p:sp>
-      <p:sp>
-        <p:nvSpPr>
-          <p:cNvPr id="16" name="Text 14"/>
-          <p:cNvSpPr txBox="1"/>
-          <p:nvPr/>
-        </p:nvSpPr>
-        <p:spPr>
-          <a:xfrm>
-            <a:off x="4023360" y="5486400"/>
-            <a:ext cx="7589520" cy="640080"/>
-          </a:xfrm>
-          <a:prstGeom prst="rect">
-            <a:avLst/>
-          </a:prstGeom>
-          <a:noFill/>
-          <a:ln/>
-        </p:spPr>
-        <p:txBody>
-          <a:bodyPr wrap="square" lIns="0" tIns="0" rIns="0" bIns="0" rtlCol="0" anchor="t"/>
-          <a:lstStyle/>
-          <a:p>
-            <a:pPr indent="0" marL="0">
-              <a:buNone/>
-            </a:pPr>
-            <a:r>
-              <a:rPr lang="en-US" sz="1300" dirty="0">
-                <a:solidFill>
-                  <a:schemeClr val="tx1"/>
-                </a:solidFill>
-              </a:rPr>
-              <a:t>Filer’s Guide to Electronic Submission (June 2025); Filing Manual, chapter 1 (July 2025); Strategic Plan 2024–2027; Rules of Practice and Procedure review (2024–).</a:t>
-            </a:r>
-            <a:endParaRPr lang="en-US" sz="1300" dirty="0"/>
+            <a:off x="548640" y="6263640"/>
+            <a:ext cx="10424160" cy="365760"/>
+          </a:xfrm>
+          <a:prstGeom prst="rect">
+            <a:avLst/>
+          </a:prstGeom>
+          <a:noFill/>
+          <a:ln/>
+        </p:spPr>
+        <p:txBody>
+          <a:bodyPr wrap="square" lIns="0" tIns="0" rIns="0" bIns="0" rtlCol="0" anchor="ctr"/>
+          <a:lstStyle/>
+          <a:p>
+            <a:pPr indent="0" marL="0">
+              <a:buNone/>
+            </a:pPr>
+            <a:r>
+              <a:rPr lang="en-US" sz="1200" i="1" dirty="0">
+                <a:solidFill>
+                  <a:schemeClr val="bg2"/>
+                </a:solidFill>
+              </a:rPr>
+              <a:t>“Agentic AI is not primarily a technology challenge.”  — UK Local Government Association, 2026</a:t>
+            </a:r>
+            <a:endParaRPr lang="en-US" sz="1200" dirty="0"/>
           </a:p>
         </p:txBody>
       </p:sp>
@@ -6715,7 +6881,7 @@
             <a:lvl1pPr>
               <a:defRPr sz="1000">
                 <a:solidFill>
-                  <a:schemeClr val="accent3"/>
+                  <a:schemeClr val="bg2"/>
                 </a:solidFill>
               </a:defRPr>
             </a:lvl1pPr>
@@ -6725,6 +6891,618 @@
             <a:fld id="{F7021451-1387-4CA6-816F-3879F97B5CBC}" type="slidenum">
               <a:rPr b="0" lang="en-US"/>
               <a:t>14</a:t>
+            </a:fld>
+            <a:endParaRPr lang="en-US"/>
+          </a:p>
+        </p:txBody>
+      </p:sp>
+    </p:spTree>
+  </p:cSld>
+  <p:clrMapOvr>
+    <a:masterClrMapping/>
+  </p:clrMapOvr>
+</p:sld>
+</file>
+
+<file path=ppt/slides/slide15.xml><?xml version="1.0" encoding="utf-8"?>
+<p:sld xmlns:a="http://schemas.openxmlformats.org/drawingml/2006/main" xmlns:r="http://schemas.openxmlformats.org/officeDocument/2006/relationships" xmlns:p="http://schemas.openxmlformats.org/presentationml/2006/main">
+  <p:cSld name="Slide 15">
+    <p:spTree>
+      <p:nvGrpSpPr>
+        <p:cNvPr id="1" name=""/>
+        <p:cNvGrpSpPr/>
+        <p:nvPr/>
+      </p:nvGrpSpPr>
+      <p:grpSpPr>
+        <a:xfrm>
+          <a:off x="0" y="0"/>
+          <a:ext cx="0" cy="0"/>
+          <a:chOff x="0" y="0"/>
+          <a:chExt cx="0" cy="0"/>
+        </a:xfrm>
+      </p:grpSpPr>
+      <p:sp>
+        <p:nvSpPr>
+          <p:cNvPr id="2" name="Text 0"/>
+          <p:cNvSpPr/>
+          <p:nvPr>
+            <p:ph idx="100" type="title" hasCustomPrompt="1"/>
+          </p:nvPr>
+        </p:nvSpPr>
+        <p:spPr>
+          <a:xfrm>
+            <a:off x="548640" y="365760"/>
+            <a:ext cx="11064240" cy="822960"/>
+          </a:xfrm>
+          <a:prstGeom prst="rect">
+            <a:avLst/>
+          </a:prstGeom>
+          <a:noFill/>
+          <a:ln/>
+        </p:spPr>
+        <p:txBody>
+          <a:bodyPr wrap="square" lIns="0" tIns="0" rIns="0" bIns="0" rtlCol="0" anchor="ctr"/>
+          <a:lstStyle/>
+          <a:p>
+            <a:pPr indent="0" marL="0">
+              <a:buNone/>
+            </a:pPr>
+            <a:r>
+              <a:rPr lang="en-US" sz="3400" b="1" dirty="0">
+                <a:solidFill>
+                  <a:schemeClr val="tx2"/>
+                </a:solidFill>
+              </a:rPr>
+              <a:t>Sources</a:t>
+            </a:r>
+            <a:endParaRPr lang="en-US" sz="3400" dirty="0"/>
+          </a:p>
+        </p:txBody>
+      </p:sp>
+      <p:sp>
+        <p:nvSpPr>
+          <p:cNvPr id="3" name="Text 1"/>
+          <p:cNvSpPr txBox="1"/>
+          <p:nvPr/>
+        </p:nvSpPr>
+        <p:spPr>
+          <a:xfrm>
+            <a:off x="548640" y="1371600"/>
+            <a:ext cx="3291840" cy="640080"/>
+          </a:xfrm>
+          <a:prstGeom prst="rect">
+            <a:avLst/>
+          </a:prstGeom>
+          <a:noFill/>
+          <a:ln/>
+        </p:spPr>
+        <p:txBody>
+          <a:bodyPr wrap="square" lIns="0" tIns="0" rIns="0" bIns="0" rtlCol="0" anchor="t"/>
+          <a:lstStyle/>
+          <a:p>
+            <a:pPr indent="0" marL="0">
+              <a:buNone/>
+            </a:pPr>
+            <a:r>
+              <a:rPr lang="en-US" sz="1300" b="1" dirty="0">
+                <a:solidFill>
+                  <a:schemeClr val="tx2"/>
+                </a:solidFill>
+              </a:rPr>
+              <a:t>Our record</a:t>
+            </a:r>
+            <a:endParaRPr lang="en-US" sz="1300" dirty="0"/>
+          </a:p>
+        </p:txBody>
+      </p:sp>
+      <p:sp>
+        <p:nvSpPr>
+          <p:cNvPr id="4" name="Text 2"/>
+          <p:cNvSpPr txBox="1"/>
+          <p:nvPr/>
+        </p:nvSpPr>
+        <p:spPr>
+          <a:xfrm>
+            <a:off x="4023360" y="1371600"/>
+            <a:ext cx="7589520" cy="640080"/>
+          </a:xfrm>
+          <a:prstGeom prst="rect">
+            <a:avLst/>
+          </a:prstGeom>
+          <a:noFill/>
+          <a:ln/>
+        </p:spPr>
+        <p:txBody>
+          <a:bodyPr wrap="square" lIns="0" tIns="0" rIns="0" bIns="0" rtlCol="0" anchor="t"/>
+          <a:lstStyle/>
+          <a:p>
+            <a:pPr indent="0" marL="0">
+              <a:buNone/>
+            </a:pPr>
+            <a:r>
+              <a:rPr lang="en-US" sz="1300" dirty="0">
+                <a:solidFill>
+                  <a:schemeClr val="tx1"/>
+                </a:solidFill>
+              </a:rPr>
+              <a:t>Every PDF in REGDOCS read page by page, October 2026: 269,025 documents. Reports and code in the cer-regdocs5 project (census, integrity pass, filing guidance).</a:t>
+            </a:r>
+            <a:endParaRPr lang="en-US" sz="1300" dirty="0"/>
+          </a:p>
+        </p:txBody>
+      </p:sp>
+      <p:sp>
+        <p:nvSpPr>
+          <p:cNvPr id="5" name="Text 3"/>
+          <p:cNvSpPr txBox="1"/>
+          <p:nvPr/>
+        </p:nvSpPr>
+        <p:spPr>
+          <a:xfrm>
+            <a:off x="548640" y="2057400"/>
+            <a:ext cx="3291840" cy="640080"/>
+          </a:xfrm>
+          <a:prstGeom prst="rect">
+            <a:avLst/>
+          </a:prstGeom>
+          <a:noFill/>
+          <a:ln/>
+        </p:spPr>
+        <p:txBody>
+          <a:bodyPr wrap="square" lIns="0" tIns="0" rIns="0" bIns="0" rtlCol="0" anchor="t"/>
+          <a:lstStyle/>
+          <a:p>
+            <a:pPr indent="0" marL="0">
+              <a:buNone/>
+            </a:pPr>
+            <a:r>
+              <a:rPr lang="en-US" sz="1300" b="1" dirty="0">
+                <a:solidFill>
+                  <a:schemeClr val="tx2"/>
+                </a:solidFill>
+              </a:rPr>
+              <a:t>UK Local Government Association</a:t>
+            </a:r>
+            <a:endParaRPr lang="en-US" sz="1300" dirty="0"/>
+          </a:p>
+        </p:txBody>
+      </p:sp>
+      <p:sp>
+        <p:nvSpPr>
+          <p:cNvPr id="6" name="Text 4"/>
+          <p:cNvSpPr txBox="1"/>
+          <p:nvPr/>
+        </p:nvSpPr>
+        <p:spPr>
+          <a:xfrm>
+            <a:off x="4023360" y="2057400"/>
+            <a:ext cx="7589520" cy="640080"/>
+          </a:xfrm>
+          <a:prstGeom prst="rect">
+            <a:avLst/>
+          </a:prstGeom>
+          <a:noFill/>
+          <a:ln/>
+        </p:spPr>
+        <p:txBody>
+          <a:bodyPr wrap="square" lIns="0" tIns="0" rIns="0" bIns="0" rtlCol="0" anchor="t"/>
+          <a:lstStyle/>
+          <a:p>
+            <a:pPr indent="0" marL="0">
+              <a:buNone/>
+            </a:pPr>
+            <a:r>
+              <a:rPr lang="en-US" sz="1300" dirty="0">
+                <a:solidFill>
+                  <a:schemeClr val="tx1"/>
+                </a:solidFill>
+              </a:rPr>
+              <a:t>A playbook for agentic AI in local government, 9 October 2026. local.gov.uk/publications/playbook-agentic-ai-local-government</a:t>
+            </a:r>
+            <a:endParaRPr lang="en-US" sz="1300" dirty="0"/>
+          </a:p>
+        </p:txBody>
+      </p:sp>
+      <p:sp>
+        <p:nvSpPr>
+          <p:cNvPr id="7" name="Text 5"/>
+          <p:cNvSpPr txBox="1"/>
+          <p:nvPr/>
+        </p:nvSpPr>
+        <p:spPr>
+          <a:xfrm>
+            <a:off x="548640" y="2743200"/>
+            <a:ext cx="3291840" cy="640080"/>
+          </a:xfrm>
+          <a:prstGeom prst="rect">
+            <a:avLst/>
+          </a:prstGeom>
+          <a:noFill/>
+          <a:ln/>
+        </p:spPr>
+        <p:txBody>
+          <a:bodyPr wrap="square" lIns="0" tIns="0" rIns="0" bIns="0" rtlCol="0" anchor="t"/>
+          <a:lstStyle/>
+          <a:p>
+            <a:pPr indent="0" marL="0">
+              <a:buNone/>
+            </a:pPr>
+            <a:r>
+              <a:rPr lang="en-US" sz="1300" b="1" dirty="0">
+                <a:solidFill>
+                  <a:schemeClr val="tx2"/>
+                </a:solidFill>
+              </a:rPr>
+              <a:t>Cyber security agencies incl. the Canadian Centre for Cyber Security</a:t>
+            </a:r>
+            <a:endParaRPr lang="en-US" sz="1300" dirty="0"/>
+          </a:p>
+        </p:txBody>
+      </p:sp>
+      <p:sp>
+        <p:nvSpPr>
+          <p:cNvPr id="8" name="Text 6"/>
+          <p:cNvSpPr txBox="1"/>
+          <p:nvPr/>
+        </p:nvSpPr>
+        <p:spPr>
+          <a:xfrm>
+            <a:off x="4023360" y="2743200"/>
+            <a:ext cx="7589520" cy="640080"/>
+          </a:xfrm>
+          <a:prstGeom prst="rect">
+            <a:avLst/>
+          </a:prstGeom>
+          <a:noFill/>
+          <a:ln/>
+        </p:spPr>
+        <p:txBody>
+          <a:bodyPr wrap="square" lIns="0" tIns="0" rIns="0" bIns="0" rtlCol="0" anchor="t"/>
+          <a:lstStyle/>
+          <a:p>
+            <a:pPr indent="0" marL="0">
+              <a:buNone/>
+            </a:pPr>
+            <a:r>
+              <a:rPr lang="en-US" sz="1300" dirty="0">
+                <a:solidFill>
+                  <a:schemeClr val="tx1"/>
+                </a:solidFill>
+              </a:rPr>
+              <a:t>Careful adoption of agentic AI services, 1 May 2026. cyber.gov.au (secure design: artificial intelligence)</a:t>
+            </a:r>
+            <a:endParaRPr lang="en-US" sz="1300" dirty="0"/>
+          </a:p>
+        </p:txBody>
+      </p:sp>
+      <p:sp>
+        <p:nvSpPr>
+          <p:cNvPr id="9" name="Text 7"/>
+          <p:cNvSpPr txBox="1"/>
+          <p:nvPr/>
+        </p:nvSpPr>
+        <p:spPr>
+          <a:xfrm>
+            <a:off x="548640" y="3429000"/>
+            <a:ext cx="3291840" cy="640080"/>
+          </a:xfrm>
+          <a:prstGeom prst="rect">
+            <a:avLst/>
+          </a:prstGeom>
+          <a:noFill/>
+          <a:ln/>
+        </p:spPr>
+        <p:txBody>
+          <a:bodyPr wrap="square" lIns="0" tIns="0" rIns="0" bIns="0" rtlCol="0" anchor="t"/>
+          <a:lstStyle/>
+          <a:p>
+            <a:pPr indent="0" marL="0">
+              <a:buNone/>
+            </a:pPr>
+            <a:r>
+              <a:rPr lang="en-US" sz="1300" b="1" dirty="0">
+                <a:solidFill>
+                  <a:schemeClr val="tx2"/>
+                </a:solidFill>
+              </a:rPr>
+              <a:t>Government of Canada</a:t>
+            </a:r>
+            <a:endParaRPr lang="en-US" sz="1300" dirty="0"/>
+          </a:p>
+        </p:txBody>
+      </p:sp>
+      <p:sp>
+        <p:nvSpPr>
+          <p:cNvPr id="10" name="Text 8"/>
+          <p:cNvSpPr txBox="1"/>
+          <p:nvPr/>
+        </p:nvSpPr>
+        <p:spPr>
+          <a:xfrm>
+            <a:off x="4023360" y="3429000"/>
+            <a:ext cx="7589520" cy="640080"/>
+          </a:xfrm>
+          <a:prstGeom prst="rect">
+            <a:avLst/>
+          </a:prstGeom>
+          <a:noFill/>
+          <a:ln/>
+        </p:spPr>
+        <p:txBody>
+          <a:bodyPr wrap="square" lIns="0" tIns="0" rIns="0" bIns="0" rtlCol="0" anchor="t"/>
+          <a:lstStyle/>
+          <a:p>
+            <a:pPr indent="0" marL="0">
+              <a:buNone/>
+            </a:pPr>
+            <a:r>
+              <a:rPr lang="en-US" sz="1300" dirty="0">
+                <a:solidFill>
+                  <a:schemeClr val="tx1"/>
+                </a:solidFill>
+              </a:rPr>
+              <a:t>AI Strategy for the Federal Public Service 2025–2027. canada.ca/en/government/system/digital-government/digital-government-innovations/responsible-use-ai</a:t>
+            </a:r>
+            <a:endParaRPr lang="en-US" sz="1300" dirty="0"/>
+          </a:p>
+        </p:txBody>
+      </p:sp>
+      <p:sp>
+        <p:nvSpPr>
+          <p:cNvPr id="11" name="Text 9"/>
+          <p:cNvSpPr txBox="1"/>
+          <p:nvPr/>
+        </p:nvSpPr>
+        <p:spPr>
+          <a:xfrm>
+            <a:off x="548640" y="4114800"/>
+            <a:ext cx="3291840" cy="640080"/>
+          </a:xfrm>
+          <a:prstGeom prst="rect">
+            <a:avLst/>
+          </a:prstGeom>
+          <a:noFill/>
+          <a:ln/>
+        </p:spPr>
+        <p:txBody>
+          <a:bodyPr wrap="square" lIns="0" tIns="0" rIns="0" bIns="0" rtlCol="0" anchor="t"/>
+          <a:lstStyle/>
+          <a:p>
+            <a:pPr indent="0" marL="0">
+              <a:buNone/>
+            </a:pPr>
+            <a:r>
+              <a:rPr lang="en-US" sz="1300" b="1" dirty="0">
+                <a:solidFill>
+                  <a:schemeClr val="tx2"/>
+                </a:solidFill>
+              </a:rPr>
+              <a:t>BC Energy Regulator</a:t>
+            </a:r>
+            <a:endParaRPr lang="en-US" sz="1300" dirty="0"/>
+          </a:p>
+        </p:txBody>
+      </p:sp>
+      <p:sp>
+        <p:nvSpPr>
+          <p:cNvPr id="12" name="Text 10"/>
+          <p:cNvSpPr txBox="1"/>
+          <p:nvPr/>
+        </p:nvSpPr>
+        <p:spPr>
+          <a:xfrm>
+            <a:off x="4023360" y="4114800"/>
+            <a:ext cx="7589520" cy="640080"/>
+          </a:xfrm>
+          <a:prstGeom prst="rect">
+            <a:avLst/>
+          </a:prstGeom>
+          <a:noFill/>
+          <a:ln/>
+        </p:spPr>
+        <p:txBody>
+          <a:bodyPr wrap="square" lIns="0" tIns="0" rIns="0" bIns="0" rtlCol="0" anchor="t"/>
+          <a:lstStyle/>
+          <a:p>
+            <a:pPr indent="0" marL="0">
+              <a:buNone/>
+            </a:pPr>
+            <a:r>
+              <a:rPr lang="en-US" sz="1300" dirty="0">
+                <a:solidFill>
+                  <a:schemeClr val="tx1"/>
+                </a:solidFill>
+              </a:rPr>
+              <a:t>AI enhancement services for permit automation, CanadaBuys tender BC231865, July 2026.</a:t>
+            </a:r>
+            <a:endParaRPr lang="en-US" sz="1300" dirty="0"/>
+          </a:p>
+        </p:txBody>
+      </p:sp>
+      <p:sp>
+        <p:nvSpPr>
+          <p:cNvPr id="13" name="Text 11"/>
+          <p:cNvSpPr txBox="1"/>
+          <p:nvPr/>
+        </p:nvSpPr>
+        <p:spPr>
+          <a:xfrm>
+            <a:off x="548640" y="4800600"/>
+            <a:ext cx="3291840" cy="640080"/>
+          </a:xfrm>
+          <a:prstGeom prst="rect">
+            <a:avLst/>
+          </a:prstGeom>
+          <a:noFill/>
+          <a:ln/>
+        </p:spPr>
+        <p:txBody>
+          <a:bodyPr wrap="square" lIns="0" tIns="0" rIns="0" bIns="0" rtlCol="0" anchor="t"/>
+          <a:lstStyle/>
+          <a:p>
+            <a:pPr indent="0" marL="0">
+              <a:buNone/>
+            </a:pPr>
+            <a:r>
+              <a:rPr lang="en-US" sz="1300" b="1" dirty="0">
+                <a:solidFill>
+                  <a:schemeClr val="tx2"/>
+                </a:solidFill>
+              </a:rPr>
+              <a:t>Alberta Energy Regulator</a:t>
+            </a:r>
+            <a:endParaRPr lang="en-US" sz="1300" dirty="0"/>
+          </a:p>
+        </p:txBody>
+      </p:sp>
+      <p:sp>
+        <p:nvSpPr>
+          <p:cNvPr id="14" name="Text 12"/>
+          <p:cNvSpPr txBox="1"/>
+          <p:nvPr/>
+        </p:nvSpPr>
+        <p:spPr>
+          <a:xfrm>
+            <a:off x="4023360" y="4800600"/>
+            <a:ext cx="7589520" cy="640080"/>
+          </a:xfrm>
+          <a:prstGeom prst="rect">
+            <a:avLst/>
+          </a:prstGeom>
+          <a:noFill/>
+          <a:ln/>
+        </p:spPr>
+        <p:txBody>
+          <a:bodyPr wrap="square" lIns="0" tIns="0" rIns="0" bIns="0" rtlCol="0" anchor="t"/>
+          <a:lstStyle/>
+          <a:p>
+            <a:pPr indent="0" marL="0">
+              <a:buNone/>
+            </a:pPr>
+            <a:r>
+              <a:rPr lang="en-US" sz="1300" dirty="0">
+                <a:solidFill>
+                  <a:schemeClr val="tx1"/>
+                </a:solidFill>
+              </a:rPr>
+              <a:t>OneStop results as reported by IT World Canada (itbusiness.ca), citing the AER 2017/18 annual report.</a:t>
+            </a:r>
+            <a:endParaRPr lang="en-US" sz="1300" dirty="0"/>
+          </a:p>
+        </p:txBody>
+      </p:sp>
+      <p:sp>
+        <p:nvSpPr>
+          <p:cNvPr id="15" name="Text 13"/>
+          <p:cNvSpPr txBox="1"/>
+          <p:nvPr/>
+        </p:nvSpPr>
+        <p:spPr>
+          <a:xfrm>
+            <a:off x="548640" y="5486400"/>
+            <a:ext cx="3291840" cy="640080"/>
+          </a:xfrm>
+          <a:prstGeom prst="rect">
+            <a:avLst/>
+          </a:prstGeom>
+          <a:noFill/>
+          <a:ln/>
+        </p:spPr>
+        <p:txBody>
+          <a:bodyPr wrap="square" lIns="0" tIns="0" rIns="0" bIns="0" rtlCol="0" anchor="t"/>
+          <a:lstStyle/>
+          <a:p>
+            <a:pPr indent="0" marL="0">
+              <a:buNone/>
+            </a:pPr>
+            <a:r>
+              <a:rPr lang="en-US" sz="1300" b="1" dirty="0">
+                <a:solidFill>
+                  <a:schemeClr val="tx2"/>
+                </a:solidFill>
+              </a:rPr>
+              <a:t>Canada Energy Regulator</a:t>
+            </a:r>
+            <a:endParaRPr lang="en-US" sz="1300" dirty="0"/>
+          </a:p>
+        </p:txBody>
+      </p:sp>
+      <p:sp>
+        <p:nvSpPr>
+          <p:cNvPr id="16" name="Text 14"/>
+          <p:cNvSpPr txBox="1"/>
+          <p:nvPr/>
+        </p:nvSpPr>
+        <p:spPr>
+          <a:xfrm>
+            <a:off x="4023360" y="5486400"/>
+            <a:ext cx="7589520" cy="640080"/>
+          </a:xfrm>
+          <a:prstGeom prst="rect">
+            <a:avLst/>
+          </a:prstGeom>
+          <a:noFill/>
+          <a:ln/>
+        </p:spPr>
+        <p:txBody>
+          <a:bodyPr wrap="square" lIns="0" tIns="0" rIns="0" bIns="0" rtlCol="0" anchor="t"/>
+          <a:lstStyle/>
+          <a:p>
+            <a:pPr indent="0" marL="0">
+              <a:buNone/>
+            </a:pPr>
+            <a:r>
+              <a:rPr lang="en-US" sz="1300" dirty="0">
+                <a:solidFill>
+                  <a:schemeClr val="tx1"/>
+                </a:solidFill>
+              </a:rPr>
+              <a:t>Filer’s Guide to Electronic Submission (June 2025); Filing Manual, chapter 1 (July 2025); Strategic Plan 2024–2027; Rules of Practice and Procedure review (2024–).</a:t>
+            </a:r>
+            <a:endParaRPr lang="en-US" sz="1300" dirty="0"/>
+          </a:p>
+        </p:txBody>
+      </p:sp>
+      <p:sp>
+        <p:nvSpPr>
+          <p:cNvPr id="25" name="Slide Number Placeholder 0"/>
+          <p:cNvSpPr>
+            <a:spLocks noGrp="1"/>
+          </p:cNvSpPr>
+          <p:nvPr>
+            <p:ph type="sldNum" sz="quarter" idx="4294967295"/>
+          </p:nvPr>
+        </p:nvSpPr>
+        <p:spPr>
+          <a:xfrm>
+            <a:off x="11155680" y="6400800"/>
+            <a:ext cx="457200" cy="274320"/>
+          </a:xfrm>
+          <a:prstGeom prst="rect">
+            <a:avLst/>
+          </a:prstGeom>
+          <a:extLst>
+            <a:ext uri="{C572A759-6A51-4108-AA02-DFA0A04FC94B}">
+              <ma14:wrappingTextBoxFlag xmlns:ma14="http://schemas.microsoft.com/office/mac/drawingml/2011/main" val="0"/>
+            </a:ext>
+          </a:extLst>
+        </p:spPr>
+        <p:txBody>
+          <a:bodyPr/>
+          <a:lstStyle>
+            <a:lvl1pPr>
+              <a:defRPr sz="1000">
+                <a:solidFill>
+                  <a:schemeClr val="accent3"/>
+                </a:solidFill>
+              </a:defRPr>
+            </a:lvl1pPr>
+          </a:lstStyle>
+          <a:p>
+            <a:pPr algn="r"/>
+            <a:fld id="{F7021451-1387-4CA6-816F-3879F97B5CBC}" type="slidenum">
+              <a:rPr b="0" lang="en-US"/>
+              <a:t>15</a:t>
             </a:fld>
             <a:endParaRPr lang="en-US"/>
           </a:p>
@@ -10773,7 +11551,7 @@
                   <a:schemeClr val="tx2"/>
                 </a:solidFill>
               </a:rPr>
-              <a:t>Ask for files a computer can read</a:t>
+              <a:t>Our biggest filing is a printed spreadsheet</a:t>
             </a:r>
             <a:endParaRPr lang="en-US" sz="3400" dirty="0"/>
           </a:p>
@@ -10788,13 +11566,15 @@
         <p:spPr>
           <a:xfrm>
             <a:off x="548640" y="1463040"/>
-            <a:ext cx="777240" cy="777240"/>
-          </a:xfrm>
-          <a:prstGeom prst="ellipse">
-            <a:avLst/>
+            <a:ext cx="5394960" cy="3566160"/>
+          </a:xfrm>
+          <a:prstGeom prst="roundRect">
+            <a:avLst>
+              <a:gd name="adj" fmla="val 3846"/>
+            </a:avLst>
           </a:prstGeom>
           <a:solidFill>
-            <a:schemeClr val="tx2"/>
+            <a:schemeClr val="bg2"/>
           </a:solidFill>
           <a:ln/>
         </p:spPr>
@@ -10815,8 +11595,8 @@
         </p:blipFill>
         <p:spPr>
           <a:xfrm>
-            <a:off x="731520" y="1645920"/>
-            <a:ext cx="411480" cy="411480"/>
+            <a:off x="868680" y="1783080"/>
+            <a:ext cx="731520" cy="731520"/>
           </a:xfrm>
           <a:prstGeom prst="rect">
             <a:avLst/>
@@ -10831,8 +11611,8 @@
         </p:nvSpPr>
         <p:spPr>
           <a:xfrm>
-            <a:off x="1600200" y="1417320"/>
-            <a:ext cx="9966960" cy="411480"/>
+            <a:off x="1828800" y="1828800"/>
+            <a:ext cx="3840480" cy="640080"/>
           </a:xfrm>
           <a:prstGeom prst="rect">
             <a:avLst/>
@@ -10848,14 +11628,14 @@
               <a:buNone/>
             </a:pPr>
             <a:r>
-              <a:rPr lang="en-US" sz="2000" b="1" dirty="0">
+              <a:rPr lang="en-US" sz="2400" b="1" dirty="0">
                 <a:solidFill>
                   <a:schemeClr val="tx2"/>
                 </a:solidFill>
               </a:rPr>
-              <a:t>Save as PDF — do not print and scan</a:t>
-            </a:r>
-            <a:endParaRPr lang="en-US" sz="2000" dirty="0"/>
+              <a:t>As it was filed</a:t>
+            </a:r>
+            <a:endParaRPr lang="en-US" sz="2400" dirty="0"/>
           </a:p>
         </p:txBody>
       </p:sp>
@@ -10867,8 +11647,47 @@
         </p:nvSpPr>
         <p:spPr>
           <a:xfrm>
-            <a:off x="1600200" y="1828800"/>
-            <a:ext cx="9966960" cy="502920"/>
+            <a:off x="868680" y="2743200"/>
+            <a:ext cx="4754880" cy="914400"/>
+          </a:xfrm>
+          <a:prstGeom prst="rect">
+            <a:avLst/>
+          </a:prstGeom>
+          <a:noFill/>
+          <a:ln/>
+        </p:spPr>
+        <p:txBody>
+          <a:bodyPr wrap="square" lIns="0" tIns="0" rIns="0" bIns="0" rtlCol="0" anchor="ctr"/>
+          <a:lstStyle/>
+          <a:p>
+            <a:pPr indent="0" marL="0">
+              <a:buNone/>
+            </a:pPr>
+            <a:r>
+              <a:rPr lang="en-US" sz="4400" b="1" dirty="0">
+                <a:solidFill>
+                  <a:schemeClr val="tx2"/>
+                </a:solidFill>
+                <a:latin typeface="Cambria" pitchFamily="34" charset="0"/>
+                <a:ea typeface="Cambria" pitchFamily="34" charset="-122"/>
+                <a:cs typeface="Cambria" pitchFamily="34" charset="-120"/>
+              </a:rPr>
+              <a:t>11,563 pages</a:t>
+            </a:r>
+            <a:endParaRPr lang="en-US" sz="4400" dirty="0"/>
+          </a:p>
+        </p:txBody>
+      </p:sp>
+      <p:sp>
+        <p:nvSpPr>
+          <p:cNvPr id="7" name="Text 4"/>
+          <p:cNvSpPr txBox="1"/>
+          <p:nvPr/>
+        </p:nvSpPr>
+        <p:spPr>
+          <a:xfrm>
+            <a:off x="868680" y="3657600"/>
+            <a:ext cx="4754880" cy="685800"/>
           </a:xfrm>
           <a:prstGeom prst="rect">
             <a:avLst/>
@@ -10889,7 +11708,7 @@
                   <a:schemeClr val="tx1"/>
                 </a:solidFill>
               </a:rPr>
-              <a:t>Filers keep their documents digital from start to finish.</a:t>
+              <a:t>of weather readings, one reading a minute for over a year</a:t>
             </a:r>
             <a:endParaRPr lang="en-US" sz="1600" dirty="0"/>
           </a:p>
@@ -10897,17 +11716,19 @@
       </p:sp>
       <p:sp>
         <p:nvSpPr>
-          <p:cNvPr id="7" name="Shape 4"/>
+          <p:cNvPr id="8" name="Shape 5"/>
           <p:cNvSpPr/>
           <p:nvPr/>
         </p:nvSpPr>
         <p:spPr>
           <a:xfrm>
-            <a:off x="548640" y="2423160"/>
-            <a:ext cx="777240" cy="777240"/>
-          </a:xfrm>
-          <a:prstGeom prst="ellipse">
-            <a:avLst/>
+            <a:off x="6217920" y="1463040"/>
+            <a:ext cx="5394960" cy="3566160"/>
+          </a:xfrm>
+          <a:prstGeom prst="roundRect">
+            <a:avLst>
+              <a:gd name="adj" fmla="val 3846"/>
+            </a:avLst>
           </a:prstGeom>
           <a:solidFill>
             <a:schemeClr val="tx2"/>
@@ -10917,7 +11738,7 @@
       </p:sp>
       <p:pic>
         <p:nvPicPr>
-          <p:cNvPr id="8" name="Image 1" descr="preencoded.png">    </p:cNvPr>
+          <p:cNvPr id="9" name="Image 1" descr="preencoded.png">    </p:cNvPr>
           <p:cNvPicPr>
             <a:picLocks noChangeAspect="1"/>
           </p:cNvPicPr>
@@ -10931,8 +11752,8 @@
         </p:blipFill>
         <p:spPr>
           <a:xfrm>
-            <a:off x="731520" y="2606040"/>
-            <a:ext cx="411480" cy="411480"/>
+            <a:off x="6537960" y="1783080"/>
+            <a:ext cx="731520" cy="731520"/>
           </a:xfrm>
           <a:prstGeom prst="rect">
             <a:avLst/>
@@ -10941,14 +11762,14 @@
       </p:pic>
       <p:sp>
         <p:nvSpPr>
-          <p:cNvPr id="9" name="Text 5"/>
-          <p:cNvSpPr txBox="1"/>
-          <p:nvPr/>
-        </p:nvSpPr>
-        <p:spPr>
-          <a:xfrm>
-            <a:off x="1600200" y="2377440"/>
-            <a:ext cx="9966960" cy="411480"/>
+          <p:cNvPr id="10" name="Text 6"/>
+          <p:cNvSpPr txBox="1"/>
+          <p:nvPr/>
+        </p:nvSpPr>
+        <p:spPr>
+          <a:xfrm>
+            <a:off x="7498080" y="1828800"/>
+            <a:ext cx="3840480" cy="640080"/>
           </a:xfrm>
           <a:prstGeom prst="rect">
             <a:avLst/>
@@ -10964,27 +11785,66 @@
               <a:buNone/>
             </a:pPr>
             <a:r>
-              <a:rPr lang="en-US" sz="2000" b="1" dirty="0">
-                <a:solidFill>
-                  <a:schemeClr val="tx2"/>
-                </a:solidFill>
-              </a:rPr>
-              <a:t>Sign digitally</a:t>
-            </a:r>
-            <a:endParaRPr lang="en-US" sz="2000" dirty="0"/>
-          </a:p>
-        </p:txBody>
-      </p:sp>
-      <p:sp>
-        <p:nvSpPr>
-          <p:cNvPr id="10" name="Text 6"/>
-          <p:cNvSpPr txBox="1"/>
-          <p:nvPr/>
-        </p:nvSpPr>
-        <p:spPr>
-          <a:xfrm>
-            <a:off x="1600200" y="2788920"/>
-            <a:ext cx="9966960" cy="502920"/>
+              <a:rPr lang="en-US" sz="2400" b="1" dirty="0">
+                <a:solidFill>
+                  <a:schemeClr val="bg1"/>
+                </a:solidFill>
+              </a:rPr>
+              <a:t>As it was made</a:t>
+            </a:r>
+            <a:endParaRPr lang="en-US" sz="2400" dirty="0"/>
+          </a:p>
+        </p:txBody>
+      </p:sp>
+      <p:sp>
+        <p:nvSpPr>
+          <p:cNvPr id="11" name="Text 7"/>
+          <p:cNvSpPr txBox="1"/>
+          <p:nvPr/>
+        </p:nvSpPr>
+        <p:spPr>
+          <a:xfrm>
+            <a:off x="6537960" y="2743200"/>
+            <a:ext cx="4754880" cy="914400"/>
+          </a:xfrm>
+          <a:prstGeom prst="rect">
+            <a:avLst/>
+          </a:prstGeom>
+          <a:noFill/>
+          <a:ln/>
+        </p:spPr>
+        <p:txBody>
+          <a:bodyPr wrap="square" lIns="0" tIns="0" rIns="0" bIns="0" rtlCol="0" anchor="ctr"/>
+          <a:lstStyle/>
+          <a:p>
+            <a:pPr indent="0" marL="0">
+              <a:buNone/>
+            </a:pPr>
+            <a:r>
+              <a:rPr lang="en-US" sz="4400" b="1" dirty="0">
+                <a:solidFill>
+                  <a:schemeClr val="accent1"/>
+                </a:solidFill>
+                <a:latin typeface="Cambria" pitchFamily="34" charset="0"/>
+                <a:ea typeface="Cambria" pitchFamily="34" charset="-122"/>
+                <a:cs typeface="Cambria" pitchFamily="34" charset="-120"/>
+              </a:rPr>
+              <a:t>1 spreadsheet</a:t>
+            </a:r>
+            <a:endParaRPr lang="en-US" sz="4400" dirty="0"/>
+          </a:p>
+        </p:txBody>
+      </p:sp>
+      <p:sp>
+        <p:nvSpPr>
+          <p:cNvPr id="12" name="Text 8"/>
+          <p:cNvSpPr txBox="1"/>
+          <p:nvPr/>
+        </p:nvSpPr>
+        <p:spPr>
+          <a:xfrm>
+            <a:off x="6537960" y="3657600"/>
+            <a:ext cx="4754880" cy="685800"/>
           </a:xfrm>
           <a:prstGeom prst="rect">
             <a:avLst/>
@@ -11002,360 +11862,48 @@
             <a:r>
               <a:rPr lang="en-US" sz="1600" dirty="0">
                 <a:solidFill>
+                  <a:schemeClr val="bg2"/>
+                </a:solidFill>
+              </a:rPr>
+              <a:t>a small file a computer reads exactly, in seconds</a:t>
+            </a:r>
+            <a:endParaRPr lang="en-US" sz="1600" dirty="0"/>
+          </a:p>
+        </p:txBody>
+      </p:sp>
+      <p:sp>
+        <p:nvSpPr>
+          <p:cNvPr id="13" name="Text 9"/>
+          <p:cNvSpPr txBox="1"/>
+          <p:nvPr/>
+        </p:nvSpPr>
+        <p:spPr>
+          <a:xfrm>
+            <a:off x="548640" y="5257800"/>
+            <a:ext cx="11064240" cy="1005840"/>
+          </a:xfrm>
+          <a:prstGeom prst="rect">
+            <a:avLst/>
+          </a:prstGeom>
+          <a:noFill/>
+          <a:ln/>
+        </p:spPr>
+        <p:txBody>
+          <a:bodyPr wrap="square" lIns="0" tIns="0" rIns="0" bIns="0" rtlCol="0" anchor="t"/>
+          <a:lstStyle/>
+          <a:p>
+            <a:pPr indent="0" marL="0">
+              <a:buNone/>
+            </a:pPr>
+            <a:r>
+              <a:rPr lang="en-US" sz="1800" dirty="0">
+                <a:solidFill>
                   <a:schemeClr val="tx1"/>
                 </a:solidFill>
               </a:rPr>
-              <a:t>Including sworn statements, so signing no longer turns documents into pictures.</a:t>
-            </a:r>
-            <a:endParaRPr lang="en-US" sz="1600" dirty="0"/>
-          </a:p>
-        </p:txBody>
-      </p:sp>
-      <p:sp>
-        <p:nvSpPr>
-          <p:cNvPr id="11" name="Shape 7"/>
-          <p:cNvSpPr/>
-          <p:nvPr/>
-        </p:nvSpPr>
-        <p:spPr>
-          <a:xfrm>
-            <a:off x="548640" y="3383280"/>
-            <a:ext cx="777240" cy="777240"/>
-          </a:xfrm>
-          <a:prstGeom prst="ellipse">
-            <a:avLst/>
-          </a:prstGeom>
-          <a:solidFill>
-            <a:schemeClr val="tx2"/>
-          </a:solidFill>
-          <a:ln/>
-        </p:spPr>
-      </p:sp>
-      <p:pic>
-        <p:nvPicPr>
-          <p:cNvPr id="12" name="Image 2" descr="preencoded.png">    </p:cNvPr>
-          <p:cNvPicPr>
-            <a:picLocks noChangeAspect="1"/>
-          </p:cNvPicPr>
-          <p:nvPr/>
-        </p:nvPicPr>
-        <p:blipFill>
-          <a:blip r:embed="rId3"/>
-          <a:stretch>
-            <a:fillRect/>
-          </a:stretch>
-        </p:blipFill>
-        <p:spPr>
-          <a:xfrm>
-            <a:off x="731520" y="3566160"/>
-            <a:ext cx="411480" cy="411480"/>
-          </a:xfrm>
-          <a:prstGeom prst="rect">
-            <a:avLst/>
-          </a:prstGeom>
-        </p:spPr>
-      </p:pic>
-      <p:sp>
-        <p:nvSpPr>
-          <p:cNvPr id="13" name="Text 8"/>
-          <p:cNvSpPr txBox="1"/>
-          <p:nvPr/>
-        </p:nvSpPr>
-        <p:spPr>
-          <a:xfrm>
-            <a:off x="1600200" y="3337560"/>
-            <a:ext cx="9966960" cy="411480"/>
-          </a:xfrm>
-          <a:prstGeom prst="rect">
-            <a:avLst/>
-          </a:prstGeom>
-          <a:noFill/>
-          <a:ln/>
-        </p:spPr>
-        <p:txBody>
-          <a:bodyPr wrap="square" lIns="0" tIns="0" rIns="0" bIns="0" rtlCol="0" anchor="ctr"/>
-          <a:lstStyle/>
-          <a:p>
-            <a:pPr indent="0" marL="0">
-              <a:buNone/>
-            </a:pPr>
-            <a:r>
-              <a:rPr lang="en-US" sz="2000" b="1" dirty="0">
-                <a:solidFill>
-                  <a:schemeClr val="tx2"/>
-                </a:solidFill>
-              </a:rPr>
-              <a:t>Send data as data</a:t>
-            </a:r>
-            <a:endParaRPr lang="en-US" sz="2000" dirty="0"/>
-          </a:p>
-        </p:txBody>
-      </p:sp>
-      <p:sp>
-        <p:nvSpPr>
-          <p:cNvPr id="14" name="Text 9"/>
-          <p:cNvSpPr txBox="1"/>
-          <p:nvPr/>
-        </p:nvSpPr>
-        <p:spPr>
-          <a:xfrm>
-            <a:off x="1600200" y="3749040"/>
-            <a:ext cx="9966960" cy="502920"/>
-          </a:xfrm>
-          <a:prstGeom prst="rect">
-            <a:avLst/>
-          </a:prstGeom>
-          <a:noFill/>
-          <a:ln/>
-        </p:spPr>
-        <p:txBody>
-          <a:bodyPr wrap="square" lIns="0" tIns="0" rIns="0" bIns="0" rtlCol="0" anchor="t"/>
-          <a:lstStyle/>
-          <a:p>
-            <a:pPr indent="0" marL="0">
-              <a:buNone/>
-            </a:pPr>
-            <a:r>
-              <a:rPr lang="en-US" sz="1600" dirty="0">
-                <a:solidFill>
-                  <a:schemeClr val="tx1"/>
-                </a:solidFill>
-              </a:rPr>
-              <a:t>Tables as spreadsheets and maps as map files, alongside the document.</a:t>
-            </a:r>
-            <a:endParaRPr lang="en-US" sz="1600" dirty="0"/>
-          </a:p>
-        </p:txBody>
-      </p:sp>
-      <p:sp>
-        <p:nvSpPr>
-          <p:cNvPr id="15" name="Shape 10"/>
-          <p:cNvSpPr/>
-          <p:nvPr/>
-        </p:nvSpPr>
-        <p:spPr>
-          <a:xfrm>
-            <a:off x="548640" y="4343400"/>
-            <a:ext cx="777240" cy="777240"/>
-          </a:xfrm>
-          <a:prstGeom prst="ellipse">
-            <a:avLst/>
-          </a:prstGeom>
-          <a:solidFill>
-            <a:schemeClr val="tx2"/>
-          </a:solidFill>
-          <a:ln/>
-        </p:spPr>
-      </p:sp>
-      <p:pic>
-        <p:nvPicPr>
-          <p:cNvPr id="16" name="Image 3" descr="preencoded.png">    </p:cNvPr>
-          <p:cNvPicPr>
-            <a:picLocks noChangeAspect="1"/>
-          </p:cNvPicPr>
-          <p:nvPr/>
-        </p:nvPicPr>
-        <p:blipFill>
-          <a:blip r:embed="rId4"/>
-          <a:stretch>
-            <a:fillRect/>
-          </a:stretch>
-        </p:blipFill>
-        <p:spPr>
-          <a:xfrm>
-            <a:off x="731520" y="4526280"/>
-            <a:ext cx="411480" cy="411480"/>
-          </a:xfrm>
-          <a:prstGeom prst="rect">
-            <a:avLst/>
-          </a:prstGeom>
-        </p:spPr>
-      </p:pic>
-      <p:sp>
-        <p:nvSpPr>
-          <p:cNvPr id="17" name="Text 11"/>
-          <p:cNvSpPr txBox="1"/>
-          <p:nvPr/>
-        </p:nvSpPr>
-        <p:spPr>
-          <a:xfrm>
-            <a:off x="1600200" y="4297680"/>
-            <a:ext cx="9966960" cy="411480"/>
-          </a:xfrm>
-          <a:prstGeom prst="rect">
-            <a:avLst/>
-          </a:prstGeom>
-          <a:noFill/>
-          <a:ln/>
-        </p:spPr>
-        <p:txBody>
-          <a:bodyPr wrap="square" lIns="0" tIns="0" rIns="0" bIns="0" rtlCol="0" anchor="ctr"/>
-          <a:lstStyle/>
-          <a:p>
-            <a:pPr indent="0" marL="0">
-              <a:buNone/>
-            </a:pPr>
-            <a:r>
-              <a:rPr lang="en-US" sz="2000" b="1" dirty="0">
-                <a:solidFill>
-                  <a:schemeClr val="tx2"/>
-                </a:solidFill>
-              </a:rPr>
-              <a:t>Redact properly</a:t>
-            </a:r>
-            <a:endParaRPr lang="en-US" sz="2000" dirty="0"/>
-          </a:p>
-        </p:txBody>
-      </p:sp>
-      <p:sp>
-        <p:nvSpPr>
-          <p:cNvPr id="18" name="Text 12"/>
-          <p:cNvSpPr txBox="1"/>
-          <p:nvPr/>
-        </p:nvSpPr>
-        <p:spPr>
-          <a:xfrm>
-            <a:off x="1600200" y="4709160"/>
-            <a:ext cx="9966960" cy="502920"/>
-          </a:xfrm>
-          <a:prstGeom prst="rect">
-            <a:avLst/>
-          </a:prstGeom>
-          <a:noFill/>
-          <a:ln/>
-        </p:spPr>
-        <p:txBody>
-          <a:bodyPr wrap="square" lIns="0" tIns="0" rIns="0" bIns="0" rtlCol="0" anchor="t"/>
-          <a:lstStyle/>
-          <a:p>
-            <a:pPr indent="0" marL="0">
-              <a:buNone/>
-            </a:pPr>
-            <a:r>
-              <a:rPr lang="en-US" sz="1600" dirty="0">
-                <a:solidFill>
-                  <a:schemeClr val="tx1"/>
-                </a:solidFill>
-              </a:rPr>
-              <a:t>Use tools that remove the words, and say what was withheld.</a:t>
-            </a:r>
-            <a:endParaRPr lang="en-US" sz="1600" dirty="0"/>
-          </a:p>
-        </p:txBody>
-      </p:sp>
-      <p:sp>
-        <p:nvSpPr>
-          <p:cNvPr id="19" name="Shape 13"/>
-          <p:cNvSpPr/>
-          <p:nvPr/>
-        </p:nvSpPr>
-        <p:spPr>
-          <a:xfrm>
-            <a:off x="548640" y="5303520"/>
-            <a:ext cx="777240" cy="777240"/>
-          </a:xfrm>
-          <a:prstGeom prst="ellipse">
-            <a:avLst/>
-          </a:prstGeom>
-          <a:solidFill>
-            <a:schemeClr val="tx2"/>
-          </a:solidFill>
-          <a:ln/>
-        </p:spPr>
-      </p:sp>
-      <p:pic>
-        <p:nvPicPr>
-          <p:cNvPr id="20" name="Image 4" descr="preencoded.png">    </p:cNvPr>
-          <p:cNvPicPr>
-            <a:picLocks noChangeAspect="1"/>
-          </p:cNvPicPr>
-          <p:nvPr/>
-        </p:nvPicPr>
-        <p:blipFill>
-          <a:blip r:embed="rId5"/>
-          <a:stretch>
-            <a:fillRect/>
-          </a:stretch>
-        </p:blipFill>
-        <p:spPr>
-          <a:xfrm>
-            <a:off x="731520" y="5486400"/>
-            <a:ext cx="411480" cy="411480"/>
-          </a:xfrm>
-          <a:prstGeom prst="rect">
-            <a:avLst/>
-          </a:prstGeom>
-        </p:spPr>
-      </p:pic>
-      <p:sp>
-        <p:nvSpPr>
-          <p:cNvPr id="21" name="Text 14"/>
-          <p:cNvSpPr txBox="1"/>
-          <p:nvPr/>
-        </p:nvSpPr>
-        <p:spPr>
-          <a:xfrm>
-            <a:off x="1600200" y="5257800"/>
-            <a:ext cx="9966960" cy="411480"/>
-          </a:xfrm>
-          <a:prstGeom prst="rect">
-            <a:avLst/>
-          </a:prstGeom>
-          <a:noFill/>
-          <a:ln/>
-        </p:spPr>
-        <p:txBody>
-          <a:bodyPr wrap="square" lIns="0" tIns="0" rIns="0" bIns="0" rtlCol="0" anchor="ctr"/>
-          <a:lstStyle/>
-          <a:p>
-            <a:pPr indent="0" marL="0">
-              <a:buNone/>
-            </a:pPr>
-            <a:r>
-              <a:rPr lang="en-US" sz="2000" b="1" dirty="0">
-                <a:solidFill>
-                  <a:schemeClr val="tx2"/>
-                </a:solidFill>
-              </a:rPr>
-              <a:t>Turn on accessibility tagging</a:t>
-            </a:r>
-            <a:endParaRPr lang="en-US" sz="2000" dirty="0"/>
-          </a:p>
-        </p:txBody>
-      </p:sp>
-      <p:sp>
-        <p:nvSpPr>
-          <p:cNvPr id="22" name="Text 15"/>
-          <p:cNvSpPr txBox="1"/>
-          <p:nvPr/>
-        </p:nvSpPr>
-        <p:spPr>
-          <a:xfrm>
-            <a:off x="1600200" y="5669280"/>
-            <a:ext cx="9966960" cy="502920"/>
-          </a:xfrm>
-          <a:prstGeom prst="rect">
-            <a:avLst/>
-          </a:prstGeom>
-          <a:noFill/>
-          <a:ln/>
-        </p:spPr>
-        <p:txBody>
-          <a:bodyPr wrap="square" lIns="0" tIns="0" rIns="0" bIns="0" rtlCol="0" anchor="t"/>
-          <a:lstStyle/>
-          <a:p>
-            <a:pPr indent="0" marL="0">
-              <a:buNone/>
-            </a:pPr>
-            <a:r>
-              <a:rPr lang="en-US" sz="1600" dirty="0">
-                <a:solidFill>
-                  <a:schemeClr val="tx1"/>
-                </a:solidFill>
-              </a:rPr>
-              <a:t>The same setting that helps screen readers tells a computer what is a heading or a table.</a:t>
-            </a:r>
-            <a:endParaRPr lang="en-US" sz="1600" dirty="0"/>
+              <a:t>The same readings fill six documents and 52,000 pages — more than 1 in every 100 pages of our whole record. Reading them back takes a person about a year, and a computer about two days, to rebuild a table that was already a table.</a:t>
+            </a:r>
+            <a:endParaRPr lang="en-US" sz="1800" dirty="0"/>
           </a:p>
         </p:txBody>
       </p:sp>
